--- a/slides/05-n8n.pptx
+++ b/slides/05-n8n.pptx
@@ -1929,7 +1929,9 @@
           <a:p>
             <a:r>
               <a:rPr lang="en-US" dirty="0"/>
-              <a:t>Same habit as every deployment journey: plan and cost before creating anything. Expect roughly 25 to 35 dollars a month if left running.</a:t>
+              <a:t>Same habit as every deployment journey: plan and cost before creating anything. Expect roughly 25 to 35 dollars a month if left running.
+Full prompt:
+Plan an n8n deployment to Azure Container Apps with Bicep and azd: PostgreSQL Flexible Server for storage, /healthz for probes, and the westus region. List each Azure resource, its SKU, and the estimated monthly cost if left running. Don't create files or Azure resources yet.</a:t>
             </a:r>
             <a:endParaRPr lang="en-US" dirty="0"/>
           </a:p>
@@ -2487,12 +2489,12 @@
         </p:nvSpPr>
         <p:spPr>
           <a:xfrm>
-            <a:off x="8077200" y="152400"/>
-            <a:ext cx="482650" cy="266700"/>
+            <a:off x="8026598" y="152400"/>
+            <a:ext cx="533251" cy="279350"/>
           </a:xfrm>
           <a:prstGeom prst="roundRect">
             <a:avLst>
-              <a:gd name="adj" fmla="val 23810"/>
+              <a:gd name="adj" fmla="val 22731"/>
             </a:avLst>
           </a:prstGeom>
           <a:solidFill>
@@ -2519,8 +2521,8 @@
         </p:nvSpPr>
         <p:spPr>
           <a:xfrm>
-            <a:off x="8201863" y="219075"/>
-            <a:ext cx="233324" cy="133350"/>
+            <a:off x="8163659" y="220563"/>
+            <a:ext cx="259131" cy="142875"/>
           </a:xfrm>
           <a:prstGeom prst="rect">
             <a:avLst/>
@@ -2536,7 +2538,7 @@
               <a:buNone/>
             </a:pPr>
             <a:r>
-              <a:rPr lang="en-US" sz="900" b="1" dirty="0">
+              <a:rPr lang="en-US" sz="1000" b="1" dirty="0">
                 <a:solidFill>
                   <a:srgbClr val="FFFFFF"/>
                 </a:solidFill>
@@ -2546,7 +2548,7 @@
               </a:rPr>
               <a:t>N8N</a:t>
             </a:r>
-            <a:endParaRPr lang="en-US" sz="900" dirty="0"/>
+            <a:endParaRPr lang="en-US" sz="1000" dirty="0"/>
           </a:p>
         </p:txBody>
       </p:sp>
@@ -2615,7 +2617,7 @@
         <p:spPr>
           <a:xfrm>
             <a:off x="482501" y="1053852"/>
-            <a:ext cx="7772400" cy="152400"/>
+            <a:ext cx="7772400" cy="171450"/>
           </a:xfrm>
           <a:prstGeom prst="rect">
             <a:avLst/>
@@ -2634,7 +2636,7 @@
               <a:buNone/>
             </a:pPr>
             <a:r>
-              <a:rPr lang="en-US" sz="1100" b="1" dirty="0">
+              <a:rPr lang="en-US" sz="1200" b="1" dirty="0">
                 <a:solidFill>
                   <a:srgbClr val="1A7F37"/>
                 </a:solidFill>
@@ -2644,7 +2646,7 @@
               </a:rPr>
               <a:t>AGENTIC JOURNEY · GITHUB AND AZURE</a:t>
             </a:r>
-            <a:endParaRPr lang="en-US" sz="1100" dirty="0"/>
+            <a:endParaRPr lang="en-US" sz="1200" dirty="0"/>
           </a:p>
         </p:txBody>
       </p:sp>
@@ -2656,7 +2658,7 @@
         </p:nvSpPr>
         <p:spPr>
           <a:xfrm>
-            <a:off x="482501" y="1282452"/>
+            <a:off x="482501" y="1301502"/>
             <a:ext cx="7772400" cy="584150"/>
           </a:xfrm>
           <a:prstGeom prst="rect">
@@ -2698,8 +2700,8 @@
         </p:nvSpPr>
         <p:spPr>
           <a:xfrm>
-            <a:off x="482501" y="2019002"/>
-            <a:ext cx="7772400" cy="558701"/>
+            <a:off x="482501" y="2038052"/>
+            <a:ext cx="7772400" cy="584299"/>
           </a:xfrm>
           <a:prstGeom prst="rect">
             <a:avLst/>
@@ -2713,7 +2715,7 @@
           <a:p>
             <a:pPr algn="l" indent="0" marL="0">
               <a:lnSpc>
-                <a:spcPts val="2200"/>
+                <a:spcPts val="2300"/>
               </a:lnSpc>
               <a:spcBef>
                 <a:spcPts val="1200"/>
@@ -2721,7 +2723,7 @@
               <a:buNone/>
             </a:pPr>
             <a:r>
-              <a:rPr lang="en-US" sz="1600" dirty="0">
+              <a:rPr lang="en-US" sz="1700" dirty="0">
                 <a:solidFill>
                   <a:srgbClr val="59636E"/>
                 </a:solidFill>
@@ -2731,7 +2733,7 @@
               </a:rPr>
               <a:t>What if an agent could deploy a production-style workflow platform to Azure, then build and run your first workflow?</a:t>
             </a:r>
-            <a:endParaRPr lang="en-US" sz="1600" dirty="0"/>
+            <a:endParaRPr lang="en-US" sz="1700" dirty="0"/>
           </a:p>
         </p:txBody>
       </p:sp>
@@ -2743,12 +2745,12 @@
         </p:nvSpPr>
         <p:spPr>
           <a:xfrm>
-            <a:off x="482501" y="3022550"/>
-            <a:ext cx="355550" cy="355550"/>
+            <a:off x="482501" y="2946350"/>
+            <a:ext cx="431750" cy="431750"/>
           </a:xfrm>
           <a:prstGeom prst="roundRect">
             <a:avLst>
-              <a:gd name="adj" fmla="val 21432"/>
+              <a:gd name="adj" fmla="val 17649"/>
             </a:avLst>
           </a:prstGeom>
           <a:solidFill>
@@ -2783,8 +2785,8 @@
         </p:blipFill>
         <p:spPr>
           <a:xfrm>
-            <a:off x="558701" y="3098750"/>
-            <a:ext cx="203150" cy="203150"/>
+            <a:off x="577751" y="3041600"/>
+            <a:ext cx="241250" cy="241250"/>
           </a:xfrm>
           <a:prstGeom prst="rect">
             <a:avLst/>
@@ -2799,8 +2801,8 @@
         </p:nvSpPr>
         <p:spPr>
           <a:xfrm>
-            <a:off x="952351" y="3051125"/>
-            <a:ext cx="812155" cy="114300"/>
+            <a:off x="1028551" y="2973288"/>
+            <a:ext cx="947109" cy="142875"/>
           </a:xfrm>
           <a:prstGeom prst="rect">
             <a:avLst/>
@@ -2816,7 +2818,7 @@
               <a:buNone/>
             </a:pPr>
             <a:r>
-              <a:rPr lang="en-US" sz="850" b="1" dirty="0">
+              <a:rPr lang="en-US" sz="1000" b="1" dirty="0">
                 <a:solidFill>
                   <a:srgbClr val="59636E"/>
                 </a:solidFill>
@@ -2826,7 +2828,7 @@
               </a:rPr>
               <a:t>SESSION</a:t>
             </a:r>
-            <a:endParaRPr lang="en-US" sz="850" dirty="0"/>
+            <a:endParaRPr lang="en-US" sz="1000" dirty="0"/>
           </a:p>
         </p:txBody>
       </p:sp>
@@ -2838,8 +2840,8 @@
         </p:nvSpPr>
         <p:spPr>
           <a:xfrm>
-            <a:off x="952351" y="3178076"/>
-            <a:ext cx="812155" cy="171450"/>
+            <a:off x="1028551" y="3141464"/>
+            <a:ext cx="947109" cy="209550"/>
           </a:xfrm>
           <a:prstGeom prst="rect">
             <a:avLst/>
@@ -2855,7 +2857,7 @@
               <a:buNone/>
             </a:pPr>
             <a:r>
-              <a:rPr lang="en-US" sz="1200" b="1" dirty="0">
+              <a:rPr lang="en-US" sz="1400" b="1" dirty="0">
                 <a:solidFill>
                   <a:srgbClr val="1F2328"/>
                 </a:solidFill>
@@ -2865,7 +2867,7 @@
               </a:rPr>
               <a:t>60 minutes</a:t>
             </a:r>
-            <a:endParaRPr lang="en-US" sz="1200" dirty="0"/>
+            <a:endParaRPr lang="en-US" sz="1400" dirty="0"/>
           </a:p>
         </p:txBody>
       </p:sp>
@@ -2877,12 +2879,12 @@
         </p:nvSpPr>
         <p:spPr>
           <a:xfrm>
-            <a:off x="2129582" y="3022550"/>
-            <a:ext cx="355550" cy="355550"/>
+            <a:off x="2312640" y="2946350"/>
+            <a:ext cx="431750" cy="431750"/>
           </a:xfrm>
           <a:prstGeom prst="roundRect">
             <a:avLst>
-              <a:gd name="adj" fmla="val 21432"/>
+              <a:gd name="adj" fmla="val 17649"/>
             </a:avLst>
           </a:prstGeom>
           <a:solidFill>
@@ -2917,8 +2919,8 @@
         </p:blipFill>
         <p:spPr>
           <a:xfrm>
-            <a:off x="2205782" y="3098750"/>
-            <a:ext cx="203150" cy="203150"/>
+            <a:off x="2407890" y="3041600"/>
+            <a:ext cx="241250" cy="241250"/>
           </a:xfrm>
           <a:prstGeom prst="rect">
             <a:avLst/>
@@ -2933,8 +2935,8 @@
         </p:nvSpPr>
         <p:spPr>
           <a:xfrm>
-            <a:off x="2599432" y="3051125"/>
-            <a:ext cx="1284268" cy="114300"/>
+            <a:off x="2858691" y="2973288"/>
+            <a:ext cx="1510912" cy="142875"/>
           </a:xfrm>
           <a:prstGeom prst="rect">
             <a:avLst/>
@@ -2950,7 +2952,7 @@
               <a:buNone/>
             </a:pPr>
             <a:r>
-              <a:rPr lang="en-US" sz="850" b="1" dirty="0">
+              <a:rPr lang="en-US" sz="1000" b="1" dirty="0">
                 <a:solidFill>
                   <a:srgbClr val="59636E"/>
                 </a:solidFill>
@@ -2960,7 +2962,7 @@
               </a:rPr>
               <a:t>COST IF LEFT RUNNING</a:t>
             </a:r>
-            <a:endParaRPr lang="en-US" sz="850" dirty="0"/>
+            <a:endParaRPr lang="en-US" sz="1000" dirty="0"/>
           </a:p>
         </p:txBody>
       </p:sp>
@@ -2972,8 +2974,8 @@
         </p:nvSpPr>
         <p:spPr>
           <a:xfrm>
-            <a:off x="2599432" y="3178076"/>
-            <a:ext cx="1284268" cy="171450"/>
+            <a:off x="2858691" y="3141464"/>
+            <a:ext cx="1510912" cy="209550"/>
           </a:xfrm>
           <a:prstGeom prst="rect">
             <a:avLst/>
@@ -2989,7 +2991,7 @@
               <a:buNone/>
             </a:pPr>
             <a:r>
-              <a:rPr lang="en-US" sz="1200" b="1" dirty="0">
+              <a:rPr lang="en-US" sz="1400" b="1" dirty="0">
                 <a:solidFill>
                   <a:srgbClr val="1F2328"/>
                 </a:solidFill>
@@ -2999,7 +3001,7 @@
               </a:rPr>
               <a:t>~$25–35/month</a:t>
             </a:r>
-            <a:endParaRPr lang="en-US" sz="1200" dirty="0"/>
+            <a:endParaRPr lang="en-US" sz="1400" dirty="0"/>
           </a:p>
         </p:txBody>
       </p:sp>
@@ -3011,12 +3013,12 @@
         </p:nvSpPr>
         <p:spPr>
           <a:xfrm>
-            <a:off x="4239518" y="3022550"/>
-            <a:ext cx="355550" cy="355550"/>
+            <a:off x="4695527" y="2946350"/>
+            <a:ext cx="431750" cy="431750"/>
           </a:xfrm>
           <a:prstGeom prst="roundRect">
             <a:avLst>
-              <a:gd name="adj" fmla="val 21432"/>
+              <a:gd name="adj" fmla="val 17649"/>
             </a:avLst>
           </a:prstGeom>
           <a:solidFill>
@@ -3051,8 +3053,8 @@
         </p:blipFill>
         <p:spPr>
           <a:xfrm>
-            <a:off x="4315718" y="3098750"/>
-            <a:ext cx="203150" cy="203150"/>
+            <a:off x="4790777" y="3041600"/>
+            <a:ext cx="241250" cy="241250"/>
           </a:xfrm>
           <a:prstGeom prst="rect">
             <a:avLst/>
@@ -3067,8 +3069,8 @@
         </p:nvSpPr>
         <p:spPr>
           <a:xfrm>
-            <a:off x="4709368" y="3051125"/>
-            <a:ext cx="2226975" cy="114300"/>
+            <a:off x="5241578" y="2973288"/>
+            <a:ext cx="2597226" cy="142875"/>
           </a:xfrm>
           <a:prstGeom prst="rect">
             <a:avLst/>
@@ -3084,7 +3086,7 @@
               <a:buNone/>
             </a:pPr>
             <a:r>
-              <a:rPr lang="en-US" sz="850" b="1" dirty="0">
+              <a:rPr lang="en-US" sz="1000" b="1" dirty="0">
                 <a:solidFill>
                   <a:srgbClr val="59636E"/>
                 </a:solidFill>
@@ -3094,7 +3096,7 @@
               </a:rPr>
               <a:t>RUNS ON</a:t>
             </a:r>
-            <a:endParaRPr lang="en-US" sz="850" dirty="0"/>
+            <a:endParaRPr lang="en-US" sz="1000" dirty="0"/>
           </a:p>
         </p:txBody>
       </p:sp>
@@ -3106,8 +3108,8 @@
         </p:nvSpPr>
         <p:spPr>
           <a:xfrm>
-            <a:off x="4709368" y="3178076"/>
-            <a:ext cx="2226975" cy="171450"/>
+            <a:off x="5241578" y="3141464"/>
+            <a:ext cx="2597226" cy="209550"/>
           </a:xfrm>
           <a:prstGeom prst="rect">
             <a:avLst/>
@@ -3123,7 +3125,7 @@
               <a:buNone/>
             </a:pPr>
             <a:r>
-              <a:rPr lang="en-US" sz="1200" b="1" dirty="0">
+              <a:rPr lang="en-US" sz="1400" b="1" dirty="0">
                 <a:solidFill>
                   <a:srgbClr val="1F2328"/>
                 </a:solidFill>
@@ -3133,7 +3135,7 @@
               </a:rPr>
               <a:t>Container Apps + PostgreSQL</a:t>
             </a:r>
-            <a:endParaRPr lang="en-US" sz="1200" dirty="0"/>
+            <a:endParaRPr lang="en-US" sz="1400" dirty="0"/>
           </a:p>
         </p:txBody>
       </p:sp>
@@ -3145,8 +3147,8 @@
         </p:nvSpPr>
         <p:spPr>
           <a:xfrm>
-            <a:off x="482501" y="3759101"/>
-            <a:ext cx="8342275" cy="133350"/>
+            <a:off x="482501" y="3708350"/>
+            <a:ext cx="8342275" cy="142875"/>
           </a:xfrm>
           <a:prstGeom prst="rect">
             <a:avLst/>
@@ -3162,7 +3164,7 @@
               <a:buNone/>
             </a:pPr>
             <a:r>
-              <a:rPr lang="en-US" sz="900" b="1" dirty="0">
+              <a:rPr lang="en-US" sz="1000" b="1" dirty="0">
                 <a:solidFill>
                   <a:srgbClr val="59636E"/>
                 </a:solidFill>
@@ -3172,7 +3174,7 @@
               </a:rPr>
               <a:t>IN THIS SESSION</a:t>
             </a:r>
-            <a:endParaRPr lang="en-US" sz="900" dirty="0"/>
+            <a:endParaRPr lang="en-US" sz="1000" dirty="0"/>
           </a:p>
         </p:txBody>
       </p:sp>
@@ -3184,12 +3186,12 @@
         </p:nvSpPr>
         <p:spPr>
           <a:xfrm>
-            <a:off x="482501" y="3981301"/>
-            <a:ext cx="1582638" cy="336352"/>
+            <a:off x="482501" y="3952726"/>
+            <a:ext cx="1784747" cy="361652"/>
           </a:xfrm>
           <a:prstGeom prst="roundRect">
             <a:avLst>
-              <a:gd name="adj" fmla="val 52861"/>
+              <a:gd name="adj" fmla="val 52675"/>
             </a:avLst>
           </a:prstGeom>
           <a:solidFill>
@@ -3220,12 +3222,12 @@
         </p:nvSpPr>
         <p:spPr>
           <a:xfrm>
-            <a:off x="568226" y="4054227"/>
-            <a:ext cx="190500" cy="190500"/>
+            <a:off x="568226" y="4025652"/>
+            <a:ext cx="215801" cy="215801"/>
           </a:xfrm>
           <a:prstGeom prst="roundRect">
             <a:avLst>
-              <a:gd name="adj" fmla="val 480000"/>
+              <a:gd name="adj" fmla="val 423724"/>
             </a:avLst>
           </a:prstGeom>
           <a:solidFill>
@@ -3252,8 +3254,8 @@
         </p:nvSpPr>
         <p:spPr>
           <a:xfrm>
-            <a:off x="634633" y="4092327"/>
-            <a:ext cx="57686" cy="114300"/>
+            <a:off x="643640" y="4066877"/>
+            <a:ext cx="64972" cy="133350"/>
           </a:xfrm>
           <a:prstGeom prst="rect">
             <a:avLst/>
@@ -3269,7 +3271,7 @@
               <a:buNone/>
             </a:pPr>
             <a:r>
-              <a:rPr lang="en-US" sz="800" b="1" dirty="0">
+              <a:rPr lang="en-US" sz="900" b="1" dirty="0">
                 <a:solidFill>
                   <a:srgbClr val="FFFFFF"/>
                 </a:solidFill>
@@ -3279,7 +3281,7 @@
               </a:rPr>
               <a:t>1</a:t>
             </a:r>
-            <a:endParaRPr lang="en-US" sz="800" dirty="0"/>
+            <a:endParaRPr lang="en-US" sz="900" dirty="0"/>
           </a:p>
         </p:txBody>
       </p:sp>
@@ -3291,8 +3293,8 @@
         </p:nvSpPr>
         <p:spPr>
           <a:xfrm>
-            <a:off x="834926" y="4078039"/>
-            <a:ext cx="1115613" cy="142875"/>
+            <a:off x="860227" y="4047827"/>
+            <a:ext cx="1283053" cy="171450"/>
           </a:xfrm>
           <a:prstGeom prst="rect">
             <a:avLst/>
@@ -3308,7 +3310,7 @@
               <a:buNone/>
             </a:pPr>
             <a:r>
-              <a:rPr lang="en-US" sz="1000" b="1" dirty="0">
+              <a:rPr lang="en-US" sz="1150" b="1" dirty="0">
                 <a:solidFill>
                   <a:srgbClr val="0969DA"/>
                 </a:solidFill>
@@ -3318,7 +3320,7 @@
               </a:rPr>
               <a:t>Plan and generate</a:t>
             </a:r>
-            <a:endParaRPr lang="en-US" sz="1000" dirty="0"/>
+            <a:endParaRPr lang="en-US" sz="1150" dirty="0"/>
           </a:p>
         </p:txBody>
       </p:sp>
@@ -3330,12 +3332,12 @@
         </p:nvSpPr>
         <p:spPr>
           <a:xfrm>
-            <a:off x="2166640" y="3981301"/>
-            <a:ext cx="1540371" cy="336352"/>
+            <a:off x="2368748" y="3952726"/>
+            <a:ext cx="1735931" cy="361652"/>
           </a:xfrm>
           <a:prstGeom prst="roundRect">
             <a:avLst>
-              <a:gd name="adj" fmla="val 52861"/>
+              <a:gd name="adj" fmla="val 52675"/>
             </a:avLst>
           </a:prstGeom>
           <a:solidFill>
@@ -3366,12 +3368,12 @@
         </p:nvSpPr>
         <p:spPr>
           <a:xfrm>
-            <a:off x="2252365" y="4054227"/>
-            <a:ext cx="190500" cy="190500"/>
+            <a:off x="2454473" y="4025652"/>
+            <a:ext cx="215801" cy="215801"/>
           </a:xfrm>
           <a:prstGeom prst="roundRect">
             <a:avLst>
-              <a:gd name="adj" fmla="val 480000"/>
+              <a:gd name="adj" fmla="val 423724"/>
             </a:avLst>
           </a:prstGeom>
           <a:solidFill>
@@ -3398,8 +3400,8 @@
         </p:nvSpPr>
         <p:spPr>
           <a:xfrm>
-            <a:off x="2318772" y="4092327"/>
-            <a:ext cx="57686" cy="114300"/>
+            <a:off x="2529888" y="4066877"/>
+            <a:ext cx="64972" cy="133350"/>
           </a:xfrm>
           <a:prstGeom prst="rect">
             <a:avLst/>
@@ -3415,7 +3417,7 @@
               <a:buNone/>
             </a:pPr>
             <a:r>
-              <a:rPr lang="en-US" sz="800" b="1" dirty="0">
+              <a:rPr lang="en-US" sz="900" b="1" dirty="0">
                 <a:solidFill>
                   <a:srgbClr val="FFFFFF"/>
                 </a:solidFill>
@@ -3425,7 +3427,7 @@
               </a:rPr>
               <a:t>2</a:t>
             </a:r>
-            <a:endParaRPr lang="en-US" sz="800" dirty="0"/>
+            <a:endParaRPr lang="en-US" sz="900" dirty="0"/>
           </a:p>
         </p:txBody>
       </p:sp>
@@ -3437,8 +3439,8 @@
         </p:nvSpPr>
         <p:spPr>
           <a:xfrm>
-            <a:off x="2519065" y="4078039"/>
-            <a:ext cx="1072500" cy="142875"/>
+            <a:off x="2746474" y="4047827"/>
+            <a:ext cx="1233261" cy="171450"/>
           </a:xfrm>
           <a:prstGeom prst="rect">
             <a:avLst/>
@@ -3454,7 +3456,7 @@
               <a:buNone/>
             </a:pPr>
             <a:r>
-              <a:rPr lang="en-US" sz="1000" b="1" dirty="0">
+              <a:rPr lang="en-US" sz="1150" b="1" dirty="0">
                 <a:solidFill>
                   <a:srgbClr val="8250DF"/>
                 </a:solidFill>
@@ -3464,7 +3466,7 @@
               </a:rPr>
               <a:t>Deploy in parallel</a:t>
             </a:r>
-            <a:endParaRPr lang="en-US" sz="1000" dirty="0"/>
+            <a:endParaRPr lang="en-US" sz="1150" dirty="0"/>
           </a:p>
         </p:txBody>
       </p:sp>
@@ -3476,12 +3478,12 @@
         </p:nvSpPr>
         <p:spPr>
           <a:xfrm>
-            <a:off x="3808512" y="3981301"/>
-            <a:ext cx="1455539" cy="336352"/>
+            <a:off x="4206180" y="3952726"/>
+            <a:ext cx="1638598" cy="361652"/>
           </a:xfrm>
           <a:prstGeom prst="roundRect">
             <a:avLst>
-              <a:gd name="adj" fmla="val 52861"/>
+              <a:gd name="adj" fmla="val 52675"/>
             </a:avLst>
           </a:prstGeom>
           <a:solidFill>
@@ -3512,12 +3514,12 @@
         </p:nvSpPr>
         <p:spPr>
           <a:xfrm>
-            <a:off x="3894237" y="4054227"/>
-            <a:ext cx="190500" cy="190500"/>
+            <a:off x="4291905" y="4025652"/>
+            <a:ext cx="215801" cy="215801"/>
           </a:xfrm>
           <a:prstGeom prst="roundRect">
             <a:avLst>
-              <a:gd name="adj" fmla="val 480000"/>
+              <a:gd name="adj" fmla="val 423724"/>
             </a:avLst>
           </a:prstGeom>
           <a:solidFill>
@@ -3544,8 +3546,8 @@
         </p:nvSpPr>
         <p:spPr>
           <a:xfrm>
-            <a:off x="3960644" y="4092327"/>
-            <a:ext cx="57686" cy="114300"/>
+            <a:off x="4367320" y="4066877"/>
+            <a:ext cx="64972" cy="133350"/>
           </a:xfrm>
           <a:prstGeom prst="rect">
             <a:avLst/>
@@ -3561,7 +3563,7 @@
               <a:buNone/>
             </a:pPr>
             <a:r>
-              <a:rPr lang="en-US" sz="800" b="1" dirty="0">
+              <a:rPr lang="en-US" sz="900" b="1" dirty="0">
                 <a:solidFill>
                   <a:srgbClr val="FFFFFF"/>
                 </a:solidFill>
@@ -3571,7 +3573,7 @@
               </a:rPr>
               <a:t>3</a:t>
             </a:r>
-            <a:endParaRPr lang="en-US" sz="800" dirty="0"/>
+            <a:endParaRPr lang="en-US" sz="900" dirty="0"/>
           </a:p>
         </p:txBody>
       </p:sp>
@@ -3583,8 +3585,8 @@
         </p:nvSpPr>
         <p:spPr>
           <a:xfrm>
-            <a:off x="4160937" y="4078039"/>
-            <a:ext cx="985971" cy="142875"/>
+            <a:off x="4583906" y="4047827"/>
+            <a:ext cx="1133981" cy="171450"/>
           </a:xfrm>
           <a:prstGeom prst="rect">
             <a:avLst/>
@@ -3600,7 +3602,7 @@
               <a:buNone/>
             </a:pPr>
             <a:r>
-              <a:rPr lang="en-US" sz="1000" b="1" dirty="0">
+              <a:rPr lang="en-US" sz="1150" b="1" dirty="0">
                 <a:solidFill>
                   <a:srgbClr val="1A7F37"/>
                 </a:solidFill>
@@ -3610,7 +3612,7 @@
               </a:rPr>
               <a:t>Operate the app</a:t>
             </a:r>
-            <a:endParaRPr lang="en-US" sz="1000" dirty="0"/>
+            <a:endParaRPr lang="en-US" sz="1150" dirty="0"/>
           </a:p>
         </p:txBody>
       </p:sp>
@@ -3622,8 +3624,8 @@
         </p:nvSpPr>
         <p:spPr>
           <a:xfrm>
-            <a:off x="482501" y="4724400"/>
-            <a:ext cx="2396237" cy="142875"/>
+            <a:off x="482501" y="4673501"/>
+            <a:ext cx="2635329" cy="152400"/>
           </a:xfrm>
           <a:prstGeom prst="rect">
             <a:avLst/>
@@ -3639,7 +3641,7 @@
               <a:buNone/>
             </a:pPr>
             <a:r>
-              <a:rPr lang="en-US" sz="1000" b="1" dirty="0">
+              <a:rPr lang="en-US" sz="1100" b="1" dirty="0">
                 <a:solidFill>
                   <a:srgbClr val="0969DA"/>
                 </a:solidFill>
@@ -3649,7 +3651,7 @@
               </a:rPr>
               <a:t>github.com/microsoft/agentic-journeys</a:t>
             </a:r>
-            <a:endParaRPr lang="en-US" sz="1000" dirty="0"/>
+            <a:endParaRPr lang="en-US" sz="1100" dirty="0"/>
           </a:p>
         </p:txBody>
       </p:sp>
@@ -3693,12 +3695,12 @@
         </p:nvSpPr>
         <p:spPr>
           <a:xfrm>
-            <a:off x="8077200" y="152400"/>
-            <a:ext cx="482650" cy="266700"/>
+            <a:off x="8026598" y="152400"/>
+            <a:ext cx="533251" cy="279350"/>
           </a:xfrm>
           <a:prstGeom prst="roundRect">
             <a:avLst>
-              <a:gd name="adj" fmla="val 23810"/>
+              <a:gd name="adj" fmla="val 22731"/>
             </a:avLst>
           </a:prstGeom>
           <a:solidFill>
@@ -3725,8 +3727,8 @@
         </p:nvSpPr>
         <p:spPr>
           <a:xfrm>
-            <a:off x="8201863" y="219075"/>
-            <a:ext cx="233324" cy="133350"/>
+            <a:off x="8163659" y="220563"/>
+            <a:ext cx="259131" cy="142875"/>
           </a:xfrm>
           <a:prstGeom prst="rect">
             <a:avLst/>
@@ -3742,7 +3744,7 @@
               <a:buNone/>
             </a:pPr>
             <a:r>
-              <a:rPr lang="en-US" sz="900" b="1" dirty="0">
+              <a:rPr lang="en-US" sz="1000" b="1" dirty="0">
                 <a:solidFill>
                   <a:srgbClr val="FFFFFF"/>
                 </a:solidFill>
@@ -3752,7 +3754,7 @@
               </a:rPr>
               <a:t>N8N</a:t>
             </a:r>
-            <a:endParaRPr lang="en-US" sz="900" dirty="0"/>
+            <a:endParaRPr lang="en-US" sz="1000" dirty="0"/>
           </a:p>
         </p:txBody>
       </p:sp>
@@ -3789,7 +3791,7 @@
         <p:spPr>
           <a:xfrm>
             <a:off x="482501" y="330101"/>
-            <a:ext cx="7772400" cy="142875"/>
+            <a:ext cx="8342275" cy="152400"/>
           </a:xfrm>
           <a:prstGeom prst="rect">
             <a:avLst/>
@@ -3805,7 +3807,7 @@
               <a:buNone/>
             </a:pPr>
             <a:r>
-              <a:rPr lang="en-US" sz="1000" b="1" dirty="0">
+              <a:rPr lang="en-US" sz="1100" b="1" dirty="0">
                 <a:solidFill>
                   <a:srgbClr val="0969DA"/>
                 </a:solidFill>
@@ -3815,7 +3817,7 @@
               </a:rPr>
               <a:t>APP QUIRK</a:t>
             </a:r>
-            <a:endParaRPr lang="en-US" sz="1000" dirty="0"/>
+            <a:endParaRPr lang="en-US" sz="1100" dirty="0"/>
           </a:p>
         </p:txBody>
       </p:sp>
@@ -3827,8 +3829,8 @@
         </p:nvSpPr>
         <p:spPr>
           <a:xfrm>
-            <a:off x="482501" y="523726"/>
-            <a:ext cx="7772400" cy="393650"/>
+            <a:off x="482501" y="533251"/>
+            <a:ext cx="8342275" cy="419100"/>
           </a:xfrm>
           <a:prstGeom prst="rect">
             <a:avLst/>
@@ -3842,7 +3844,7 @@
           <a:p>
             <a:pPr algn="l" indent="0" marL="0">
               <a:lnSpc>
-                <a:spcPts val="3100"/>
+                <a:spcPts val="3300"/>
               </a:lnSpc>
               <a:spcBef>
                 <a:spcPts val="400"/>
@@ -3850,7 +3852,7 @@
               <a:buNone/>
             </a:pPr>
             <a:r>
-              <a:rPr lang="en-US" sz="2600" b="1" dirty="0">
+              <a:rPr lang="en-US" sz="2800" b="1" dirty="0">
                 <a:solidFill>
                   <a:srgbClr val="1F2328"/>
                 </a:solidFill>
@@ -3860,7 +3862,7 @@
               </a:rPr>
               <a:t>Some settings only exist after deploy</a:t>
             </a:r>
-            <a:endParaRPr lang="en-US" sz="2600" dirty="0"/>
+            <a:endParaRPr lang="en-US" sz="2800" dirty="0"/>
           </a:p>
         </p:txBody>
       </p:sp>
@@ -3880,7 +3882,7 @@
         </p:blipFill>
         <p:spPr>
           <a:xfrm>
-            <a:off x="966936" y="1282601"/>
+            <a:off x="966936" y="1308050"/>
             <a:ext cx="7209681" cy="3454301"/>
           </a:xfrm>
           <a:prstGeom prst="rect">
@@ -3928,12 +3930,12 @@
         </p:nvSpPr>
         <p:spPr>
           <a:xfrm>
-            <a:off x="8077200" y="152400"/>
-            <a:ext cx="482650" cy="266700"/>
+            <a:off x="8026598" y="152400"/>
+            <a:ext cx="533251" cy="279350"/>
           </a:xfrm>
           <a:prstGeom prst="roundRect">
             <a:avLst>
-              <a:gd name="adj" fmla="val 23810"/>
+              <a:gd name="adj" fmla="val 22731"/>
             </a:avLst>
           </a:prstGeom>
           <a:solidFill>
@@ -3960,8 +3962,8 @@
         </p:nvSpPr>
         <p:spPr>
           <a:xfrm>
-            <a:off x="8201863" y="219075"/>
-            <a:ext cx="233324" cy="133350"/>
+            <a:off x="8163659" y="220563"/>
+            <a:ext cx="259131" cy="142875"/>
           </a:xfrm>
           <a:prstGeom prst="rect">
             <a:avLst/>
@@ -3977,7 +3979,7 @@
               <a:buNone/>
             </a:pPr>
             <a:r>
-              <a:rPr lang="en-US" sz="900" b="1" dirty="0">
+              <a:rPr lang="en-US" sz="1000" b="1" dirty="0">
                 <a:solidFill>
                   <a:srgbClr val="FFFFFF"/>
                 </a:solidFill>
@@ -3987,7 +3989,7 @@
               </a:rPr>
               <a:t>N8N</a:t>
             </a:r>
-            <a:endParaRPr lang="en-US" sz="900" dirty="0"/>
+            <a:endParaRPr lang="en-US" sz="1000" dirty="0"/>
           </a:p>
         </p:txBody>
       </p:sp>
@@ -4096,7 +4098,7 @@
         <p:spPr>
           <a:xfrm>
             <a:off x="558701" y="1828651"/>
-            <a:ext cx="3886200" cy="142875"/>
+            <a:ext cx="3886200" cy="152400"/>
           </a:xfrm>
           <a:prstGeom prst="rect">
             <a:avLst/>
@@ -4115,7 +4117,7 @@
               <a:buNone/>
             </a:pPr>
             <a:r>
-              <a:rPr lang="en-US" sz="1000" b="1" dirty="0">
+              <a:rPr lang="en-US" sz="1100" b="1" dirty="0">
                 <a:solidFill>
                   <a:srgbClr val="59636E"/>
                 </a:solidFill>
@@ -4125,7 +4127,7 @@
               </a:rPr>
               <a:t>SECTION 2 OF 3</a:t>
             </a:r>
-            <a:endParaRPr lang="en-US" sz="1000" dirty="0"/>
+            <a:endParaRPr lang="en-US" sz="1100" dirty="0"/>
           </a:p>
         </p:txBody>
       </p:sp>
@@ -4137,8 +4139,8 @@
         </p:nvSpPr>
         <p:spPr>
           <a:xfrm>
-            <a:off x="558701" y="2034927"/>
-            <a:ext cx="3886200" cy="444550"/>
+            <a:off x="558701" y="2044452"/>
+            <a:ext cx="3886200" cy="469850"/>
           </a:xfrm>
           <a:prstGeom prst="rect">
             <a:avLst/>
@@ -4152,7 +4154,7 @@
           <a:p>
             <a:pPr algn="l" indent="0" marL="0">
               <a:lnSpc>
-                <a:spcPts val="3500"/>
+                <a:spcPts val="3700"/>
               </a:lnSpc>
               <a:spcBef>
                 <a:spcPts val="500"/>
@@ -4160,7 +4162,7 @@
               <a:buNone/>
             </a:pPr>
             <a:r>
-              <a:rPr lang="en-US" sz="3000" b="1" dirty="0">
+              <a:rPr lang="en-US" sz="3200" b="1" dirty="0">
                 <a:solidFill>
                   <a:srgbClr val="1F2328"/>
                 </a:solidFill>
@@ -4170,7 +4172,7 @@
               </a:rPr>
               <a:t>Deploy in parallel</a:t>
             </a:r>
-            <a:endParaRPr lang="en-US" sz="3000" dirty="0"/>
+            <a:endParaRPr lang="en-US" sz="3200" dirty="0"/>
           </a:p>
         </p:txBody>
       </p:sp>
@@ -4182,8 +4184,8 @@
         </p:nvSpPr>
         <p:spPr>
           <a:xfrm>
-            <a:off x="558701" y="2606427"/>
-            <a:ext cx="3886200" cy="482501"/>
+            <a:off x="558701" y="2666702"/>
+            <a:ext cx="3886200" cy="533400"/>
           </a:xfrm>
           <a:prstGeom prst="rect">
             <a:avLst/>
@@ -4197,15 +4199,15 @@
           <a:p>
             <a:pPr algn="l" indent="0" marL="0">
               <a:lnSpc>
-                <a:spcPts val="1900"/>
+                <a:spcPts val="2100"/>
               </a:lnSpc>
               <a:spcBef>
-                <a:spcPts val="1000"/>
+                <a:spcPts val="1200"/>
               </a:spcBef>
               <a:buNone/>
             </a:pPr>
             <a:r>
-              <a:rPr lang="en-US" sz="1400" dirty="0">
+              <a:rPr lang="en-US" sz="1600" dirty="0">
                 <a:solidFill>
                   <a:srgbClr val="59636E"/>
                 </a:solidFill>
@@ -4215,7 +4217,7 @@
               </a:rPr>
               <a:t>While azd up runs, the agent builds your first workflow. Two jobs, at the same time.</a:t>
             </a:r>
-            <a:endParaRPr lang="en-US" sz="1400" dirty="0"/>
+            <a:endParaRPr lang="en-US" sz="1600" dirty="0"/>
           </a:p>
         </p:txBody>
       </p:sp>
@@ -4284,11 +4286,11 @@
         <p:spPr>
           <a:xfrm>
             <a:off x="558701" y="4368701"/>
-            <a:ext cx="1473547" cy="336352"/>
+            <a:ext cx="1620589" cy="361652"/>
           </a:xfrm>
           <a:prstGeom prst="roundRect">
             <a:avLst>
-              <a:gd name="adj" fmla="val 52861"/>
+              <a:gd name="adj" fmla="val 52675"/>
             </a:avLst>
           </a:prstGeom>
           <a:solidFill>
@@ -4320,11 +4322,11 @@
         <p:spPr>
           <a:xfrm>
             <a:off x="644426" y="4441627"/>
-            <a:ext cx="190500" cy="190500"/>
+            <a:ext cx="215801" cy="215801"/>
           </a:xfrm>
           <a:prstGeom prst="roundRect">
             <a:avLst>
-              <a:gd name="adj" fmla="val 480000"/>
+              <a:gd name="adj" fmla="val 423724"/>
             </a:avLst>
           </a:prstGeom>
           <a:solidFill>
@@ -4351,8 +4353,8 @@
         </p:nvSpPr>
         <p:spPr>
           <a:xfrm>
-            <a:off x="710833" y="4479727"/>
-            <a:ext cx="57686" cy="114300"/>
+            <a:off x="719840" y="4482852"/>
+            <a:ext cx="64972" cy="133350"/>
           </a:xfrm>
           <a:prstGeom prst="rect">
             <a:avLst/>
@@ -4368,7 +4370,7 @@
               <a:buNone/>
             </a:pPr>
             <a:r>
-              <a:rPr lang="en-US" sz="800" b="1" dirty="0">
+              <a:rPr lang="en-US" sz="900" b="1" dirty="0">
                 <a:solidFill>
                   <a:srgbClr val="818B98"/>
                 </a:solidFill>
@@ -4378,7 +4380,7 @@
               </a:rPr>
               <a:t>1</a:t>
             </a:r>
-            <a:endParaRPr lang="en-US" sz="800" dirty="0"/>
+            <a:endParaRPr lang="en-US" sz="900" dirty="0"/>
           </a:p>
         </p:txBody>
       </p:sp>
@@ -4390,8 +4392,8 @@
         </p:nvSpPr>
         <p:spPr>
           <a:xfrm>
-            <a:off x="911126" y="4470202"/>
-            <a:ext cx="1004340" cy="133350"/>
+            <a:off x="936427" y="4478089"/>
+            <a:ext cx="1115613" cy="142875"/>
           </a:xfrm>
           <a:prstGeom prst="rect">
             <a:avLst/>
@@ -4407,7 +4409,7 @@
               <a:buNone/>
             </a:pPr>
             <a:r>
-              <a:rPr lang="en-US" sz="900" b="1" dirty="0">
+              <a:rPr lang="en-US" sz="1000" b="1" dirty="0">
                 <a:solidFill>
                   <a:srgbClr val="818B98"/>
                 </a:solidFill>
@@ -4417,7 +4419,7 @@
               </a:rPr>
               <a:t>Plan and generate</a:t>
             </a:r>
-            <a:endParaRPr lang="en-US" sz="900" dirty="0"/>
+            <a:endParaRPr lang="en-US" sz="1000" dirty="0"/>
           </a:p>
         </p:txBody>
       </p:sp>
@@ -4429,12 +4431,12 @@
         </p:nvSpPr>
         <p:spPr>
           <a:xfrm>
-            <a:off x="2133749" y="4368701"/>
-            <a:ext cx="1435447" cy="336352"/>
+            <a:off x="2280791" y="4368701"/>
+            <a:ext cx="1578322" cy="361652"/>
           </a:xfrm>
           <a:prstGeom prst="roundRect">
             <a:avLst>
-              <a:gd name="adj" fmla="val 52861"/>
+              <a:gd name="adj" fmla="val 52675"/>
             </a:avLst>
           </a:prstGeom>
           <a:solidFill>
@@ -4465,12 +4467,12 @@
         </p:nvSpPr>
         <p:spPr>
           <a:xfrm>
-            <a:off x="2219474" y="4441627"/>
-            <a:ext cx="190500" cy="190500"/>
+            <a:off x="2366516" y="4441627"/>
+            <a:ext cx="215801" cy="215801"/>
           </a:xfrm>
           <a:prstGeom prst="roundRect">
             <a:avLst>
-              <a:gd name="adj" fmla="val 480000"/>
+              <a:gd name="adj" fmla="val 423724"/>
             </a:avLst>
           </a:prstGeom>
           <a:solidFill>
@@ -4497,8 +4499,8 @@
         </p:nvSpPr>
         <p:spPr>
           <a:xfrm>
-            <a:off x="2285881" y="4479727"/>
-            <a:ext cx="57686" cy="114300"/>
+            <a:off x="2441930" y="4482852"/>
+            <a:ext cx="64972" cy="133350"/>
           </a:xfrm>
           <a:prstGeom prst="rect">
             <a:avLst/>
@@ -4514,7 +4516,7 @@
               <a:buNone/>
             </a:pPr>
             <a:r>
-              <a:rPr lang="en-US" sz="800" b="1" dirty="0">
+              <a:rPr lang="en-US" sz="900" b="1" dirty="0">
                 <a:solidFill>
                   <a:srgbClr val="8250DF"/>
                 </a:solidFill>
@@ -4524,7 +4526,7 @@
               </a:rPr>
               <a:t>2</a:t>
             </a:r>
-            <a:endParaRPr lang="en-US" sz="800" dirty="0"/>
+            <a:endParaRPr lang="en-US" sz="900" dirty="0"/>
           </a:p>
         </p:txBody>
       </p:sp>
@@ -4536,8 +4538,8 @@
         </p:nvSpPr>
         <p:spPr>
           <a:xfrm>
-            <a:off x="2486174" y="4470202"/>
-            <a:ext cx="965478" cy="133350"/>
+            <a:off x="2658517" y="4478089"/>
+            <a:ext cx="1072500" cy="142875"/>
           </a:xfrm>
           <a:prstGeom prst="rect">
             <a:avLst/>
@@ -4553,7 +4555,7 @@
               <a:buNone/>
             </a:pPr>
             <a:r>
-              <a:rPr lang="en-US" sz="900" b="1" dirty="0">
+              <a:rPr lang="en-US" sz="1000" b="1" dirty="0">
                 <a:solidFill>
                   <a:srgbClr val="FFFFFF"/>
                 </a:solidFill>
@@ -4563,7 +4565,7 @@
               </a:rPr>
               <a:t>Deploy in parallel</a:t>
             </a:r>
-            <a:endParaRPr lang="en-US" sz="900" dirty="0"/>
+            <a:endParaRPr lang="en-US" sz="1000" dirty="0"/>
           </a:p>
         </p:txBody>
       </p:sp>
@@ -4575,12 +4577,12 @@
         </p:nvSpPr>
         <p:spPr>
           <a:xfrm>
-            <a:off x="3670697" y="4368701"/>
-            <a:ext cx="1359098" cy="336352"/>
+            <a:off x="3960614" y="4368701"/>
+            <a:ext cx="1493490" cy="361652"/>
           </a:xfrm>
           <a:prstGeom prst="roundRect">
             <a:avLst>
-              <a:gd name="adj" fmla="val 52861"/>
+              <a:gd name="adj" fmla="val 52675"/>
             </a:avLst>
           </a:prstGeom>
           <a:solidFill>
@@ -4611,12 +4613,12 @@
         </p:nvSpPr>
         <p:spPr>
           <a:xfrm>
-            <a:off x="3756422" y="4441627"/>
-            <a:ext cx="190500" cy="190500"/>
+            <a:off x="4046339" y="4441627"/>
+            <a:ext cx="215801" cy="215801"/>
           </a:xfrm>
           <a:prstGeom prst="roundRect">
             <a:avLst>
-              <a:gd name="adj" fmla="val 480000"/>
+              <a:gd name="adj" fmla="val 423724"/>
             </a:avLst>
           </a:prstGeom>
           <a:solidFill>
@@ -4643,8 +4645,8 @@
         </p:nvSpPr>
         <p:spPr>
           <a:xfrm>
-            <a:off x="3822829" y="4479727"/>
-            <a:ext cx="57686" cy="114300"/>
+            <a:off x="4121753" y="4482852"/>
+            <a:ext cx="64972" cy="133350"/>
           </a:xfrm>
           <a:prstGeom prst="rect">
             <a:avLst/>
@@ -4660,7 +4662,7 @@
               <a:buNone/>
             </a:pPr>
             <a:r>
-              <a:rPr lang="en-US" sz="800" b="1" dirty="0">
+              <a:rPr lang="en-US" sz="900" b="1" dirty="0">
                 <a:solidFill>
                   <a:srgbClr val="818B98"/>
                 </a:solidFill>
@@ -4670,7 +4672,7 @@
               </a:rPr>
               <a:t>3</a:t>
             </a:r>
-            <a:endParaRPr lang="en-US" sz="800" dirty="0"/>
+            <a:endParaRPr lang="en-US" sz="900" dirty="0"/>
           </a:p>
         </p:txBody>
       </p:sp>
@@ -4682,8 +4684,8 @@
         </p:nvSpPr>
         <p:spPr>
           <a:xfrm>
-            <a:off x="4023122" y="4470202"/>
-            <a:ext cx="887602" cy="133350"/>
+            <a:off x="4338340" y="4478089"/>
+            <a:ext cx="985971" cy="142875"/>
           </a:xfrm>
           <a:prstGeom prst="rect">
             <a:avLst/>
@@ -4699,7 +4701,7 @@
               <a:buNone/>
             </a:pPr>
             <a:r>
-              <a:rPr lang="en-US" sz="900" b="1" dirty="0">
+              <a:rPr lang="en-US" sz="1000" b="1" dirty="0">
                 <a:solidFill>
                   <a:srgbClr val="818B98"/>
                 </a:solidFill>
@@ -4709,7 +4711,7 @@
               </a:rPr>
               <a:t>Operate the app</a:t>
             </a:r>
-            <a:endParaRPr lang="en-US" sz="900" dirty="0"/>
+            <a:endParaRPr lang="en-US" sz="1000" dirty="0"/>
           </a:p>
         </p:txBody>
       </p:sp>
@@ -4753,12 +4755,12 @@
         </p:nvSpPr>
         <p:spPr>
           <a:xfrm>
-            <a:off x="8077200" y="152400"/>
-            <a:ext cx="482650" cy="266700"/>
+            <a:off x="8026598" y="152400"/>
+            <a:ext cx="533251" cy="279350"/>
           </a:xfrm>
           <a:prstGeom prst="roundRect">
             <a:avLst>
-              <a:gd name="adj" fmla="val 23810"/>
+              <a:gd name="adj" fmla="val 22731"/>
             </a:avLst>
           </a:prstGeom>
           <a:solidFill>
@@ -4785,8 +4787,8 @@
         </p:nvSpPr>
         <p:spPr>
           <a:xfrm>
-            <a:off x="8201863" y="219075"/>
-            <a:ext cx="233324" cy="133350"/>
+            <a:off x="8163659" y="220563"/>
+            <a:ext cx="259131" cy="142875"/>
           </a:xfrm>
           <a:prstGeom prst="rect">
             <a:avLst/>
@@ -4802,7 +4804,7 @@
               <a:buNone/>
             </a:pPr>
             <a:r>
-              <a:rPr lang="en-US" sz="900" b="1" dirty="0">
+              <a:rPr lang="en-US" sz="1000" b="1" dirty="0">
                 <a:solidFill>
                   <a:srgbClr val="FFFFFF"/>
                 </a:solidFill>
@@ -4812,7 +4814,7 @@
               </a:rPr>
               <a:t>N8N</a:t>
             </a:r>
-            <a:endParaRPr lang="en-US" sz="900" dirty="0"/>
+            <a:endParaRPr lang="en-US" sz="1000" dirty="0"/>
           </a:p>
         </p:txBody>
       </p:sp>
@@ -4849,7 +4851,7 @@
         <p:spPr>
           <a:xfrm>
             <a:off x="482501" y="330101"/>
-            <a:ext cx="7772400" cy="142875"/>
+            <a:ext cx="8342275" cy="152400"/>
           </a:xfrm>
           <a:prstGeom prst="rect">
             <a:avLst/>
@@ -4865,7 +4867,7 @@
               <a:buNone/>
             </a:pPr>
             <a:r>
-              <a:rPr lang="en-US" sz="1000" b="1" dirty="0">
+              <a:rPr lang="en-US" sz="1100" b="1" dirty="0">
                 <a:solidFill>
                   <a:srgbClr val="8250DF"/>
                 </a:solidFill>
@@ -4875,7 +4877,7 @@
               </a:rPr>
               <a:t>WORK IN PARALLEL</a:t>
             </a:r>
-            <a:endParaRPr lang="en-US" sz="1000" dirty="0"/>
+            <a:endParaRPr lang="en-US" sz="1100" dirty="0"/>
           </a:p>
         </p:txBody>
       </p:sp>
@@ -4887,8 +4889,8 @@
         </p:nvSpPr>
         <p:spPr>
           <a:xfrm>
-            <a:off x="482501" y="523726"/>
-            <a:ext cx="7772400" cy="393650"/>
+            <a:off x="482501" y="533251"/>
+            <a:ext cx="8342275" cy="419100"/>
           </a:xfrm>
           <a:prstGeom prst="rect">
             <a:avLst/>
@@ -4902,7 +4904,7 @@
           <a:p>
             <a:pPr algn="l" indent="0" marL="0">
               <a:lnSpc>
-                <a:spcPts val="3100"/>
+                <a:spcPts val="3300"/>
               </a:lnSpc>
               <a:spcBef>
                 <a:spcPts val="400"/>
@@ -4910,7 +4912,7 @@
               <a:buNone/>
             </a:pPr>
             <a:r>
-              <a:rPr lang="en-US" sz="2600" b="1" dirty="0">
+              <a:rPr lang="en-US" sz="2800" b="1" dirty="0">
                 <a:solidFill>
                   <a:srgbClr val="1F2328"/>
                 </a:solidFill>
@@ -4920,7 +4922,7 @@
               </a:rPr>
               <a:t>Two terminals, two jobs</a:t>
             </a:r>
-            <a:endParaRPr lang="en-US" sz="2600" dirty="0"/>
+            <a:endParaRPr lang="en-US" sz="2800" dirty="0"/>
           </a:p>
         </p:txBody>
       </p:sp>
@@ -4932,12 +4934,12 @@
         </p:nvSpPr>
         <p:spPr>
           <a:xfrm>
-            <a:off x="647551" y="1965424"/>
-            <a:ext cx="3810000" cy="1790105"/>
+            <a:off x="571351" y="1922562"/>
+            <a:ext cx="3886200" cy="1879402"/>
           </a:xfrm>
           <a:prstGeom prst="roundRect">
             <a:avLst>
-              <a:gd name="adj" fmla="val 5676"/>
+              <a:gd name="adj" fmla="val 5406"/>
             </a:avLst>
           </a:prstGeom>
           <a:solidFill>
@@ -4971,8 +4973,8 @@
         </p:nvSpPr>
         <p:spPr>
           <a:xfrm>
-            <a:off x="647551" y="1965424"/>
-            <a:ext cx="3810000" cy="253901"/>
+            <a:off x="571351" y="1922562"/>
+            <a:ext cx="3886200" cy="253901"/>
           </a:xfrm>
           <a:prstGeom prst="roundRect">
             <a:avLst>
@@ -5003,7 +5005,7 @@
         </p:nvSpPr>
         <p:spPr>
           <a:xfrm>
-            <a:off x="774502" y="2047875"/>
+            <a:off x="698302" y="2005013"/>
             <a:ext cx="88850" cy="88850"/>
           </a:xfrm>
           <a:prstGeom prst="roundRect">
@@ -5035,7 +5037,7 @@
         </p:nvSpPr>
         <p:spPr>
           <a:xfrm>
-            <a:off x="926753" y="2047875"/>
+            <a:off x="850553" y="2005013"/>
             <a:ext cx="88850" cy="88850"/>
           </a:xfrm>
           <a:prstGeom prst="roundRect">
@@ -5067,7 +5069,7 @@
         </p:nvSpPr>
         <p:spPr>
           <a:xfrm>
-            <a:off x="1079004" y="2047875"/>
+            <a:off x="1002804" y="2005013"/>
             <a:ext cx="88850" cy="88850"/>
           </a:xfrm>
           <a:prstGeom prst="roundRect">
@@ -5099,8 +5101,8 @@
         </p:nvSpPr>
         <p:spPr>
           <a:xfrm>
-            <a:off x="1332756" y="2035225"/>
-            <a:ext cx="1057016" cy="114300"/>
+            <a:off x="1256556" y="1978075"/>
+            <a:ext cx="1243584" cy="142875"/>
           </a:xfrm>
           <a:prstGeom prst="rect">
             <a:avLst/>
@@ -5116,7 +5118,7 @@
               <a:buNone/>
             </a:pPr>
             <a:r>
-              <a:rPr lang="en-US" sz="850" dirty="0">
+              <a:rPr lang="en-US" sz="1000" dirty="0">
                 <a:solidFill>
                   <a:srgbClr val="8B949E"/>
                 </a:solidFill>
@@ -5126,7 +5128,7 @@
               </a:rPr>
               <a:t>Terminal 1 · you</a:t>
             </a:r>
-            <a:endParaRPr lang="en-US" sz="850" dirty="0"/>
+            <a:endParaRPr lang="en-US" sz="1000" dirty="0"/>
           </a:p>
         </p:txBody>
       </p:sp>
@@ -5138,8 +5140,8 @@
         </p:nvSpPr>
         <p:spPr>
           <a:xfrm>
-            <a:off x="876151" y="2397026"/>
-            <a:ext cx="3419856" cy="255836"/>
+            <a:off x="799951" y="2354163"/>
+            <a:ext cx="3497580" cy="275630"/>
           </a:xfrm>
           <a:prstGeom prst="rect">
             <a:avLst/>
@@ -5153,12 +5155,12 @@
           <a:p>
             <a:pPr algn="l" indent="0" marL="0">
               <a:lnSpc>
-                <a:spcPts val="2015"/>
+                <a:spcPts val="2170"/>
               </a:lnSpc>
               <a:buNone/>
             </a:pPr>
             <a:r>
-              <a:rPr lang="en-US" sz="1300" b="1" dirty="0">
+              <a:rPr lang="en-US" sz="1400" b="1" dirty="0">
                 <a:solidFill>
                   <a:srgbClr val="3FB950"/>
                 </a:solidFill>
@@ -5170,12 +5172,12 @@
             </a:r>
             <a:pPr algn="l" indent="0" marL="0">
               <a:lnSpc>
-                <a:spcPts val="2015"/>
+                <a:spcPts val="2170"/>
               </a:lnSpc>
               <a:buNone/>
             </a:pPr>
             <a:r>
-              <a:rPr lang="en-US" sz="1300" dirty="0">
+              <a:rPr lang="en-US" sz="1400" dirty="0">
                 <a:solidFill>
                   <a:srgbClr val="E6EDF3"/>
                 </a:solidFill>
@@ -5185,7 +5187,7 @@
               </a:rPr>
               <a:t> azd up</a:t>
             </a:r>
-            <a:endParaRPr lang="en-US" sz="1300" dirty="0"/>
+            <a:endParaRPr lang="en-US" sz="1400" dirty="0"/>
           </a:p>
         </p:txBody>
       </p:sp>
@@ -5197,8 +5199,8 @@
         </p:nvSpPr>
         <p:spPr>
           <a:xfrm>
-            <a:off x="876151" y="2784872"/>
-            <a:ext cx="3419856" cy="255836"/>
+            <a:off x="799951" y="2771924"/>
+            <a:ext cx="3497580" cy="275630"/>
           </a:xfrm>
           <a:prstGeom prst="rect">
             <a:avLst/>
@@ -5212,12 +5214,12 @@
           <a:p>
             <a:pPr algn="l" indent="0" marL="0">
               <a:lnSpc>
-                <a:spcPts val="2015"/>
+                <a:spcPts val="2170"/>
               </a:lnSpc>
               <a:buNone/>
             </a:pPr>
             <a:r>
-              <a:rPr lang="en-US" sz="1300" dirty="0">
+              <a:rPr lang="en-US" sz="1400" dirty="0">
                 <a:solidFill>
                   <a:srgbClr val="8B949E"/>
                 </a:solidFill>
@@ -5227,7 +5229,7 @@
               </a:rPr>
               <a:t># Provisioning PostgreSQL...</a:t>
             </a:r>
-            <a:endParaRPr lang="en-US" sz="1300" dirty="0"/>
+            <a:endParaRPr lang="en-US" sz="1400" dirty="0"/>
           </a:p>
         </p:txBody>
       </p:sp>
@@ -5239,8 +5241,8 @@
         </p:nvSpPr>
         <p:spPr>
           <a:xfrm>
-            <a:off x="876151" y="3040707"/>
-            <a:ext cx="3419856" cy="255836"/>
+            <a:off x="799951" y="3047554"/>
+            <a:ext cx="3497580" cy="275630"/>
           </a:xfrm>
           <a:prstGeom prst="rect">
             <a:avLst/>
@@ -5254,12 +5256,12 @@
           <a:p>
             <a:pPr algn="l" indent="0" marL="0">
               <a:lnSpc>
-                <a:spcPts val="2015"/>
+                <a:spcPts val="2170"/>
               </a:lnSpc>
               <a:buNone/>
             </a:pPr>
             <a:r>
-              <a:rPr lang="en-US" sz="1300" dirty="0">
+              <a:rPr lang="en-US" sz="1400" dirty="0">
                 <a:solidFill>
                   <a:srgbClr val="8B949E"/>
                 </a:solidFill>
@@ -5269,7 +5271,7 @@
               </a:rPr>
               <a:t># Deploying n8n...</a:t>
             </a:r>
-            <a:endParaRPr lang="en-US" sz="1300" dirty="0"/>
+            <a:endParaRPr lang="en-US" sz="1400" dirty="0"/>
           </a:p>
         </p:txBody>
       </p:sp>
@@ -5281,8 +5283,8 @@
         </p:nvSpPr>
         <p:spPr>
           <a:xfrm>
-            <a:off x="876151" y="3296543"/>
-            <a:ext cx="3419856" cy="255836"/>
+            <a:off x="799951" y="3323183"/>
+            <a:ext cx="3497580" cy="275630"/>
           </a:xfrm>
           <a:prstGeom prst="rect">
             <a:avLst/>
@@ -5296,12 +5298,12 @@
           <a:p>
             <a:pPr algn="l" indent="0" marL="0">
               <a:lnSpc>
-                <a:spcPts val="2015"/>
+                <a:spcPts val="2170"/>
               </a:lnSpc>
               <a:buNone/>
             </a:pPr>
             <a:r>
-              <a:rPr lang="en-US" sz="1300" dirty="0">
+              <a:rPr lang="en-US" sz="1400" dirty="0">
                 <a:solidFill>
                   <a:srgbClr val="8B949E"/>
                 </a:solidFill>
@@ -5311,7 +5313,7 @@
               </a:rPr>
               <a:t># 7–15 minutes</a:t>
             </a:r>
-            <a:endParaRPr lang="en-US" sz="1300" dirty="0"/>
+            <a:endParaRPr lang="en-US" sz="1400" dirty="0"/>
           </a:p>
         </p:txBody>
       </p:sp>
@@ -5323,8 +5325,8 @@
         </p:nvSpPr>
         <p:spPr>
           <a:xfrm>
-            <a:off x="2147441" y="3882479"/>
-            <a:ext cx="826273" cy="171450"/>
+            <a:off x="2008138" y="3928914"/>
+            <a:ext cx="1032879" cy="219075"/>
           </a:xfrm>
           <a:prstGeom prst="rect">
             <a:avLst/>
@@ -5340,7 +5342,7 @@
               <a:buNone/>
             </a:pPr>
             <a:r>
-              <a:rPr lang="en-US" sz="1200" b="1" dirty="0">
+              <a:rPr lang="en-US" sz="1500" b="1" dirty="0">
                 <a:solidFill>
                   <a:srgbClr val="1F2328"/>
                 </a:solidFill>
@@ -5350,7 +5352,7 @@
               </a:rPr>
               <a:t>You deploy</a:t>
             </a:r>
-            <a:endParaRPr lang="en-US" sz="1200" dirty="0"/>
+            <a:endParaRPr lang="en-US" sz="1500" dirty="0"/>
           </a:p>
         </p:txBody>
       </p:sp>
@@ -5362,12 +5364,12 @@
         </p:nvSpPr>
         <p:spPr>
           <a:xfrm>
-            <a:off x="4686151" y="1965424"/>
-            <a:ext cx="3810000" cy="1790105"/>
+            <a:off x="4686151" y="1922562"/>
+            <a:ext cx="3886200" cy="1879402"/>
           </a:xfrm>
           <a:prstGeom prst="roundRect">
             <a:avLst>
-              <a:gd name="adj" fmla="val 5676"/>
+              <a:gd name="adj" fmla="val 5406"/>
             </a:avLst>
           </a:prstGeom>
           <a:solidFill>
@@ -5401,8 +5403,8 @@
         </p:nvSpPr>
         <p:spPr>
           <a:xfrm>
-            <a:off x="4686151" y="1965424"/>
-            <a:ext cx="3810000" cy="253901"/>
+            <a:off x="4686151" y="1922562"/>
+            <a:ext cx="3886200" cy="253901"/>
           </a:xfrm>
           <a:prstGeom prst="roundRect">
             <a:avLst>
@@ -5433,7 +5435,7 @@
         </p:nvSpPr>
         <p:spPr>
           <a:xfrm>
-            <a:off x="4813102" y="2047875"/>
+            <a:off x="4813102" y="2005013"/>
             <a:ext cx="88850" cy="88850"/>
           </a:xfrm>
           <a:prstGeom prst="roundRect">
@@ -5465,7 +5467,7 @@
         </p:nvSpPr>
         <p:spPr>
           <a:xfrm>
-            <a:off x="4965353" y="2047875"/>
+            <a:off x="4965353" y="2005013"/>
             <a:ext cx="88850" cy="88850"/>
           </a:xfrm>
           <a:prstGeom prst="roundRect">
@@ -5497,7 +5499,7 @@
         </p:nvSpPr>
         <p:spPr>
           <a:xfrm>
-            <a:off x="5117604" y="2047875"/>
+            <a:off x="5117604" y="2005013"/>
             <a:ext cx="88850" cy="88850"/>
           </a:xfrm>
           <a:prstGeom prst="roundRect">
@@ -5529,8 +5531,8 @@
         </p:nvSpPr>
         <p:spPr>
           <a:xfrm>
-            <a:off x="5371356" y="2035225"/>
-            <a:ext cx="1321156" cy="114300"/>
+            <a:off x="5371356" y="1978075"/>
+            <a:ext cx="1554480" cy="142875"/>
           </a:xfrm>
           <a:prstGeom prst="rect">
             <a:avLst/>
@@ -5546,7 +5548,7 @@
               <a:buNone/>
             </a:pPr>
             <a:r>
-              <a:rPr lang="en-US" sz="850" dirty="0">
+              <a:rPr lang="en-US" sz="1000" dirty="0">
                 <a:solidFill>
                   <a:srgbClr val="8B949E"/>
                 </a:solidFill>
@@ -5556,7 +5558,7 @@
               </a:rPr>
               <a:t>Terminal 2 · copilot</a:t>
             </a:r>
-            <a:endParaRPr lang="en-US" sz="850" dirty="0"/>
+            <a:endParaRPr lang="en-US" sz="1000" dirty="0"/>
           </a:p>
         </p:txBody>
       </p:sp>
@@ -5568,8 +5570,8 @@
         </p:nvSpPr>
         <p:spPr>
           <a:xfrm>
-            <a:off x="4914751" y="2397026"/>
-            <a:ext cx="3419856" cy="255836"/>
+            <a:off x="4914751" y="2354163"/>
+            <a:ext cx="3497580" cy="275630"/>
           </a:xfrm>
           <a:prstGeom prst="rect">
             <a:avLst/>
@@ -5583,12 +5585,12 @@
           <a:p>
             <a:pPr algn="l" indent="0" marL="0">
               <a:lnSpc>
-                <a:spcPts val="2015"/>
+                <a:spcPts val="2170"/>
               </a:lnSpc>
               <a:buNone/>
             </a:pPr>
             <a:r>
-              <a:rPr lang="en-US" sz="1300" b="1" dirty="0">
+              <a:rPr lang="en-US" sz="1400" b="1" dirty="0">
                 <a:solidFill>
                   <a:srgbClr val="D2A8FF"/>
                 </a:solidFill>
@@ -5600,12 +5602,12 @@
             </a:r>
             <a:pPr algn="l" indent="0" marL="0">
               <a:lnSpc>
-                <a:spcPts val="2015"/>
+                <a:spcPts val="2170"/>
               </a:lnSpc>
               <a:buNone/>
             </a:pPr>
             <a:r>
-              <a:rPr lang="en-US" sz="1300" dirty="0">
+              <a:rPr lang="en-US" sz="1400" dirty="0">
                 <a:solidFill>
                   <a:srgbClr val="E6EDF3"/>
                 </a:solidFill>
@@ -5615,7 +5617,7 @@
               </a:rPr>
               <a:t> Create the GitHub Zen</a:t>
             </a:r>
-            <a:endParaRPr lang="en-US" sz="1300" dirty="0"/>
+            <a:endParaRPr lang="en-US" sz="1400" dirty="0"/>
           </a:p>
         </p:txBody>
       </p:sp>
@@ -5627,8 +5629,8 @@
         </p:nvSpPr>
         <p:spPr>
           <a:xfrm>
-            <a:off x="4914751" y="2652861"/>
-            <a:ext cx="3419856" cy="255836"/>
+            <a:off x="4914751" y="2629793"/>
+            <a:ext cx="3497580" cy="275630"/>
           </a:xfrm>
           <a:prstGeom prst="rect">
             <a:avLst/>
@@ -5642,12 +5644,12 @@
           <a:p>
             <a:pPr algn="l" indent="0" marL="0">
               <a:lnSpc>
-                <a:spcPts val="2015"/>
+                <a:spcPts val="2170"/>
               </a:lnSpc>
               <a:buNone/>
             </a:pPr>
             <a:r>
-              <a:rPr lang="en-US" sz="1300" dirty="0">
+              <a:rPr lang="en-US" sz="1400" dirty="0">
                 <a:solidFill>
                   <a:srgbClr val="E6EDF3"/>
                 </a:solidFill>
@@ -5655,9 +5657,9 @@
                 <a:ea typeface="Courier New" pitchFamily="34" charset="-122"/>
                 <a:cs typeface="Courier New" pitchFamily="34" charset="-120"/>
               </a:rPr>
-              <a:t>workflow and a runner</a:t>
-            </a:r>
-            <a:endParaRPr lang="en-US" sz="1300" dirty="0"/>
+              <a:t>​  workflow and a runner</a:t>
+            </a:r>
+            <a:endParaRPr lang="en-US" sz="1400" dirty="0"/>
           </a:p>
         </p:txBody>
       </p:sp>
@@ -5669,8 +5671,8 @@
         </p:nvSpPr>
         <p:spPr>
           <a:xfrm>
-            <a:off x="4914751" y="2908697"/>
-            <a:ext cx="3419856" cy="255836"/>
+            <a:off x="4914751" y="2905423"/>
+            <a:ext cx="3497580" cy="275630"/>
           </a:xfrm>
           <a:prstGeom prst="rect">
             <a:avLst/>
@@ -5684,12 +5686,12 @@
           <a:p>
             <a:pPr algn="l" indent="0" marL="0">
               <a:lnSpc>
-                <a:spcPts val="2015"/>
+                <a:spcPts val="2170"/>
               </a:lnSpc>
               <a:buNone/>
             </a:pPr>
             <a:r>
-              <a:rPr lang="en-US" sz="1300" dirty="0">
+              <a:rPr lang="en-US" sz="1400" dirty="0">
                 <a:solidFill>
                   <a:srgbClr val="E6EDF3"/>
                 </a:solidFill>
@@ -5697,9 +5699,9 @@
                 <a:ea typeface="Courier New" pitchFamily="34" charset="-122"/>
                 <a:cs typeface="Courier New" pitchFamily="34" charset="-120"/>
               </a:rPr>
-              <a:t>script. Don't deploy.</a:t>
-            </a:r>
-            <a:endParaRPr lang="en-US" sz="1300" dirty="0"/>
+              <a:t>​  script. Don't deploy.</a:t>
+            </a:r>
+            <a:endParaRPr lang="en-US" sz="1400" dirty="0"/>
           </a:p>
         </p:txBody>
       </p:sp>
@@ -5711,8 +5713,8 @@
         </p:nvSpPr>
         <p:spPr>
           <a:xfrm>
-            <a:off x="4914751" y="3296543"/>
-            <a:ext cx="3419856" cy="255836"/>
+            <a:off x="4914751" y="3323183"/>
+            <a:ext cx="3497580" cy="275630"/>
           </a:xfrm>
           <a:prstGeom prst="rect">
             <a:avLst/>
@@ -5726,12 +5728,12 @@
           <a:p>
             <a:pPr algn="l" indent="0" marL="0">
               <a:lnSpc>
-                <a:spcPts val="2015"/>
+                <a:spcPts val="2170"/>
               </a:lnSpc>
               <a:buNone/>
             </a:pPr>
             <a:r>
-              <a:rPr lang="en-US" sz="1300" dirty="0">
+              <a:rPr lang="en-US" sz="1400" dirty="0">
                 <a:solidFill>
                   <a:srgbClr val="8B949E"/>
                 </a:solidFill>
@@ -5741,7 +5743,7 @@
               </a:rPr>
               <a:t># Writing github-zen.json...</a:t>
             </a:r>
-            <a:endParaRPr lang="en-US" sz="1300" dirty="0"/>
+            <a:endParaRPr lang="en-US" sz="1400" dirty="0"/>
           </a:p>
         </p:txBody>
       </p:sp>
@@ -5753,8 +5755,8 @@
         </p:nvSpPr>
         <p:spPr>
           <a:xfrm>
-            <a:off x="5985718" y="3882479"/>
-            <a:ext cx="1235083" cy="171450"/>
+            <a:off x="5872460" y="3928914"/>
+            <a:ext cx="1543854" cy="219075"/>
           </a:xfrm>
           <a:prstGeom prst="rect">
             <a:avLst/>
@@ -5770,7 +5772,7 @@
               <a:buNone/>
             </a:pPr>
             <a:r>
-              <a:rPr lang="en-US" sz="1200" b="1" dirty="0">
+              <a:rPr lang="en-US" sz="1500" b="1" dirty="0">
                 <a:solidFill>
                   <a:srgbClr val="1F2328"/>
                 </a:solidFill>
@@ -5780,7 +5782,7 @@
               </a:rPr>
               <a:t>The agent builds</a:t>
             </a:r>
-            <a:endParaRPr lang="en-US" sz="1200" dirty="0"/>
+            <a:endParaRPr lang="en-US" sz="1500" dirty="0"/>
           </a:p>
         </p:txBody>
       </p:sp>
@@ -5824,12 +5826,12 @@
         </p:nvSpPr>
         <p:spPr>
           <a:xfrm>
-            <a:off x="8077200" y="152400"/>
-            <a:ext cx="482650" cy="266700"/>
+            <a:off x="8026598" y="152400"/>
+            <a:ext cx="533251" cy="279350"/>
           </a:xfrm>
           <a:prstGeom prst="roundRect">
             <a:avLst>
-              <a:gd name="adj" fmla="val 23810"/>
+              <a:gd name="adj" fmla="val 22731"/>
             </a:avLst>
           </a:prstGeom>
           <a:solidFill>
@@ -5856,8 +5858,8 @@
         </p:nvSpPr>
         <p:spPr>
           <a:xfrm>
-            <a:off x="8201863" y="219075"/>
-            <a:ext cx="233324" cy="133350"/>
+            <a:off x="8163659" y="220563"/>
+            <a:ext cx="259131" cy="142875"/>
           </a:xfrm>
           <a:prstGeom prst="rect">
             <a:avLst/>
@@ -5873,7 +5875,7 @@
               <a:buNone/>
             </a:pPr>
             <a:r>
-              <a:rPr lang="en-US" sz="900" b="1" dirty="0">
+              <a:rPr lang="en-US" sz="1000" b="1" dirty="0">
                 <a:solidFill>
                   <a:srgbClr val="FFFFFF"/>
                 </a:solidFill>
@@ -5883,7 +5885,7 @@
               </a:rPr>
               <a:t>N8N</a:t>
             </a:r>
-            <a:endParaRPr lang="en-US" sz="900" dirty="0"/>
+            <a:endParaRPr lang="en-US" sz="1000" dirty="0"/>
           </a:p>
         </p:txBody>
       </p:sp>
@@ -5920,7 +5922,7 @@
         <p:spPr>
           <a:xfrm>
             <a:off x="482501" y="330101"/>
-            <a:ext cx="7772400" cy="142875"/>
+            <a:ext cx="8342275" cy="152400"/>
           </a:xfrm>
           <a:prstGeom prst="rect">
             <a:avLst/>
@@ -5936,7 +5938,7 @@
               <a:buNone/>
             </a:pPr>
             <a:r>
-              <a:rPr lang="en-US" sz="1000" b="1" dirty="0">
+              <a:rPr lang="en-US" sz="1100" b="1" dirty="0">
                 <a:solidFill>
                   <a:srgbClr val="8250DF"/>
                 </a:solidFill>
@@ -5946,7 +5948,7 @@
               </a:rPr>
               <a:t>BUILD WHILE YOU WAIT</a:t>
             </a:r>
-            <a:endParaRPr lang="en-US" sz="1000" dirty="0"/>
+            <a:endParaRPr lang="en-US" sz="1100" dirty="0"/>
           </a:p>
         </p:txBody>
       </p:sp>
@@ -5958,8 +5960,8 @@
         </p:nvSpPr>
         <p:spPr>
           <a:xfrm>
-            <a:off x="482501" y="523726"/>
-            <a:ext cx="7772400" cy="393650"/>
+            <a:off x="482501" y="533251"/>
+            <a:ext cx="8342275" cy="419100"/>
           </a:xfrm>
           <a:prstGeom prst="rect">
             <a:avLst/>
@@ -5973,7 +5975,7 @@
           <a:p>
             <a:pPr algn="l" indent="0" marL="0">
               <a:lnSpc>
-                <a:spcPts val="3100"/>
+                <a:spcPts val="3300"/>
               </a:lnSpc>
               <a:spcBef>
                 <a:spcPts val="400"/>
@@ -5981,7 +5983,7 @@
               <a:buNone/>
             </a:pPr>
             <a:r>
-              <a:rPr lang="en-US" sz="2600" b="1" dirty="0">
+              <a:rPr lang="en-US" sz="2800" b="1" dirty="0">
                 <a:solidFill>
                   <a:srgbClr val="1F2328"/>
                 </a:solidFill>
@@ -5991,7 +5993,7 @@
               </a:rPr>
               <a:t>Create the first workflow</a:t>
             </a:r>
-            <a:endParaRPr lang="en-US" sz="2600" dirty="0"/>
+            <a:endParaRPr lang="en-US" sz="2800" dirty="0"/>
           </a:p>
         </p:txBody>
       </p:sp>
@@ -6003,12 +6005,12 @@
         </p:nvSpPr>
         <p:spPr>
           <a:xfrm>
-            <a:off x="634901" y="1946077"/>
-            <a:ext cx="7873901" cy="2178248"/>
+            <a:off x="634901" y="1846064"/>
+            <a:ext cx="7873901" cy="2429173"/>
           </a:xfrm>
           <a:prstGeom prst="roundRect">
             <a:avLst>
-              <a:gd name="adj" fmla="val 4664"/>
+              <a:gd name="adj" fmla="val 4183"/>
             </a:avLst>
           </a:prstGeom>
           <a:solidFill>
@@ -6042,7 +6044,7 @@
         </p:nvSpPr>
         <p:spPr>
           <a:xfrm>
-            <a:off x="634901" y="1950839"/>
+            <a:off x="634901" y="1850827"/>
             <a:ext cx="7873901" cy="0"/>
           </a:xfrm>
           <a:prstGeom prst="line">
@@ -6065,8 +6067,8 @@
         </p:nvSpPr>
         <p:spPr>
           <a:xfrm>
-            <a:off x="8504039" y="1946077"/>
-            <a:ext cx="0" cy="2178248"/>
+            <a:off x="8504039" y="1846064"/>
+            <a:ext cx="0" cy="2429173"/>
           </a:xfrm>
           <a:prstGeom prst="line">
             <a:avLst/>
@@ -6088,7 +6090,7 @@
         </p:nvSpPr>
         <p:spPr>
           <a:xfrm>
-            <a:off x="634901" y="4119563"/>
+            <a:off x="634901" y="4270474"/>
             <a:ext cx="7873901" cy="0"/>
           </a:xfrm>
           <a:prstGeom prst="line">
@@ -6111,8 +6113,8 @@
         </p:nvSpPr>
         <p:spPr>
           <a:xfrm>
-            <a:off x="663476" y="1946077"/>
-            <a:ext cx="0" cy="2178248"/>
+            <a:off x="663476" y="1846064"/>
+            <a:ext cx="0" cy="2429173"/>
           </a:xfrm>
           <a:prstGeom prst="line">
             <a:avLst/>
@@ -6142,8 +6144,8 @@
         </p:blipFill>
         <p:spPr>
           <a:xfrm>
-            <a:off x="945952" y="2158752"/>
-            <a:ext cx="165050" cy="165050"/>
+            <a:off x="971401" y="2084189"/>
+            <a:ext cx="190500" cy="190500"/>
           </a:xfrm>
           <a:prstGeom prst="rect">
             <a:avLst/>
@@ -6158,8 +6160,8 @@
         </p:nvSpPr>
         <p:spPr>
           <a:xfrm>
-            <a:off x="1187202" y="2174528"/>
-            <a:ext cx="1220054" cy="133350"/>
+            <a:off x="1238101" y="2103239"/>
+            <a:ext cx="1423169" cy="152400"/>
           </a:xfrm>
           <a:prstGeom prst="rect">
             <a:avLst/>
@@ -6175,7 +6177,7 @@
               <a:buNone/>
             </a:pPr>
             <a:r>
-              <a:rPr lang="en-US" sz="900" dirty="0">
+              <a:rPr lang="en-US" sz="1050" dirty="0">
                 <a:solidFill>
                   <a:srgbClr val="8250DF"/>
                 </a:solidFill>
@@ -6189,7 +6191,7 @@
               <a:buNone/>
             </a:pPr>
             <a:r>
-              <a:rPr lang="en-US" sz="900" b="1" dirty="0">
+              <a:rPr lang="en-US" sz="1050" b="1" dirty="0">
                 <a:solidFill>
                   <a:srgbClr val="818B98"/>
                 </a:solidFill>
@@ -6199,7 +6201,7 @@
               </a:rPr>
               <a:t> · ABRIDGED</a:t>
             </a:r>
-            <a:endParaRPr lang="en-US" sz="900" dirty="0"/>
+            <a:endParaRPr lang="en-US" sz="1050" dirty="0"/>
           </a:p>
         </p:txBody>
       </p:sp>
@@ -6211,8 +6213,8 @@
         </p:nvSpPr>
         <p:spPr>
           <a:xfrm>
-            <a:off x="945952" y="2425303"/>
-            <a:ext cx="7445413" cy="1460897"/>
+            <a:off x="971401" y="2388840"/>
+            <a:ext cx="7393496" cy="1622971"/>
           </a:xfrm>
           <a:prstGeom prst="rect">
             <a:avLst/>
@@ -6226,12 +6228,12 @@
           <a:p>
             <a:pPr algn="l" indent="0" marL="0">
               <a:lnSpc>
-                <a:spcPts val="1917"/>
+                <a:spcPts val="2556"/>
               </a:lnSpc>
               <a:buNone/>
             </a:pPr>
             <a:r>
-              <a:rPr lang="en-US" sz="1350" b="1" dirty="0">
+              <a:rPr lang="en-US" sz="1800" b="1" dirty="0">
                 <a:solidFill>
                   <a:srgbClr val="1F2328"/>
                 </a:solidFill>
@@ -6243,12 +6245,12 @@
             </a:r>
             <a:pPr algn="l" indent="0" marL="0">
               <a:lnSpc>
-                <a:spcPts val="1917"/>
+                <a:spcPts val="2556"/>
               </a:lnSpc>
               <a:buNone/>
             </a:pPr>
             <a:r>
-              <a:rPr lang="en-US" sz="1350" dirty="0">
+              <a:rPr lang="en-US" sz="1800" dirty="0">
                 <a:solidFill>
                   <a:srgbClr val="1F2328"/>
                 </a:solidFill>
@@ -6256,16 +6258,16 @@
                 <a:ea typeface="Arial" pitchFamily="34" charset="-122"/>
                 <a:cs typeface="Arial" pitchFamily="34" charset="-120"/>
               </a:rPr>
-              <a:t> Meanwhile, create n8n-workflows/github-zen.json: an n8n workflow named "GitHub Zen" with a Webhook trigger (POST, path github-zen), an HTTP Request node that calls https://api.github.com/zen, and a Respond to Webhook node that returns that text. Then create scripts/run-n8n-workflow.mjs. … It reads an API key from the N8N_API_KEY environment variable, and </a:t>
+              <a:t> Meanwhile, create n8n-workflows/github-zen.json: an n8n workflow named "GitHub Zen" … Then create scripts/run-n8n-workflow.mjs … It </a:t>
             </a:r>
             <a:pPr algn="l" indent="0" marL="0">
               <a:lnSpc>
-                <a:spcPts val="1917"/>
+                <a:spcPts val="2556"/>
               </a:lnSpc>
               <a:buNone/>
             </a:pPr>
             <a:r>
-              <a:rPr lang="en-US" sz="1350" b="1" dirty="0">
+              <a:rPr lang="en-US" sz="1800" b="1" dirty="0">
                 <a:solidFill>
                   <a:srgbClr val="1F2328"/>
                 </a:solidFill>
@@ -6277,12 +6279,12 @@
             </a:r>
             <a:pPr algn="l" indent="0" marL="0">
               <a:lnSpc>
-                <a:spcPts val="1917"/>
+                <a:spcPts val="2556"/>
               </a:lnSpc>
               <a:buNone/>
             </a:pPr>
             <a:r>
-              <a:rPr lang="en-US" sz="1350" dirty="0">
+              <a:rPr lang="en-US" sz="1800" dirty="0">
                 <a:solidFill>
                   <a:srgbClr val="1F2328"/>
                 </a:solidFill>
@@ -6292,7 +6294,7 @@
               </a:rPr>
               <a:t>. … Don't run it yet.</a:t>
             </a:r>
-            <a:endParaRPr lang="en-US" sz="1350" dirty="0"/>
+            <a:endParaRPr lang="en-US" sz="1800" dirty="0"/>
           </a:p>
         </p:txBody>
       </p:sp>
@@ -6336,12 +6338,12 @@
         </p:nvSpPr>
         <p:spPr>
           <a:xfrm>
-            <a:off x="8077200" y="152400"/>
-            <a:ext cx="482650" cy="266700"/>
+            <a:off x="8026598" y="152400"/>
+            <a:ext cx="533251" cy="279350"/>
           </a:xfrm>
           <a:prstGeom prst="roundRect">
             <a:avLst>
-              <a:gd name="adj" fmla="val 23810"/>
+              <a:gd name="adj" fmla="val 22731"/>
             </a:avLst>
           </a:prstGeom>
           <a:solidFill>
@@ -6368,8 +6370,8 @@
         </p:nvSpPr>
         <p:spPr>
           <a:xfrm>
-            <a:off x="8201863" y="219075"/>
-            <a:ext cx="233324" cy="133350"/>
+            <a:off x="8163659" y="220563"/>
+            <a:ext cx="259131" cy="142875"/>
           </a:xfrm>
           <a:prstGeom prst="rect">
             <a:avLst/>
@@ -6385,7 +6387,7 @@
               <a:buNone/>
             </a:pPr>
             <a:r>
-              <a:rPr lang="en-US" sz="900" b="1" dirty="0">
+              <a:rPr lang="en-US" sz="1000" b="1" dirty="0">
                 <a:solidFill>
                   <a:srgbClr val="FFFFFF"/>
                 </a:solidFill>
@@ -6395,7 +6397,7 @@
               </a:rPr>
               <a:t>N8N</a:t>
             </a:r>
-            <a:endParaRPr lang="en-US" sz="900" dirty="0"/>
+            <a:endParaRPr lang="en-US" sz="1000" dirty="0"/>
           </a:p>
         </p:txBody>
       </p:sp>
@@ -6432,7 +6434,7 @@
         <p:spPr>
           <a:xfrm>
             <a:off x="482501" y="330101"/>
-            <a:ext cx="7772400" cy="142875"/>
+            <a:ext cx="8342275" cy="152400"/>
           </a:xfrm>
           <a:prstGeom prst="rect">
             <a:avLst/>
@@ -6448,7 +6450,7 @@
               <a:buNone/>
             </a:pPr>
             <a:r>
-              <a:rPr lang="en-US" sz="1000" b="1" dirty="0">
+              <a:rPr lang="en-US" sz="1100" b="1" dirty="0">
                 <a:solidFill>
                   <a:srgbClr val="8250DF"/>
                 </a:solidFill>
@@ -6458,7 +6460,7 @@
               </a:rPr>
               <a:t>VERIFY</a:t>
             </a:r>
-            <a:endParaRPr lang="en-US" sz="1000" dirty="0"/>
+            <a:endParaRPr lang="en-US" sz="1100" dirty="0"/>
           </a:p>
         </p:txBody>
       </p:sp>
@@ -6470,8 +6472,8 @@
         </p:nvSpPr>
         <p:spPr>
           <a:xfrm>
-            <a:off x="482501" y="523726"/>
-            <a:ext cx="7772400" cy="393650"/>
+            <a:off x="482501" y="533251"/>
+            <a:ext cx="8342275" cy="419100"/>
           </a:xfrm>
           <a:prstGeom prst="rect">
             <a:avLst/>
@@ -6485,7 +6487,7 @@
           <a:p>
             <a:pPr algn="l" indent="0" marL="0">
               <a:lnSpc>
-                <a:spcPts val="3100"/>
+                <a:spcPts val="3300"/>
               </a:lnSpc>
               <a:spcBef>
                 <a:spcPts val="400"/>
@@ -6493,7 +6495,7 @@
               <a:buNone/>
             </a:pPr>
             <a:r>
-              <a:rPr lang="en-US" sz="2600" b="1" dirty="0">
+              <a:rPr lang="en-US" sz="2800" b="1" dirty="0">
                 <a:solidFill>
                   <a:srgbClr val="1F2328"/>
                 </a:solidFill>
@@ -6503,7 +6505,7 @@
               </a:rPr>
               <a:t>Prove it is healthy</a:t>
             </a:r>
-            <a:endParaRPr lang="en-US" sz="2600" dirty="0"/>
+            <a:endParaRPr lang="en-US" sz="2800" dirty="0"/>
           </a:p>
         </p:txBody>
       </p:sp>
@@ -6515,7 +6517,7 @@
         </p:nvSpPr>
         <p:spPr>
           <a:xfrm>
-            <a:off x="1015901" y="2194471"/>
+            <a:off x="1015901" y="2181969"/>
             <a:ext cx="7111901" cy="1186011"/>
           </a:xfrm>
           <a:prstGeom prst="roundRect">
@@ -6554,7 +6556,7 @@
         </p:nvSpPr>
         <p:spPr>
           <a:xfrm>
-            <a:off x="1015901" y="2194471"/>
+            <a:off x="1015901" y="2181969"/>
             <a:ext cx="7111901" cy="253901"/>
           </a:xfrm>
           <a:prstGeom prst="roundRect">
@@ -6586,7 +6588,7 @@
         </p:nvSpPr>
         <p:spPr>
           <a:xfrm>
-            <a:off x="1142851" y="2276921"/>
+            <a:off x="1142851" y="2264420"/>
             <a:ext cx="88850" cy="88850"/>
           </a:xfrm>
           <a:prstGeom prst="roundRect">
@@ -6618,7 +6620,7 @@
         </p:nvSpPr>
         <p:spPr>
           <a:xfrm>
-            <a:off x="1295102" y="2276921"/>
+            <a:off x="1295102" y="2264420"/>
             <a:ext cx="88850" cy="88850"/>
           </a:xfrm>
           <a:prstGeom prst="roundRect">
@@ -6650,7 +6652,7 @@
         </p:nvSpPr>
         <p:spPr>
           <a:xfrm>
-            <a:off x="1447354" y="2276921"/>
+            <a:off x="1447354" y="2264420"/>
             <a:ext cx="88850" cy="88850"/>
           </a:xfrm>
           <a:prstGeom prst="roundRect">
@@ -6682,8 +6684,8 @@
         </p:nvSpPr>
         <p:spPr>
           <a:xfrm>
-            <a:off x="1701105" y="2264271"/>
-            <a:ext cx="528584" cy="114300"/>
+            <a:off x="1701105" y="2237482"/>
+            <a:ext cx="621792" cy="142875"/>
           </a:xfrm>
           <a:prstGeom prst="rect">
             <a:avLst/>
@@ -6699,7 +6701,7 @@
               <a:buNone/>
             </a:pPr>
             <a:r>
-              <a:rPr lang="en-US" sz="850" dirty="0">
+              <a:rPr lang="en-US" sz="1000" dirty="0">
                 <a:solidFill>
                   <a:srgbClr val="8B949E"/>
                 </a:solidFill>
@@ -6709,7 +6711,7 @@
               </a:rPr>
               <a:t>Terminal</a:t>
             </a:r>
-            <a:endParaRPr lang="en-US" sz="850" dirty="0"/>
+            <a:endParaRPr lang="en-US" sz="1000" dirty="0"/>
           </a:p>
         </p:txBody>
       </p:sp>
@@ -6721,7 +6723,7 @@
         </p:nvSpPr>
         <p:spPr>
           <a:xfrm>
-            <a:off x="1244501" y="2626072"/>
+            <a:off x="1244501" y="2613571"/>
             <a:ext cx="6787795" cy="275630"/>
           </a:xfrm>
           <a:prstGeom prst="rect">
@@ -6780,7 +6782,7 @@
         </p:nvSpPr>
         <p:spPr>
           <a:xfrm>
-            <a:off x="1244501" y="2901702"/>
+            <a:off x="1244501" y="2889200"/>
             <a:ext cx="6787795" cy="275630"/>
           </a:xfrm>
           <a:prstGeom prst="rect">
@@ -6830,8 +6832,8 @@
         </p:blipFill>
         <p:spPr>
           <a:xfrm>
-            <a:off x="1015901" y="3621732"/>
-            <a:ext cx="190500" cy="190500"/>
+            <a:off x="1015901" y="3659981"/>
+            <a:ext cx="215801" cy="215801"/>
           </a:xfrm>
           <a:prstGeom prst="rect">
             <a:avLst/>
@@ -6846,8 +6848,8 @@
         </p:nvSpPr>
         <p:spPr>
           <a:xfrm>
-            <a:off x="1307902" y="3609082"/>
-            <a:ext cx="3994740" cy="215950"/>
+            <a:off x="1333202" y="3647331"/>
+            <a:ext cx="4474140" cy="241250"/>
           </a:xfrm>
           <a:prstGeom prst="rect">
             <a:avLst/>
@@ -6861,12 +6863,12 @@
           <a:p>
             <a:pPr algn="l" indent="0" marL="0">
               <a:lnSpc>
-                <a:spcPts val="1700"/>
+                <a:spcPts val="1900"/>
               </a:lnSpc>
               <a:buNone/>
             </a:pPr>
             <a:r>
-              <a:rPr lang="en-US" sz="1250" dirty="0">
+              <a:rPr lang="en-US" sz="1400" dirty="0">
                 <a:solidFill>
                   <a:srgbClr val="1F2328"/>
                 </a:solidFill>
@@ -6878,12 +6880,12 @@
             </a:r>
             <a:pPr algn="l" indent="0" marL="0">
               <a:lnSpc>
-                <a:spcPts val="1700"/>
+                <a:spcPts val="1900"/>
               </a:lnSpc>
               <a:buNone/>
             </a:pPr>
             <a:r>
-              <a:rPr lang="en-US" sz="1250" b="1" dirty="0">
+              <a:rPr lang="en-US" sz="1400" b="1" dirty="0">
                 <a:solidFill>
                   <a:srgbClr val="1F2328"/>
                 </a:solidFill>
@@ -6895,12 +6897,12 @@
             </a:r>
             <a:pPr algn="l" indent="0" marL="0">
               <a:lnSpc>
-                <a:spcPts val="1700"/>
+                <a:spcPts val="1900"/>
               </a:lnSpc>
               <a:buNone/>
             </a:pPr>
             <a:r>
-              <a:rPr lang="en-US" sz="1250" dirty="0">
+              <a:rPr lang="en-US" sz="1400" dirty="0">
                 <a:solidFill>
                   <a:srgbClr val="1F2328"/>
                 </a:solidFill>
@@ -6910,7 +6912,7 @@
               </a:rPr>
               <a:t>.</a:t>
             </a:r>
-            <a:endParaRPr lang="en-US" sz="1250" dirty="0"/>
+            <a:endParaRPr lang="en-US" sz="1400" dirty="0"/>
           </a:p>
         </p:txBody>
       </p:sp>
@@ -6954,12 +6956,12 @@
         </p:nvSpPr>
         <p:spPr>
           <a:xfrm>
-            <a:off x="8077200" y="152400"/>
-            <a:ext cx="482650" cy="266700"/>
+            <a:off x="8026598" y="152400"/>
+            <a:ext cx="533251" cy="279350"/>
           </a:xfrm>
           <a:prstGeom prst="roundRect">
             <a:avLst>
-              <a:gd name="adj" fmla="val 23810"/>
+              <a:gd name="adj" fmla="val 22731"/>
             </a:avLst>
           </a:prstGeom>
           <a:solidFill>
@@ -6986,8 +6988,8 @@
         </p:nvSpPr>
         <p:spPr>
           <a:xfrm>
-            <a:off x="8201863" y="219075"/>
-            <a:ext cx="233324" cy="133350"/>
+            <a:off x="8163659" y="220563"/>
+            <a:ext cx="259131" cy="142875"/>
           </a:xfrm>
           <a:prstGeom prst="rect">
             <a:avLst/>
@@ -7003,7 +7005,7 @@
               <a:buNone/>
             </a:pPr>
             <a:r>
-              <a:rPr lang="en-US" sz="900" b="1" dirty="0">
+              <a:rPr lang="en-US" sz="1000" b="1" dirty="0">
                 <a:solidFill>
                   <a:srgbClr val="FFFFFF"/>
                 </a:solidFill>
@@ -7013,7 +7015,7 @@
               </a:rPr>
               <a:t>N8N</a:t>
             </a:r>
-            <a:endParaRPr lang="en-US" sz="900" dirty="0"/>
+            <a:endParaRPr lang="en-US" sz="1000" dirty="0"/>
           </a:p>
         </p:txBody>
       </p:sp>
@@ -7122,7 +7124,7 @@
         <p:spPr>
           <a:xfrm>
             <a:off x="558701" y="1828651"/>
-            <a:ext cx="3886200" cy="142875"/>
+            <a:ext cx="3886200" cy="152400"/>
           </a:xfrm>
           <a:prstGeom prst="rect">
             <a:avLst/>
@@ -7141,7 +7143,7 @@
               <a:buNone/>
             </a:pPr>
             <a:r>
-              <a:rPr lang="en-US" sz="1000" b="1" dirty="0">
+              <a:rPr lang="en-US" sz="1100" b="1" dirty="0">
                 <a:solidFill>
                   <a:srgbClr val="59636E"/>
                 </a:solidFill>
@@ -7151,7 +7153,7 @@
               </a:rPr>
               <a:t>SECTION 3 OF 3</a:t>
             </a:r>
-            <a:endParaRPr lang="en-US" sz="1000" dirty="0"/>
+            <a:endParaRPr lang="en-US" sz="1100" dirty="0"/>
           </a:p>
         </p:txBody>
       </p:sp>
@@ -7163,8 +7165,8 @@
         </p:nvSpPr>
         <p:spPr>
           <a:xfrm>
-            <a:off x="558701" y="2034927"/>
-            <a:ext cx="3886200" cy="444550"/>
+            <a:off x="558701" y="2044452"/>
+            <a:ext cx="3886200" cy="469850"/>
           </a:xfrm>
           <a:prstGeom prst="rect">
             <a:avLst/>
@@ -7178,7 +7180,7 @@
           <a:p>
             <a:pPr algn="l" indent="0" marL="0">
               <a:lnSpc>
-                <a:spcPts val="3500"/>
+                <a:spcPts val="3700"/>
               </a:lnSpc>
               <a:spcBef>
                 <a:spcPts val="500"/>
@@ -7186,7 +7188,7 @@
               <a:buNone/>
             </a:pPr>
             <a:r>
-              <a:rPr lang="en-US" sz="3000" b="1" dirty="0">
+              <a:rPr lang="en-US" sz="3200" b="1" dirty="0">
                 <a:solidFill>
                   <a:srgbClr val="1F2328"/>
                 </a:solidFill>
@@ -7196,7 +7198,7 @@
               </a:rPr>
               <a:t>Operate the app</a:t>
             </a:r>
-            <a:endParaRPr lang="en-US" sz="3000" dirty="0"/>
+            <a:endParaRPr lang="en-US" sz="3200" dirty="0"/>
           </a:p>
         </p:txBody>
       </p:sp>
@@ -7208,8 +7210,8 @@
         </p:nvSpPr>
         <p:spPr>
           <a:xfrm>
-            <a:off x="558701" y="2606427"/>
-            <a:ext cx="3886200" cy="482501"/>
+            <a:off x="558701" y="2666702"/>
+            <a:ext cx="3886200" cy="800100"/>
           </a:xfrm>
           <a:prstGeom prst="rect">
             <a:avLst/>
@@ -7223,15 +7225,15 @@
           <a:p>
             <a:pPr algn="l" indent="0" marL="0">
               <a:lnSpc>
-                <a:spcPts val="1900"/>
+                <a:spcPts val="2100"/>
               </a:lnSpc>
               <a:spcBef>
-                <a:spcPts val="1000"/>
+                <a:spcPts val="1200"/>
               </a:spcBef>
               <a:buNone/>
             </a:pPr>
             <a:r>
-              <a:rPr lang="en-US" sz="1400" dirty="0">
+              <a:rPr lang="en-US" sz="1600" dirty="0">
                 <a:solidFill>
                   <a:srgbClr val="59636E"/>
                 </a:solidFill>
@@ -7241,7 +7243,7 @@
               </a:rPr>
               <a:t>Create an owner account and an API key, then let the agent publish and run the workflow.</a:t>
             </a:r>
-            <a:endParaRPr lang="en-US" sz="1400" dirty="0"/>
+            <a:endParaRPr lang="en-US" sz="1600" dirty="0"/>
           </a:p>
         </p:txBody>
       </p:sp>
@@ -7310,11 +7312,11 @@
         <p:spPr>
           <a:xfrm>
             <a:off x="558701" y="4368701"/>
-            <a:ext cx="1473547" cy="336352"/>
+            <a:ext cx="1620589" cy="361652"/>
           </a:xfrm>
           <a:prstGeom prst="roundRect">
             <a:avLst>
-              <a:gd name="adj" fmla="val 52861"/>
+              <a:gd name="adj" fmla="val 52675"/>
             </a:avLst>
           </a:prstGeom>
           <a:solidFill>
@@ -7346,11 +7348,11 @@
         <p:spPr>
           <a:xfrm>
             <a:off x="644426" y="4441627"/>
-            <a:ext cx="190500" cy="190500"/>
+            <a:ext cx="215801" cy="215801"/>
           </a:xfrm>
           <a:prstGeom prst="roundRect">
             <a:avLst>
-              <a:gd name="adj" fmla="val 480000"/>
+              <a:gd name="adj" fmla="val 423724"/>
             </a:avLst>
           </a:prstGeom>
           <a:solidFill>
@@ -7377,8 +7379,8 @@
         </p:nvSpPr>
         <p:spPr>
           <a:xfrm>
-            <a:off x="710833" y="4479727"/>
-            <a:ext cx="57686" cy="114300"/>
+            <a:off x="719840" y="4482852"/>
+            <a:ext cx="64972" cy="133350"/>
           </a:xfrm>
           <a:prstGeom prst="rect">
             <a:avLst/>
@@ -7394,7 +7396,7 @@
               <a:buNone/>
             </a:pPr>
             <a:r>
-              <a:rPr lang="en-US" sz="800" b="1" dirty="0">
+              <a:rPr lang="en-US" sz="900" b="1" dirty="0">
                 <a:solidFill>
                   <a:srgbClr val="818B98"/>
                 </a:solidFill>
@@ -7404,7 +7406,7 @@
               </a:rPr>
               <a:t>1</a:t>
             </a:r>
-            <a:endParaRPr lang="en-US" sz="800" dirty="0"/>
+            <a:endParaRPr lang="en-US" sz="900" dirty="0"/>
           </a:p>
         </p:txBody>
       </p:sp>
@@ -7416,8 +7418,8 @@
         </p:nvSpPr>
         <p:spPr>
           <a:xfrm>
-            <a:off x="911126" y="4470202"/>
-            <a:ext cx="1004340" cy="133350"/>
+            <a:off x="936427" y="4478089"/>
+            <a:ext cx="1115613" cy="142875"/>
           </a:xfrm>
           <a:prstGeom prst="rect">
             <a:avLst/>
@@ -7433,7 +7435,7 @@
               <a:buNone/>
             </a:pPr>
             <a:r>
-              <a:rPr lang="en-US" sz="900" b="1" dirty="0">
+              <a:rPr lang="en-US" sz="1000" b="1" dirty="0">
                 <a:solidFill>
                   <a:srgbClr val="818B98"/>
                 </a:solidFill>
@@ -7443,7 +7445,7 @@
               </a:rPr>
               <a:t>Plan and generate</a:t>
             </a:r>
-            <a:endParaRPr lang="en-US" sz="900" dirty="0"/>
+            <a:endParaRPr lang="en-US" sz="1000" dirty="0"/>
           </a:p>
         </p:txBody>
       </p:sp>
@@ -7455,12 +7457,12 @@
         </p:nvSpPr>
         <p:spPr>
           <a:xfrm>
-            <a:off x="2133749" y="4368701"/>
-            <a:ext cx="1435447" cy="336352"/>
+            <a:off x="2280791" y="4368701"/>
+            <a:ext cx="1578322" cy="361652"/>
           </a:xfrm>
           <a:prstGeom prst="roundRect">
             <a:avLst>
-              <a:gd name="adj" fmla="val 52861"/>
+              <a:gd name="adj" fmla="val 52675"/>
             </a:avLst>
           </a:prstGeom>
           <a:solidFill>
@@ -7491,12 +7493,12 @@
         </p:nvSpPr>
         <p:spPr>
           <a:xfrm>
-            <a:off x="2219474" y="4441627"/>
-            <a:ext cx="190500" cy="190500"/>
+            <a:off x="2366516" y="4441627"/>
+            <a:ext cx="215801" cy="215801"/>
           </a:xfrm>
           <a:prstGeom prst="roundRect">
             <a:avLst>
-              <a:gd name="adj" fmla="val 480000"/>
+              <a:gd name="adj" fmla="val 423724"/>
             </a:avLst>
           </a:prstGeom>
           <a:solidFill>
@@ -7523,8 +7525,8 @@
         </p:nvSpPr>
         <p:spPr>
           <a:xfrm>
-            <a:off x="2285881" y="4479727"/>
-            <a:ext cx="57686" cy="114300"/>
+            <a:off x="2441930" y="4482852"/>
+            <a:ext cx="64972" cy="133350"/>
           </a:xfrm>
           <a:prstGeom prst="rect">
             <a:avLst/>
@@ -7540,7 +7542,7 @@
               <a:buNone/>
             </a:pPr>
             <a:r>
-              <a:rPr lang="en-US" sz="800" b="1" dirty="0">
+              <a:rPr lang="en-US" sz="900" b="1" dirty="0">
                 <a:solidFill>
                   <a:srgbClr val="818B98"/>
                 </a:solidFill>
@@ -7550,7 +7552,7 @@
               </a:rPr>
               <a:t>2</a:t>
             </a:r>
-            <a:endParaRPr lang="en-US" sz="800" dirty="0"/>
+            <a:endParaRPr lang="en-US" sz="900" dirty="0"/>
           </a:p>
         </p:txBody>
       </p:sp>
@@ -7562,8 +7564,8 @@
         </p:nvSpPr>
         <p:spPr>
           <a:xfrm>
-            <a:off x="2486174" y="4470202"/>
-            <a:ext cx="965478" cy="133350"/>
+            <a:off x="2658517" y="4478089"/>
+            <a:ext cx="1072500" cy="142875"/>
           </a:xfrm>
           <a:prstGeom prst="rect">
             <a:avLst/>
@@ -7579,7 +7581,7 @@
               <a:buNone/>
             </a:pPr>
             <a:r>
-              <a:rPr lang="en-US" sz="900" b="1" dirty="0">
+              <a:rPr lang="en-US" sz="1000" b="1" dirty="0">
                 <a:solidFill>
                   <a:srgbClr val="818B98"/>
                 </a:solidFill>
@@ -7589,7 +7591,7 @@
               </a:rPr>
               <a:t>Deploy in parallel</a:t>
             </a:r>
-            <a:endParaRPr lang="en-US" sz="900" dirty="0"/>
+            <a:endParaRPr lang="en-US" sz="1000" dirty="0"/>
           </a:p>
         </p:txBody>
       </p:sp>
@@ -7601,12 +7603,12 @@
         </p:nvSpPr>
         <p:spPr>
           <a:xfrm>
-            <a:off x="3670697" y="4368701"/>
-            <a:ext cx="1359098" cy="336352"/>
+            <a:off x="3960614" y="4368701"/>
+            <a:ext cx="1493490" cy="361652"/>
           </a:xfrm>
           <a:prstGeom prst="roundRect">
             <a:avLst>
-              <a:gd name="adj" fmla="val 52861"/>
+              <a:gd name="adj" fmla="val 52675"/>
             </a:avLst>
           </a:prstGeom>
           <a:solidFill>
@@ -7637,12 +7639,12 @@
         </p:nvSpPr>
         <p:spPr>
           <a:xfrm>
-            <a:off x="3756422" y="4441627"/>
-            <a:ext cx="190500" cy="190500"/>
+            <a:off x="4046339" y="4441627"/>
+            <a:ext cx="215801" cy="215801"/>
           </a:xfrm>
           <a:prstGeom prst="roundRect">
             <a:avLst>
-              <a:gd name="adj" fmla="val 480000"/>
+              <a:gd name="adj" fmla="val 423724"/>
             </a:avLst>
           </a:prstGeom>
           <a:solidFill>
@@ -7669,8 +7671,8 @@
         </p:nvSpPr>
         <p:spPr>
           <a:xfrm>
-            <a:off x="3822829" y="4479727"/>
-            <a:ext cx="57686" cy="114300"/>
+            <a:off x="4121753" y="4482852"/>
+            <a:ext cx="64972" cy="133350"/>
           </a:xfrm>
           <a:prstGeom prst="rect">
             <a:avLst/>
@@ -7686,7 +7688,7 @@
               <a:buNone/>
             </a:pPr>
             <a:r>
-              <a:rPr lang="en-US" sz="800" b="1" dirty="0">
+              <a:rPr lang="en-US" sz="900" b="1" dirty="0">
                 <a:solidFill>
                   <a:srgbClr val="1A7F37"/>
                 </a:solidFill>
@@ -7696,7 +7698,7 @@
               </a:rPr>
               <a:t>3</a:t>
             </a:r>
-            <a:endParaRPr lang="en-US" sz="800" dirty="0"/>
+            <a:endParaRPr lang="en-US" sz="900" dirty="0"/>
           </a:p>
         </p:txBody>
       </p:sp>
@@ -7708,8 +7710,8 @@
         </p:nvSpPr>
         <p:spPr>
           <a:xfrm>
-            <a:off x="4023122" y="4470202"/>
-            <a:ext cx="887602" cy="133350"/>
+            <a:off x="4338340" y="4478089"/>
+            <a:ext cx="985971" cy="142875"/>
           </a:xfrm>
           <a:prstGeom prst="rect">
             <a:avLst/>
@@ -7725,7 +7727,7 @@
               <a:buNone/>
             </a:pPr>
             <a:r>
-              <a:rPr lang="en-US" sz="900" b="1" dirty="0">
+              <a:rPr lang="en-US" sz="1000" b="1" dirty="0">
                 <a:solidFill>
                   <a:srgbClr val="FFFFFF"/>
                 </a:solidFill>
@@ -7735,7 +7737,7 @@
               </a:rPr>
               <a:t>Operate the app</a:t>
             </a:r>
-            <a:endParaRPr lang="en-US" sz="900" dirty="0"/>
+            <a:endParaRPr lang="en-US" sz="1000" dirty="0"/>
           </a:p>
         </p:txBody>
       </p:sp>
@@ -7779,12 +7781,12 @@
         </p:nvSpPr>
         <p:spPr>
           <a:xfrm>
-            <a:off x="8077200" y="152400"/>
-            <a:ext cx="482650" cy="266700"/>
+            <a:off x="8026598" y="152400"/>
+            <a:ext cx="533251" cy="279350"/>
           </a:xfrm>
           <a:prstGeom prst="roundRect">
             <a:avLst>
-              <a:gd name="adj" fmla="val 23810"/>
+              <a:gd name="adj" fmla="val 22731"/>
             </a:avLst>
           </a:prstGeom>
           <a:solidFill>
@@ -7811,8 +7813,8 @@
         </p:nvSpPr>
         <p:spPr>
           <a:xfrm>
-            <a:off x="8201863" y="219075"/>
-            <a:ext cx="233324" cy="133350"/>
+            <a:off x="8163659" y="220563"/>
+            <a:ext cx="259131" cy="142875"/>
           </a:xfrm>
           <a:prstGeom prst="rect">
             <a:avLst/>
@@ -7828,7 +7830,7 @@
               <a:buNone/>
             </a:pPr>
             <a:r>
-              <a:rPr lang="en-US" sz="900" b="1" dirty="0">
+              <a:rPr lang="en-US" sz="1000" b="1" dirty="0">
                 <a:solidFill>
                   <a:srgbClr val="FFFFFF"/>
                 </a:solidFill>
@@ -7838,7 +7840,7 @@
               </a:rPr>
               <a:t>N8N</a:t>
             </a:r>
-            <a:endParaRPr lang="en-US" sz="900" dirty="0"/>
+            <a:endParaRPr lang="en-US" sz="1000" dirty="0"/>
           </a:p>
         </p:txBody>
       </p:sp>
@@ -7875,7 +7877,7 @@
         <p:spPr>
           <a:xfrm>
             <a:off x="482501" y="330101"/>
-            <a:ext cx="7772400" cy="142875"/>
+            <a:ext cx="8342275" cy="152400"/>
           </a:xfrm>
           <a:prstGeom prst="rect">
             <a:avLst/>
@@ -7891,7 +7893,7 @@
               <a:buNone/>
             </a:pPr>
             <a:r>
-              <a:rPr lang="en-US" sz="1000" b="1" dirty="0">
+              <a:rPr lang="en-US" sz="1100" b="1" dirty="0">
                 <a:solidFill>
                   <a:srgbClr val="1A7F37"/>
                 </a:solidFill>
@@ -7901,7 +7903,7 @@
               </a:rPr>
               <a:t>OPERATE</a:t>
             </a:r>
-            <a:endParaRPr lang="en-US" sz="1000" dirty="0"/>
+            <a:endParaRPr lang="en-US" sz="1100" dirty="0"/>
           </a:p>
         </p:txBody>
       </p:sp>
@@ -7913,8 +7915,8 @@
         </p:nvSpPr>
         <p:spPr>
           <a:xfrm>
-            <a:off x="482501" y="523726"/>
-            <a:ext cx="7772400" cy="393650"/>
+            <a:off x="482501" y="533251"/>
+            <a:ext cx="8342275" cy="419100"/>
           </a:xfrm>
           <a:prstGeom prst="rect">
             <a:avLst/>
@@ -7928,7 +7930,7 @@
           <a:p>
             <a:pPr algn="l" indent="0" marL="0">
               <a:lnSpc>
-                <a:spcPts val="3100"/>
+                <a:spcPts val="3300"/>
               </a:lnSpc>
               <a:spcBef>
                 <a:spcPts val="400"/>
@@ -7936,7 +7938,7 @@
               <a:buNone/>
             </a:pPr>
             <a:r>
-              <a:rPr lang="en-US" sz="2600" b="1" dirty="0">
+              <a:rPr lang="en-US" sz="2800" b="1" dirty="0">
                 <a:solidFill>
                   <a:srgbClr val="1F2328"/>
                 </a:solidFill>
@@ -7946,7 +7948,7 @@
               </a:rPr>
               <a:t>From empty app to a running workflow</a:t>
             </a:r>
-            <a:endParaRPr lang="en-US" sz="2600" dirty="0"/>
+            <a:endParaRPr lang="en-US" sz="2800" dirty="0"/>
           </a:p>
         </p:txBody>
       </p:sp>
@@ -7958,12 +7960,12 @@
         </p:nvSpPr>
         <p:spPr>
           <a:xfrm>
-            <a:off x="1092101" y="1877764"/>
-            <a:ext cx="634901" cy="634901"/>
+            <a:off x="1054001" y="1785193"/>
+            <a:ext cx="711101" cy="711101"/>
           </a:xfrm>
           <a:prstGeom prst="roundRect">
             <a:avLst>
-              <a:gd name="adj" fmla="val 12002"/>
+              <a:gd name="adj" fmla="val 10716"/>
             </a:avLst>
           </a:prstGeom>
           <a:solidFill>
@@ -7998,8 +8000,8 @@
         </p:blipFill>
         <p:spPr>
           <a:xfrm>
-            <a:off x="1231702" y="2017365"/>
-            <a:ext cx="355550" cy="355550"/>
+            <a:off x="1212652" y="1943844"/>
+            <a:ext cx="393650" cy="393650"/>
           </a:xfrm>
           <a:prstGeom prst="rect">
             <a:avLst/>
@@ -8014,8 +8016,8 @@
         </p:nvSpPr>
         <p:spPr>
           <a:xfrm>
-            <a:off x="801422" y="2614166"/>
-            <a:ext cx="1216259" cy="206425"/>
+            <a:off x="707608" y="2597795"/>
+            <a:ext cx="1403738" cy="238125"/>
           </a:xfrm>
           <a:prstGeom prst="rect">
             <a:avLst/>
@@ -8029,12 +8031,12 @@
           <a:p>
             <a:pPr algn="ctr" indent="0" marL="0">
               <a:lnSpc>
-                <a:spcPts val="1625"/>
+                <a:spcPts val="1875"/>
               </a:lnSpc>
               <a:buNone/>
             </a:pPr>
             <a:r>
-              <a:rPr lang="en-US" sz="1300" b="1" dirty="0">
+              <a:rPr lang="en-US" sz="1500" b="1" dirty="0">
                 <a:solidFill>
                   <a:srgbClr val="1F2328"/>
                 </a:solidFill>
@@ -8044,7 +8046,7 @@
               </a:rPr>
               <a:t>Owner account</a:t>
             </a:r>
-            <a:endParaRPr lang="en-US" sz="1300" dirty="0"/>
+            <a:endParaRPr lang="en-US" sz="1500" dirty="0"/>
           </a:p>
         </p:txBody>
       </p:sp>
@@ -8056,8 +8058,8 @@
         </p:nvSpPr>
         <p:spPr>
           <a:xfrm>
-            <a:off x="844534" y="2922091"/>
-            <a:ext cx="1130034" cy="180082"/>
+            <a:off x="737208" y="2937421"/>
+            <a:ext cx="1344686" cy="214313"/>
           </a:xfrm>
           <a:prstGeom prst="rect">
             <a:avLst/>
@@ -8071,12 +8073,12 @@
           <a:p>
             <a:pPr algn="ctr" indent="0" marL="0">
               <a:lnSpc>
-                <a:spcPts val="1418"/>
+                <a:spcPts val="1688"/>
               </a:lnSpc>
               <a:buNone/>
             </a:pPr>
             <a:r>
-              <a:rPr lang="en-US" sz="1050" dirty="0">
+              <a:rPr lang="en-US" sz="1250" dirty="0">
                 <a:solidFill>
                   <a:srgbClr val="59636E"/>
                 </a:solidFill>
@@ -8086,7 +8088,7 @@
               </a:rPr>
               <a:t>n8n's built-in setup</a:t>
             </a:r>
-            <a:endParaRPr lang="en-US" sz="1050" dirty="0"/>
+            <a:endParaRPr lang="en-US" sz="1250" dirty="0"/>
           </a:p>
         </p:txBody>
       </p:sp>
@@ -8098,8 +8100,8 @@
         </p:nvSpPr>
         <p:spPr>
           <a:xfrm>
-            <a:off x="2359869" y="2076152"/>
-            <a:ext cx="207365" cy="238125"/>
+            <a:off x="2346966" y="2007394"/>
+            <a:ext cx="233172" cy="266700"/>
           </a:xfrm>
           <a:prstGeom prst="rect">
             <a:avLst/>
@@ -8115,7 +8117,7 @@
               <a:buNone/>
             </a:pPr>
             <a:r>
-              <a:rPr lang="en-US" sz="1600" dirty="0">
+              <a:rPr lang="en-US" sz="1800" dirty="0">
                 <a:solidFill>
                   <a:srgbClr val="818B98"/>
                 </a:solidFill>
@@ -8125,7 +8127,7 @@
               </a:rPr>
               <a:t>→</a:t>
             </a:r>
-            <a:endParaRPr lang="en-US" sz="1600" dirty="0"/>
+            <a:endParaRPr lang="en-US" sz="1800" dirty="0"/>
           </a:p>
         </p:txBody>
       </p:sp>
@@ -8137,12 +8139,12 @@
         </p:nvSpPr>
         <p:spPr>
           <a:xfrm>
-            <a:off x="3200251" y="1877764"/>
-            <a:ext cx="634901" cy="634901"/>
+            <a:off x="3162151" y="1785193"/>
+            <a:ext cx="711101" cy="711101"/>
           </a:xfrm>
           <a:prstGeom prst="roundRect">
             <a:avLst>
-              <a:gd name="adj" fmla="val 12002"/>
+              <a:gd name="adj" fmla="val 10716"/>
             </a:avLst>
           </a:prstGeom>
           <a:solidFill>
@@ -8177,8 +8179,8 @@
         </p:blipFill>
         <p:spPr>
           <a:xfrm>
-            <a:off x="3339852" y="2017365"/>
-            <a:ext cx="355550" cy="355550"/>
+            <a:off x="3320802" y="1943844"/>
+            <a:ext cx="393650" cy="393650"/>
           </a:xfrm>
           <a:prstGeom prst="rect">
             <a:avLst/>
@@ -8193,8 +8195,8 @@
         </p:nvSpPr>
         <p:spPr>
           <a:xfrm>
-            <a:off x="3213485" y="2614166"/>
-            <a:ext cx="608433" cy="206425"/>
+            <a:off x="3166579" y="2597795"/>
+            <a:ext cx="702097" cy="238125"/>
           </a:xfrm>
           <a:prstGeom prst="rect">
             <a:avLst/>
@@ -8208,12 +8210,12 @@
           <a:p>
             <a:pPr algn="ctr" indent="0" marL="0">
               <a:lnSpc>
-                <a:spcPts val="1625"/>
+                <a:spcPts val="1875"/>
               </a:lnSpc>
               <a:buNone/>
             </a:pPr>
             <a:r>
-              <a:rPr lang="en-US" sz="1300" b="1" dirty="0">
+              <a:rPr lang="en-US" sz="1500" b="1" dirty="0">
                 <a:solidFill>
                   <a:srgbClr val="1F2328"/>
                 </a:solidFill>
@@ -8223,7 +8225,7 @@
               </a:rPr>
               <a:t>API key</a:t>
             </a:r>
-            <a:endParaRPr lang="en-US" sz="1300" dirty="0"/>
+            <a:endParaRPr lang="en-US" sz="1500" dirty="0"/>
           </a:p>
         </p:txBody>
       </p:sp>
@@ -8235,8 +8237,8 @@
         </p:nvSpPr>
         <p:spPr>
           <a:xfrm>
-            <a:off x="2732569" y="2922091"/>
-            <a:ext cx="1570116" cy="180082"/>
+            <a:off x="2585014" y="2937421"/>
+            <a:ext cx="1865376" cy="428625"/>
           </a:xfrm>
           <a:prstGeom prst="rect">
             <a:avLst/>
@@ -8250,12 +8252,12 @@
           <a:p>
             <a:pPr algn="ctr" indent="0" marL="0">
               <a:lnSpc>
-                <a:spcPts val="1418"/>
+                <a:spcPts val="1688"/>
               </a:lnSpc>
               <a:buNone/>
             </a:pPr>
             <a:r>
-              <a:rPr lang="en-US" sz="1050" dirty="0">
+              <a:rPr lang="en-US" sz="1250" dirty="0">
                 <a:solidFill>
                   <a:srgbClr val="59636E"/>
                 </a:solidFill>
@@ -8265,7 +8267,7 @@
               </a:rPr>
               <a:t>Set N8N_API_KEY locally</a:t>
             </a:r>
-            <a:endParaRPr lang="en-US" sz="1050" dirty="0"/>
+            <a:endParaRPr lang="en-US" sz="1250" dirty="0"/>
           </a:p>
         </p:txBody>
       </p:sp>
@@ -8277,8 +8279,8 @@
         </p:nvSpPr>
         <p:spPr>
           <a:xfrm>
-            <a:off x="4468020" y="2076152"/>
-            <a:ext cx="207365" cy="238125"/>
+            <a:off x="4455116" y="2007394"/>
+            <a:ext cx="233172" cy="266700"/>
           </a:xfrm>
           <a:prstGeom prst="rect">
             <a:avLst/>
@@ -8294,7 +8296,7 @@
               <a:buNone/>
             </a:pPr>
             <a:r>
-              <a:rPr lang="en-US" sz="1600" dirty="0">
+              <a:rPr lang="en-US" sz="1800" dirty="0">
                 <a:solidFill>
                   <a:srgbClr val="818B98"/>
                 </a:solidFill>
@@ -8304,7 +8306,7 @@
               </a:rPr>
               <a:t>→</a:t>
             </a:r>
-            <a:endParaRPr lang="en-US" sz="1600" dirty="0"/>
+            <a:endParaRPr lang="en-US" sz="1800" dirty="0"/>
           </a:p>
         </p:txBody>
       </p:sp>
@@ -8316,12 +8318,12 @@
         </p:nvSpPr>
         <p:spPr>
           <a:xfrm>
-            <a:off x="5308402" y="1877764"/>
-            <a:ext cx="634901" cy="634901"/>
+            <a:off x="5270302" y="1785193"/>
+            <a:ext cx="711101" cy="711101"/>
           </a:xfrm>
           <a:prstGeom prst="roundRect">
             <a:avLst>
-              <a:gd name="adj" fmla="val 12002"/>
+              <a:gd name="adj" fmla="val 10716"/>
             </a:avLst>
           </a:prstGeom>
           <a:solidFill>
@@ -8356,8 +8358,8 @@
         </p:blipFill>
         <p:spPr>
           <a:xfrm>
-            <a:off x="5448002" y="2017365"/>
-            <a:ext cx="355550" cy="355550"/>
+            <a:off x="5428952" y="1943844"/>
+            <a:ext cx="393650" cy="393650"/>
           </a:xfrm>
           <a:prstGeom prst="rect">
             <a:avLst/>
@@ -8372,8 +8374,8 @@
         </p:nvSpPr>
         <p:spPr>
           <a:xfrm>
-            <a:off x="5059774" y="2614166"/>
-            <a:ext cx="1132008" cy="206425"/>
+            <a:off x="4972638" y="2597795"/>
+            <a:ext cx="1306279" cy="238125"/>
           </a:xfrm>
           <a:prstGeom prst="rect">
             <a:avLst/>
@@ -8387,12 +8389,12 @@
           <a:p>
             <a:pPr algn="ctr" indent="0" marL="0">
               <a:lnSpc>
-                <a:spcPts val="1625"/>
+                <a:spcPts val="1875"/>
               </a:lnSpc>
               <a:buNone/>
             </a:pPr>
             <a:r>
-              <a:rPr lang="en-US" sz="1300" b="1" dirty="0">
+              <a:rPr lang="en-US" sz="1500" b="1" dirty="0">
                 <a:solidFill>
                   <a:srgbClr val="1F2328"/>
                 </a:solidFill>
@@ -8402,7 +8404,7 @@
               </a:rPr>
               <a:t>Run the script</a:t>
             </a:r>
-            <a:endParaRPr lang="en-US" sz="1300" dirty="0"/>
+            <a:endParaRPr lang="en-US" sz="1500" dirty="0"/>
           </a:p>
         </p:txBody>
       </p:sp>
@@ -8414,8 +8416,8 @@
         </p:nvSpPr>
         <p:spPr>
           <a:xfrm>
-            <a:off x="4693164" y="2922091"/>
-            <a:ext cx="1865376" cy="360164"/>
+            <a:off x="4693164" y="2937421"/>
+            <a:ext cx="1865376" cy="428625"/>
           </a:xfrm>
           <a:prstGeom prst="rect">
             <a:avLst/>
@@ -8429,12 +8431,12 @@
           <a:p>
             <a:pPr algn="ctr" indent="0" marL="0">
               <a:lnSpc>
-                <a:spcPts val="1418"/>
+                <a:spcPts val="1688"/>
               </a:lnSpc>
               <a:buNone/>
             </a:pPr>
             <a:r>
-              <a:rPr lang="en-US" sz="1050" dirty="0">
+              <a:rPr lang="en-US" sz="1250" dirty="0">
                 <a:solidFill>
                   <a:srgbClr val="59636E"/>
                 </a:solidFill>
@@ -8444,7 +8446,7 @@
               </a:rPr>
               <a:t>node scripts/run-n8n-workflow.mjs</a:t>
             </a:r>
-            <a:endParaRPr lang="en-US" sz="1050" dirty="0"/>
+            <a:endParaRPr lang="en-US" sz="1250" dirty="0"/>
           </a:p>
         </p:txBody>
       </p:sp>
@@ -8456,8 +8458,8 @@
         </p:nvSpPr>
         <p:spPr>
           <a:xfrm>
-            <a:off x="6576170" y="2076152"/>
-            <a:ext cx="207365" cy="238125"/>
+            <a:off x="6563267" y="2007394"/>
+            <a:ext cx="233172" cy="266700"/>
           </a:xfrm>
           <a:prstGeom prst="rect">
             <a:avLst/>
@@ -8473,7 +8475,7 @@
               <a:buNone/>
             </a:pPr>
             <a:r>
-              <a:rPr lang="en-US" sz="1600" dirty="0">
+              <a:rPr lang="en-US" sz="1800" dirty="0">
                 <a:solidFill>
                   <a:srgbClr val="818B98"/>
                 </a:solidFill>
@@ -8483,7 +8485,7 @@
               </a:rPr>
               <a:t>→</a:t>
             </a:r>
-            <a:endParaRPr lang="en-US" sz="1600" dirty="0"/>
+            <a:endParaRPr lang="en-US" sz="1800" dirty="0"/>
           </a:p>
         </p:txBody>
       </p:sp>
@@ -8495,12 +8497,12 @@
         </p:nvSpPr>
         <p:spPr>
           <a:xfrm>
-            <a:off x="7416552" y="1877764"/>
-            <a:ext cx="634901" cy="634901"/>
+            <a:off x="7378452" y="1785193"/>
+            <a:ext cx="711101" cy="711101"/>
           </a:xfrm>
           <a:prstGeom prst="roundRect">
             <a:avLst>
-              <a:gd name="adj" fmla="val 12002"/>
+              <a:gd name="adj" fmla="val 10716"/>
             </a:avLst>
           </a:prstGeom>
           <a:solidFill>
@@ -8535,8 +8537,8 @@
         </p:blipFill>
         <p:spPr>
           <a:xfrm>
-            <a:off x="7556153" y="2017365"/>
-            <a:ext cx="355550" cy="355550"/>
+            <a:off x="7537103" y="1943844"/>
+            <a:ext cx="393650" cy="393650"/>
           </a:xfrm>
           <a:prstGeom prst="rect">
             <a:avLst/>
@@ -8551,8 +8553,8 @@
         </p:nvSpPr>
         <p:spPr>
           <a:xfrm>
-            <a:off x="7280260" y="2614166"/>
-            <a:ext cx="907337" cy="206425"/>
+            <a:off x="7210429" y="2597795"/>
+            <a:ext cx="1046997" cy="238125"/>
           </a:xfrm>
           <a:prstGeom prst="rect">
             <a:avLst/>
@@ -8566,12 +8568,12 @@
           <a:p>
             <a:pPr algn="ctr" indent="0" marL="0">
               <a:lnSpc>
-                <a:spcPts val="1625"/>
+                <a:spcPts val="1875"/>
               </a:lnSpc>
               <a:buNone/>
             </a:pPr>
             <a:r>
-              <a:rPr lang="en-US" sz="1300" b="1" dirty="0">
+              <a:rPr lang="en-US" sz="1500" b="1" dirty="0">
                 <a:solidFill>
                   <a:srgbClr val="1F2328"/>
                 </a:solidFill>
@@ -8581,7 +8583,7 @@
               </a:rPr>
               <a:t>GitHub Zen</a:t>
             </a:r>
-            <a:endParaRPr lang="en-US" sz="1300" dirty="0"/>
+            <a:endParaRPr lang="en-US" sz="1500" dirty="0"/>
           </a:p>
         </p:txBody>
       </p:sp>
@@ -8593,8 +8595,8 @@
         </p:nvSpPr>
         <p:spPr>
           <a:xfrm>
-            <a:off x="6860822" y="2922091"/>
-            <a:ext cx="1746361" cy="180082"/>
+            <a:off x="6801314" y="2937421"/>
+            <a:ext cx="1865376" cy="428625"/>
           </a:xfrm>
           <a:prstGeom prst="rect">
             <a:avLst/>
@@ -8608,12 +8610,12 @@
           <a:p>
             <a:pPr algn="ctr" indent="0" marL="0">
               <a:lnSpc>
-                <a:spcPts val="1418"/>
+                <a:spcPts val="1688"/>
               </a:lnSpc>
               <a:buNone/>
             </a:pPr>
             <a:r>
-              <a:rPr lang="en-US" sz="1050" dirty="0">
+              <a:rPr lang="en-US" sz="1250" dirty="0">
                 <a:solidFill>
                   <a:srgbClr val="59636E"/>
                 </a:solidFill>
@@ -8623,7 +8625,7 @@
               </a:rPr>
               <a:t>A line of wisdom comes back</a:t>
             </a:r>
-            <a:endParaRPr lang="en-US" sz="1050" dirty="0"/>
+            <a:endParaRPr lang="en-US" sz="1250" dirty="0"/>
           </a:p>
         </p:txBody>
       </p:sp>
@@ -8635,12 +8637,12 @@
         </p:nvSpPr>
         <p:spPr>
           <a:xfrm>
-            <a:off x="1889522" y="3714006"/>
-            <a:ext cx="5364510" cy="427732"/>
+            <a:off x="1493788" y="3823246"/>
+            <a:ext cx="6156127" cy="462111"/>
           </a:xfrm>
           <a:prstGeom prst="roundRect">
             <a:avLst>
-              <a:gd name="adj" fmla="val 17815"/>
+              <a:gd name="adj" fmla="val 16490"/>
             </a:avLst>
           </a:prstGeom>
           <a:solidFill>
@@ -8679,7 +8681,7 @@
         </p:blipFill>
         <p:spPr>
           <a:xfrm>
-            <a:off x="2051447" y="3839021"/>
+            <a:off x="1655713" y="3965377"/>
             <a:ext cx="177701" cy="177701"/>
           </a:xfrm>
           <a:prstGeom prst="rect">
@@ -8695,8 +8697,8 @@
         </p:nvSpPr>
         <p:spPr>
           <a:xfrm>
-            <a:off x="2330648" y="3825032"/>
-            <a:ext cx="4856687" cy="205680"/>
+            <a:off x="1934914" y="3934271"/>
+            <a:ext cx="5664137" cy="240060"/>
           </a:xfrm>
           <a:prstGeom prst="rect">
             <a:avLst/>
@@ -8710,12 +8712,12 @@
           <a:p>
             <a:pPr algn="l" indent="0" marL="0">
               <a:lnSpc>
-                <a:spcPts val="1620"/>
+                <a:spcPts val="1890"/>
               </a:lnSpc>
               <a:buNone/>
             </a:pPr>
             <a:r>
-              <a:rPr lang="en-US" sz="1200" dirty="0">
+              <a:rPr lang="en-US" sz="1400" dirty="0">
                 <a:solidFill>
                   <a:srgbClr val="1F2328"/>
                 </a:solidFill>
@@ -8725,7 +8727,7 @@
               </a:rPr>
               <a:t>The same agent that deployed the app now operates it through its API.</a:t>
             </a:r>
-            <a:endParaRPr lang="en-US" sz="1200" dirty="0"/>
+            <a:endParaRPr lang="en-US" sz="1400" dirty="0"/>
           </a:p>
         </p:txBody>
       </p:sp>
@@ -8769,12 +8771,12 @@
         </p:nvSpPr>
         <p:spPr>
           <a:xfrm>
-            <a:off x="8077200" y="152400"/>
-            <a:ext cx="482650" cy="266700"/>
+            <a:off x="8026598" y="152400"/>
+            <a:ext cx="533251" cy="279350"/>
           </a:xfrm>
           <a:prstGeom prst="roundRect">
             <a:avLst>
-              <a:gd name="adj" fmla="val 23810"/>
+              <a:gd name="adj" fmla="val 22731"/>
             </a:avLst>
           </a:prstGeom>
           <a:solidFill>
@@ -8801,8 +8803,8 @@
         </p:nvSpPr>
         <p:spPr>
           <a:xfrm>
-            <a:off x="8201863" y="219075"/>
-            <a:ext cx="233324" cy="133350"/>
+            <a:off x="8163659" y="220563"/>
+            <a:ext cx="259131" cy="142875"/>
           </a:xfrm>
           <a:prstGeom prst="rect">
             <a:avLst/>
@@ -8818,7 +8820,7 @@
               <a:buNone/>
             </a:pPr>
             <a:r>
-              <a:rPr lang="en-US" sz="900" b="1" dirty="0">
+              <a:rPr lang="en-US" sz="1000" b="1" dirty="0">
                 <a:solidFill>
                   <a:srgbClr val="FFFFFF"/>
                 </a:solidFill>
@@ -8828,7 +8830,7 @@
               </a:rPr>
               <a:t>N8N</a:t>
             </a:r>
-            <a:endParaRPr lang="en-US" sz="900" dirty="0"/>
+            <a:endParaRPr lang="en-US" sz="1000" dirty="0"/>
           </a:p>
         </p:txBody>
       </p:sp>
@@ -8865,7 +8867,7 @@
         <p:spPr>
           <a:xfrm>
             <a:off x="482501" y="330101"/>
-            <a:ext cx="7772400" cy="142875"/>
+            <a:ext cx="8342275" cy="152400"/>
           </a:xfrm>
           <a:prstGeom prst="rect">
             <a:avLst/>
@@ -8881,7 +8883,7 @@
               <a:buNone/>
             </a:pPr>
             <a:r>
-              <a:rPr lang="en-US" sz="1000" b="1" dirty="0">
+              <a:rPr lang="en-US" sz="1100" b="1" dirty="0">
                 <a:solidFill>
                   <a:srgbClr val="1A7F37"/>
                 </a:solidFill>
@@ -8891,7 +8893,7 @@
               </a:rPr>
               <a:t>WHEN SOMETHING BREAKS</a:t>
             </a:r>
-            <a:endParaRPr lang="en-US" sz="1000" dirty="0"/>
+            <a:endParaRPr lang="en-US" sz="1100" dirty="0"/>
           </a:p>
         </p:txBody>
       </p:sp>
@@ -8903,8 +8905,8 @@
         </p:nvSpPr>
         <p:spPr>
           <a:xfrm>
-            <a:off x="482501" y="523726"/>
-            <a:ext cx="7772400" cy="393650"/>
+            <a:off x="482501" y="533251"/>
+            <a:ext cx="8342275" cy="419100"/>
           </a:xfrm>
           <a:prstGeom prst="rect">
             <a:avLst/>
@@ -8918,7 +8920,7 @@
           <a:p>
             <a:pPr algn="l" indent="0" marL="0">
               <a:lnSpc>
-                <a:spcPts val="3100"/>
+                <a:spcPts val="3300"/>
               </a:lnSpc>
               <a:spcBef>
                 <a:spcPts val="400"/>
@@ -8926,7 +8928,7 @@
               <a:buNone/>
             </a:pPr>
             <a:r>
-              <a:rPr lang="en-US" sz="2600" b="1" dirty="0">
+              <a:rPr lang="en-US" sz="2800" b="1" dirty="0">
                 <a:solidFill>
                   <a:srgbClr val="1F2328"/>
                 </a:solidFill>
@@ -8936,7 +8938,7 @@
               </a:rPr>
               <a:t>Ask the agent to investigate</a:t>
             </a:r>
-            <a:endParaRPr lang="en-US" sz="2600" dirty="0"/>
+            <a:endParaRPr lang="en-US" sz="2800" dirty="0"/>
           </a:p>
         </p:txBody>
       </p:sp>
@@ -8948,12 +8950,12 @@
         </p:nvSpPr>
         <p:spPr>
           <a:xfrm>
-            <a:off x="634901" y="2100114"/>
-            <a:ext cx="7873901" cy="1464022"/>
+            <a:off x="634901" y="1970782"/>
+            <a:ext cx="7873901" cy="1697236"/>
           </a:xfrm>
           <a:prstGeom prst="roundRect">
             <a:avLst>
-              <a:gd name="adj" fmla="val 6940"/>
+              <a:gd name="adj" fmla="val 5986"/>
             </a:avLst>
           </a:prstGeom>
           <a:solidFill>
@@ -8987,7 +8989,7 @@
         </p:nvSpPr>
         <p:spPr>
           <a:xfrm>
-            <a:off x="634901" y="2104876"/>
+            <a:off x="634901" y="1975545"/>
             <a:ext cx="7873901" cy="0"/>
           </a:xfrm>
           <a:prstGeom prst="line">
@@ -9010,8 +9012,8 @@
         </p:nvSpPr>
         <p:spPr>
           <a:xfrm>
-            <a:off x="8504039" y="2100114"/>
-            <a:ext cx="0" cy="1464022"/>
+            <a:off x="8504039" y="1970782"/>
+            <a:ext cx="0" cy="1697236"/>
           </a:xfrm>
           <a:prstGeom prst="line">
             <a:avLst/>
@@ -9033,7 +9035,7 @@
         </p:nvSpPr>
         <p:spPr>
           <a:xfrm>
-            <a:off x="634901" y="3559373"/>
+            <a:off x="634901" y="3663255"/>
             <a:ext cx="7873901" cy="0"/>
           </a:xfrm>
           <a:prstGeom prst="line">
@@ -9056,8 +9058,8 @@
         </p:nvSpPr>
         <p:spPr>
           <a:xfrm>
-            <a:off x="663476" y="2100114"/>
-            <a:ext cx="0" cy="1464022"/>
+            <a:off x="663476" y="1970782"/>
+            <a:ext cx="0" cy="1697236"/>
           </a:xfrm>
           <a:prstGeom prst="line">
             <a:avLst/>
@@ -9087,8 +9089,8 @@
         </p:blipFill>
         <p:spPr>
           <a:xfrm>
-            <a:off x="945952" y="2312789"/>
-            <a:ext cx="165050" cy="165050"/>
+            <a:off x="971401" y="2208907"/>
+            <a:ext cx="190500" cy="190500"/>
           </a:xfrm>
           <a:prstGeom prst="rect">
             <a:avLst/>
@@ -9103,8 +9105,8 @@
         </p:nvSpPr>
         <p:spPr>
           <a:xfrm>
-            <a:off x="1187202" y="2328565"/>
-            <a:ext cx="498830" cy="133350"/>
+            <a:off x="1238101" y="2227957"/>
+            <a:ext cx="581867" cy="152400"/>
           </a:xfrm>
           <a:prstGeom prst="rect">
             <a:avLst/>
@@ -9120,7 +9122,7 @@
               <a:buNone/>
             </a:pPr>
             <a:r>
-              <a:rPr lang="en-US" sz="900" b="1" dirty="0">
+              <a:rPr lang="en-US" sz="1050" b="1" dirty="0">
                 <a:solidFill>
                   <a:srgbClr val="8250DF"/>
                 </a:solidFill>
@@ -9130,7 +9132,7 @@
               </a:rPr>
               <a:t>PROMPT</a:t>
             </a:r>
-            <a:endParaRPr lang="en-US" sz="900" dirty="0"/>
+            <a:endParaRPr lang="en-US" sz="1050" dirty="0"/>
           </a:p>
         </p:txBody>
       </p:sp>
@@ -9142,8 +9144,8 @@
         </p:nvSpPr>
         <p:spPr>
           <a:xfrm>
-            <a:off x="945952" y="2604790"/>
-            <a:ext cx="7445413" cy="721221"/>
+            <a:off x="971401" y="2539008"/>
+            <a:ext cx="7393496" cy="865584"/>
           </a:xfrm>
           <a:prstGeom prst="rect">
             <a:avLst/>
@@ -9157,12 +9159,12 @@
           <a:p>
             <a:pPr algn="l" indent="0" marL="0">
               <a:lnSpc>
-                <a:spcPts val="2840"/>
+                <a:spcPts val="3408"/>
               </a:lnSpc>
               <a:buNone/>
             </a:pPr>
             <a:r>
-              <a:rPr lang="en-US" sz="2000" dirty="0">
+              <a:rPr lang="en-US" sz="2400" dirty="0">
                 <a:solidFill>
                   <a:srgbClr val="1F2328"/>
                 </a:solidFill>
@@ -9172,7 +9174,7 @@
               </a:rPr>
               <a:t>My n8n container keeps restarting. Check the logs and tell me what's wrong.</a:t>
             </a:r>
-            <a:endParaRPr lang="en-US" sz="2000" dirty="0"/>
+            <a:endParaRPr lang="en-US" sz="2400" dirty="0"/>
           </a:p>
         </p:txBody>
       </p:sp>
@@ -9192,8 +9194,8 @@
         </p:blipFill>
         <p:spPr>
           <a:xfrm>
-            <a:off x="634901" y="3779937"/>
-            <a:ext cx="177701" cy="177701"/>
+            <a:off x="634901" y="3928318"/>
+            <a:ext cx="215801" cy="215801"/>
           </a:xfrm>
           <a:prstGeom prst="rect">
             <a:avLst/>
@@ -9208,8 +9210,8 @@
         </p:nvSpPr>
         <p:spPr>
           <a:xfrm>
-            <a:off x="914102" y="3767286"/>
-            <a:ext cx="5841444" cy="203150"/>
+            <a:off x="952202" y="3921919"/>
+            <a:ext cx="6812539" cy="228600"/>
           </a:xfrm>
           <a:prstGeom prst="rect">
             <a:avLst/>
@@ -9223,12 +9225,12 @@
           <a:p>
             <a:pPr algn="l" indent="0" marL="0">
               <a:lnSpc>
-                <a:spcPts val="1600"/>
+                <a:spcPts val="1800"/>
               </a:lnSpc>
               <a:buNone/>
             </a:pPr>
             <a:r>
-              <a:rPr lang="en-US" sz="1200" dirty="0">
+              <a:rPr lang="en-US" sz="1400" dirty="0">
                 <a:solidFill>
                   <a:srgbClr val="59636E"/>
                 </a:solidFill>
@@ -9238,7 +9240,7 @@
               </a:rPr>
               <a:t>The agent reads Container Apps logs, finds the cause, and proposes the smallest fix.</a:t>
             </a:r>
-            <a:endParaRPr lang="en-US" sz="1200" dirty="0"/>
+            <a:endParaRPr lang="en-US" sz="1400" dirty="0"/>
           </a:p>
         </p:txBody>
       </p:sp>
@@ -9282,12 +9284,12 @@
         </p:nvSpPr>
         <p:spPr>
           <a:xfrm>
-            <a:off x="8077200" y="152400"/>
-            <a:ext cx="482650" cy="266700"/>
+            <a:off x="8026598" y="152400"/>
+            <a:ext cx="533251" cy="279350"/>
           </a:xfrm>
           <a:prstGeom prst="roundRect">
             <a:avLst>
-              <a:gd name="adj" fmla="val 23810"/>
+              <a:gd name="adj" fmla="val 22731"/>
             </a:avLst>
           </a:prstGeom>
           <a:solidFill>
@@ -9314,8 +9316,8 @@
         </p:nvSpPr>
         <p:spPr>
           <a:xfrm>
-            <a:off x="8201863" y="219075"/>
-            <a:ext cx="233324" cy="133350"/>
+            <a:off x="8163659" y="220563"/>
+            <a:ext cx="259131" cy="142875"/>
           </a:xfrm>
           <a:prstGeom prst="rect">
             <a:avLst/>
@@ -9331,7 +9333,7 @@
               <a:buNone/>
             </a:pPr>
             <a:r>
-              <a:rPr lang="en-US" sz="900" b="1" dirty="0">
+              <a:rPr lang="en-US" sz="1000" b="1" dirty="0">
                 <a:solidFill>
                   <a:srgbClr val="FFFFFF"/>
                 </a:solidFill>
@@ -9341,7 +9343,7 @@
               </a:rPr>
               <a:t>N8N</a:t>
             </a:r>
-            <a:endParaRPr lang="en-US" sz="900" dirty="0"/>
+            <a:endParaRPr lang="en-US" sz="1000" dirty="0"/>
           </a:p>
         </p:txBody>
       </p:sp>
@@ -9378,7 +9380,7 @@
         <p:spPr>
           <a:xfrm>
             <a:off x="482501" y="330101"/>
-            <a:ext cx="7772400" cy="142875"/>
+            <a:ext cx="8342275" cy="152400"/>
           </a:xfrm>
           <a:prstGeom prst="rect">
             <a:avLst/>
@@ -9394,7 +9396,7 @@
               <a:buNone/>
             </a:pPr>
             <a:r>
-              <a:rPr lang="en-US" sz="1000" b="1" dirty="0">
+              <a:rPr lang="en-US" sz="1100" b="1" dirty="0">
                 <a:solidFill>
                   <a:srgbClr val="1A7F37"/>
                 </a:solidFill>
@@ -9404,7 +9406,7 @@
               </a:rPr>
               <a:t>CLEAN UP</a:t>
             </a:r>
-            <a:endParaRPr lang="en-US" sz="1000" dirty="0"/>
+            <a:endParaRPr lang="en-US" sz="1100" dirty="0"/>
           </a:p>
         </p:txBody>
       </p:sp>
@@ -9416,8 +9418,8 @@
         </p:nvSpPr>
         <p:spPr>
           <a:xfrm>
-            <a:off x="482501" y="523726"/>
-            <a:ext cx="7772400" cy="393650"/>
+            <a:off x="482501" y="533251"/>
+            <a:ext cx="8342275" cy="419100"/>
           </a:xfrm>
           <a:prstGeom prst="rect">
             <a:avLst/>
@@ -9431,7 +9433,7 @@
           <a:p>
             <a:pPr algn="l" indent="0" marL="0">
               <a:lnSpc>
-                <a:spcPts val="3100"/>
+                <a:spcPts val="3300"/>
               </a:lnSpc>
               <a:spcBef>
                 <a:spcPts val="400"/>
@@ -9439,7 +9441,7 @@
               <a:buNone/>
             </a:pPr>
             <a:r>
-              <a:rPr lang="en-US" sz="2600" b="1" dirty="0">
+              <a:rPr lang="en-US" sz="2800" b="1" dirty="0">
                 <a:solidFill>
                   <a:srgbClr val="1F2328"/>
                 </a:solidFill>
@@ -9449,7 +9451,7 @@
               </a:rPr>
               <a:t>Tear it down the same day</a:t>
             </a:r>
-            <a:endParaRPr lang="en-US" sz="2600" dirty="0"/>
+            <a:endParaRPr lang="en-US" sz="2800" dirty="0"/>
           </a:p>
         </p:txBody>
       </p:sp>
@@ -9461,7 +9463,7 @@
         </p:nvSpPr>
         <p:spPr>
           <a:xfrm>
-            <a:off x="1015901" y="1695301"/>
+            <a:off x="1015901" y="1670149"/>
             <a:ext cx="7111901" cy="1968252"/>
           </a:xfrm>
           <a:prstGeom prst="roundRect">
@@ -9500,7 +9502,7 @@
         </p:nvSpPr>
         <p:spPr>
           <a:xfrm>
-            <a:off x="1015901" y="1695301"/>
+            <a:off x="1015901" y="1670149"/>
             <a:ext cx="7111901" cy="253901"/>
           </a:xfrm>
           <a:prstGeom prst="roundRect">
@@ -9532,7 +9534,7 @@
         </p:nvSpPr>
         <p:spPr>
           <a:xfrm>
-            <a:off x="1142851" y="1777752"/>
+            <a:off x="1142851" y="1752600"/>
             <a:ext cx="88850" cy="88850"/>
           </a:xfrm>
           <a:prstGeom prst="roundRect">
@@ -9564,7 +9566,7 @@
         </p:nvSpPr>
         <p:spPr>
           <a:xfrm>
-            <a:off x="1295102" y="1777752"/>
+            <a:off x="1295102" y="1752600"/>
             <a:ext cx="88850" cy="88850"/>
           </a:xfrm>
           <a:prstGeom prst="roundRect">
@@ -9596,7 +9598,7 @@
         </p:nvSpPr>
         <p:spPr>
           <a:xfrm>
-            <a:off x="1447354" y="1777752"/>
+            <a:off x="1447354" y="1752600"/>
             <a:ext cx="88850" cy="88850"/>
           </a:xfrm>
           <a:prstGeom prst="roundRect">
@@ -9628,8 +9630,8 @@
         </p:nvSpPr>
         <p:spPr>
           <a:xfrm>
-            <a:off x="1701105" y="1765102"/>
-            <a:ext cx="528584" cy="114300"/>
+            <a:off x="1701105" y="1725662"/>
+            <a:ext cx="621792" cy="142875"/>
           </a:xfrm>
           <a:prstGeom prst="rect">
             <a:avLst/>
@@ -9645,7 +9647,7 @@
               <a:buNone/>
             </a:pPr>
             <a:r>
-              <a:rPr lang="en-US" sz="850" dirty="0">
+              <a:rPr lang="en-US" sz="1000" dirty="0">
                 <a:solidFill>
                   <a:srgbClr val="8B949E"/>
                 </a:solidFill>
@@ -9655,7 +9657,7 @@
               </a:rPr>
               <a:t>Terminal</a:t>
             </a:r>
-            <a:endParaRPr lang="en-US" sz="850" dirty="0"/>
+            <a:endParaRPr lang="en-US" sz="1000" dirty="0"/>
           </a:p>
         </p:txBody>
       </p:sp>
@@ -9667,7 +9669,7 @@
         </p:nvSpPr>
         <p:spPr>
           <a:xfrm>
-            <a:off x="1244501" y="2126903"/>
+            <a:off x="1244501" y="2101751"/>
             <a:ext cx="6787795" cy="295275"/>
           </a:xfrm>
           <a:prstGeom prst="rect">
@@ -9726,7 +9728,7 @@
         </p:nvSpPr>
         <p:spPr>
           <a:xfrm>
-            <a:off x="1244501" y="2574578"/>
+            <a:off x="1244501" y="2549426"/>
             <a:ext cx="6787795" cy="295275"/>
           </a:xfrm>
           <a:prstGeom prst="rect">
@@ -9768,7 +9770,7 @@
         </p:nvSpPr>
         <p:spPr>
           <a:xfrm>
-            <a:off x="1244501" y="2869853"/>
+            <a:off x="1244501" y="2844701"/>
             <a:ext cx="6787795" cy="295275"/>
           </a:xfrm>
           <a:prstGeom prst="rect">
@@ -9827,7 +9829,7 @@
         </p:nvSpPr>
         <p:spPr>
           <a:xfrm>
-            <a:off x="1244501" y="3165128"/>
+            <a:off x="1244501" y="3139976"/>
             <a:ext cx="6787795" cy="295275"/>
           </a:xfrm>
           <a:prstGeom prst="rect">
@@ -9877,8 +9879,8 @@
         </p:blipFill>
         <p:spPr>
           <a:xfrm>
-            <a:off x="1015901" y="4012853"/>
-            <a:ext cx="190500" cy="190500"/>
+            <a:off x="1015901" y="4051102"/>
+            <a:ext cx="215801" cy="215801"/>
           </a:xfrm>
           <a:prstGeom prst="rect">
             <a:avLst/>
@@ -9893,8 +9895,8 @@
         </p:nvSpPr>
         <p:spPr>
           <a:xfrm>
-            <a:off x="1307902" y="3892153"/>
-            <a:ext cx="6956298" cy="431899"/>
+            <a:off x="1333202" y="3917752"/>
+            <a:ext cx="6930491" cy="482501"/>
           </a:xfrm>
           <a:prstGeom prst="rect">
             <a:avLst/>
@@ -9908,12 +9910,12 @@
           <a:p>
             <a:pPr algn="l" indent="0" marL="0">
               <a:lnSpc>
-                <a:spcPts val="1700"/>
+                <a:spcPts val="1900"/>
               </a:lnSpc>
               <a:buNone/>
             </a:pPr>
             <a:r>
-              <a:rPr lang="en-US" sz="1250" dirty="0">
+              <a:rPr lang="en-US" sz="1400" dirty="0">
                 <a:solidFill>
                   <a:srgbClr val="1F2328"/>
                 </a:solidFill>
@@ -9925,12 +9927,12 @@
             </a:r>
             <a:pPr algn="l" indent="0" marL="0">
               <a:lnSpc>
-                <a:spcPts val="1700"/>
+                <a:spcPts val="1900"/>
               </a:lnSpc>
               <a:buNone/>
             </a:pPr>
             <a:r>
-              <a:rPr lang="en-US" sz="1250" b="1" dirty="0">
+              <a:rPr lang="en-US" sz="1400" b="1" dirty="0">
                 <a:solidFill>
                   <a:srgbClr val="1F2328"/>
                 </a:solidFill>
@@ -9942,12 +9944,12 @@
             </a:r>
             <a:pPr algn="l" indent="0" marL="0">
               <a:lnSpc>
-                <a:spcPts val="1700"/>
+                <a:spcPts val="1900"/>
               </a:lnSpc>
               <a:buNone/>
             </a:pPr>
             <a:r>
-              <a:rPr lang="en-US" sz="1250" dirty="0">
+              <a:rPr lang="en-US" sz="1400" dirty="0">
                 <a:solidFill>
                   <a:srgbClr val="1F2328"/>
                 </a:solidFill>
@@ -9957,7 +9959,7 @@
               </a:rPr>
               <a:t> also clears soft-deleted resources.</a:t>
             </a:r>
-            <a:endParaRPr lang="en-US" sz="1250" dirty="0"/>
+            <a:endParaRPr lang="en-US" sz="1400" dirty="0"/>
           </a:p>
         </p:txBody>
       </p:sp>
@@ -10001,12 +10003,12 @@
         </p:nvSpPr>
         <p:spPr>
           <a:xfrm>
-            <a:off x="8077200" y="152400"/>
-            <a:ext cx="482650" cy="266700"/>
+            <a:off x="8026598" y="152400"/>
+            <a:ext cx="533251" cy="279350"/>
           </a:xfrm>
           <a:prstGeom prst="roundRect">
             <a:avLst>
-              <a:gd name="adj" fmla="val 23810"/>
+              <a:gd name="adj" fmla="val 22731"/>
             </a:avLst>
           </a:prstGeom>
           <a:solidFill>
@@ -10033,8 +10035,8 @@
         </p:nvSpPr>
         <p:spPr>
           <a:xfrm>
-            <a:off x="8201863" y="219075"/>
-            <a:ext cx="233324" cy="133350"/>
+            <a:off x="8163659" y="220563"/>
+            <a:ext cx="259131" cy="142875"/>
           </a:xfrm>
           <a:prstGeom prst="rect">
             <a:avLst/>
@@ -10050,7 +10052,7 @@
               <a:buNone/>
             </a:pPr>
             <a:r>
-              <a:rPr lang="en-US" sz="900" b="1" dirty="0">
+              <a:rPr lang="en-US" sz="1000" b="1" dirty="0">
                 <a:solidFill>
                   <a:srgbClr val="FFFFFF"/>
                 </a:solidFill>
@@ -10060,7 +10062,7 @@
               </a:rPr>
               <a:t>N8N</a:t>
             </a:r>
-            <a:endParaRPr lang="en-US" sz="900" dirty="0"/>
+            <a:endParaRPr lang="en-US" sz="1000" dirty="0"/>
           </a:p>
         </p:txBody>
       </p:sp>
@@ -10097,7 +10099,7 @@
         <p:spPr>
           <a:xfrm>
             <a:off x="482501" y="330101"/>
-            <a:ext cx="7772400" cy="142875"/>
+            <a:ext cx="8342275" cy="152400"/>
           </a:xfrm>
           <a:prstGeom prst="rect">
             <a:avLst/>
@@ -10113,7 +10115,7 @@
               <a:buNone/>
             </a:pPr>
             <a:r>
-              <a:rPr lang="en-US" sz="1000" b="1" dirty="0">
+              <a:rPr lang="en-US" sz="1100" b="1" dirty="0">
                 <a:solidFill>
                   <a:srgbClr val="1A7F37"/>
                 </a:solidFill>
@@ -10123,7 +10125,7 @@
               </a:rPr>
               <a:t>KEY TAKEAWAYS</a:t>
             </a:r>
-            <a:endParaRPr lang="en-US" sz="1000" dirty="0"/>
+            <a:endParaRPr lang="en-US" sz="1100" dirty="0"/>
           </a:p>
         </p:txBody>
       </p:sp>
@@ -10135,8 +10137,8 @@
         </p:nvSpPr>
         <p:spPr>
           <a:xfrm>
-            <a:off x="482501" y="523726"/>
-            <a:ext cx="7772400" cy="393650"/>
+            <a:off x="482501" y="533251"/>
+            <a:ext cx="8342275" cy="419100"/>
           </a:xfrm>
           <a:prstGeom prst="rect">
             <a:avLst/>
@@ -10150,7 +10152,7 @@
           <a:p>
             <a:pPr algn="l" indent="0" marL="0">
               <a:lnSpc>
-                <a:spcPts val="3100"/>
+                <a:spcPts val="3300"/>
               </a:lnSpc>
               <a:spcBef>
                 <a:spcPts val="400"/>
@@ -10158,7 +10160,7 @@
               <a:buNone/>
             </a:pPr>
             <a:r>
-              <a:rPr lang="en-US" sz="2600" b="1" dirty="0">
+              <a:rPr lang="en-US" sz="2800" b="1" dirty="0">
                 <a:solidFill>
                   <a:srgbClr val="1F2328"/>
                 </a:solidFill>
@@ -10168,7 +10170,7 @@
               </a:rPr>
               <a:t>What to remember</a:t>
             </a:r>
-            <a:endParaRPr lang="en-US" sz="2600" dirty="0"/>
+            <a:endParaRPr lang="en-US" sz="2800" dirty="0"/>
           </a:p>
         </p:txBody>
       </p:sp>
@@ -10180,12 +10182,12 @@
         </p:nvSpPr>
         <p:spPr>
           <a:xfrm>
-            <a:off x="482501" y="1320701"/>
-            <a:ext cx="431750" cy="431750"/>
+            <a:off x="482501" y="1422350"/>
+            <a:ext cx="507950" cy="507950"/>
           </a:xfrm>
           <a:prstGeom prst="roundRect">
             <a:avLst>
-              <a:gd name="adj" fmla="val 17649"/>
+              <a:gd name="adj" fmla="val 15001"/>
             </a:avLst>
           </a:prstGeom>
           <a:solidFill>
@@ -10220,8 +10222,8 @@
         </p:blipFill>
         <p:spPr>
           <a:xfrm>
-            <a:off x="577751" y="1415951"/>
-            <a:ext cx="241250" cy="241250"/>
+            <a:off x="596801" y="1536650"/>
+            <a:ext cx="279350" cy="279350"/>
           </a:xfrm>
           <a:prstGeom prst="rect">
             <a:avLst/>
@@ -10236,8 +10238,8 @@
         </p:nvSpPr>
         <p:spPr>
           <a:xfrm>
-            <a:off x="1066651" y="1320701"/>
-            <a:ext cx="3355035" cy="431899"/>
+            <a:off x="1155502" y="1435001"/>
+            <a:ext cx="3290367" cy="482501"/>
           </a:xfrm>
           <a:prstGeom prst="rect">
             <a:avLst/>
@@ -10251,12 +10253,12 @@
           <a:p>
             <a:pPr algn="l" indent="0" marL="0">
               <a:lnSpc>
-                <a:spcPts val="1700"/>
+                <a:spcPts val="1900"/>
               </a:lnSpc>
               <a:buNone/>
             </a:pPr>
             <a:r>
-              <a:rPr lang="en-US" sz="1300" dirty="0">
+              <a:rPr lang="en-US" sz="1500" dirty="0">
                 <a:solidFill>
                   <a:srgbClr val="1F2328"/>
                 </a:solidFill>
@@ -10266,7 +10268,7 @@
               </a:rPr>
               <a:t>Plan, cost, and preview before anything is billable.</a:t>
             </a:r>
-            <a:endParaRPr lang="en-US" sz="1300" dirty="0"/>
+            <a:endParaRPr lang="en-US" sz="1500" dirty="0"/>
           </a:p>
         </p:txBody>
       </p:sp>
@@ -10278,12 +10280,12 @@
         </p:nvSpPr>
         <p:spPr>
           <a:xfrm>
-            <a:off x="4736902" y="1320701"/>
-            <a:ext cx="431750" cy="431750"/>
+            <a:off x="4762351" y="1422350"/>
+            <a:ext cx="507950" cy="507950"/>
           </a:xfrm>
           <a:prstGeom prst="roundRect">
             <a:avLst>
-              <a:gd name="adj" fmla="val 17649"/>
+              <a:gd name="adj" fmla="val 15001"/>
             </a:avLst>
           </a:prstGeom>
           <a:solidFill>
@@ -10318,8 +10320,8 @@
         </p:blipFill>
         <p:spPr>
           <a:xfrm>
-            <a:off x="4832152" y="1415951"/>
-            <a:ext cx="241250" cy="241250"/>
+            <a:off x="4876651" y="1536650"/>
+            <a:ext cx="279350" cy="279350"/>
           </a:xfrm>
           <a:prstGeom prst="rect">
             <a:avLst/>
@@ -10334,8 +10336,8 @@
         </p:nvSpPr>
         <p:spPr>
           <a:xfrm>
-            <a:off x="5321052" y="1320701"/>
-            <a:ext cx="3355035" cy="431899"/>
+            <a:off x="5435352" y="1435001"/>
+            <a:ext cx="3290367" cy="482501"/>
           </a:xfrm>
           <a:prstGeom prst="rect">
             <a:avLst/>
@@ -10349,12 +10351,12 @@
           <a:p>
             <a:pPr algn="l" indent="0" marL="0">
               <a:lnSpc>
-                <a:spcPts val="1700"/>
+                <a:spcPts val="1900"/>
               </a:lnSpc>
               <a:buNone/>
             </a:pPr>
             <a:r>
-              <a:rPr lang="en-US" sz="1300" dirty="0">
+              <a:rPr lang="en-US" sz="1500" dirty="0">
                 <a:solidFill>
                   <a:srgbClr val="1F2328"/>
                 </a:solidFill>
@@ -10364,7 +10366,7 @@
               </a:rPr>
               <a:t>Skills carry app quirks like probe timing and SSL.</a:t>
             </a:r>
-            <a:endParaRPr lang="en-US" sz="1300" dirty="0"/>
+            <a:endParaRPr lang="en-US" sz="1500" dirty="0"/>
           </a:p>
         </p:txBody>
       </p:sp>
@@ -10376,12 +10378,12 @@
         </p:nvSpPr>
         <p:spPr>
           <a:xfrm>
-            <a:off x="482501" y="2082701"/>
-            <a:ext cx="431750" cy="431750"/>
+            <a:off x="482501" y="2311301"/>
+            <a:ext cx="507950" cy="507950"/>
           </a:xfrm>
           <a:prstGeom prst="roundRect">
             <a:avLst>
-              <a:gd name="adj" fmla="val 17649"/>
+              <a:gd name="adj" fmla="val 15001"/>
             </a:avLst>
           </a:prstGeom>
           <a:solidFill>
@@ -10416,8 +10418,8 @@
         </p:blipFill>
         <p:spPr>
           <a:xfrm>
-            <a:off x="577751" y="2177951"/>
-            <a:ext cx="241250" cy="241250"/>
+            <a:off x="596801" y="2425601"/>
+            <a:ext cx="279350" cy="279350"/>
           </a:xfrm>
           <a:prstGeom prst="rect">
             <a:avLst/>
@@ -10432,8 +10434,8 @@
         </p:nvSpPr>
         <p:spPr>
           <a:xfrm>
-            <a:off x="1066651" y="2082701"/>
-            <a:ext cx="3355035" cy="431899"/>
+            <a:off x="1155502" y="2323951"/>
+            <a:ext cx="3290367" cy="482501"/>
           </a:xfrm>
           <a:prstGeom prst="rect">
             <a:avLst/>
@@ -10447,12 +10449,12 @@
           <a:p>
             <a:pPr algn="l" indent="0" marL="0">
               <a:lnSpc>
-                <a:spcPts val="1700"/>
+                <a:spcPts val="1900"/>
               </a:lnSpc>
               <a:buNone/>
             </a:pPr>
             <a:r>
-              <a:rPr lang="en-US" sz="1300" dirty="0">
+              <a:rPr lang="en-US" sz="1500" dirty="0">
                 <a:solidFill>
                   <a:srgbClr val="1F2328"/>
                 </a:solidFill>
@@ -10462,7 +10464,7 @@
               </a:rPr>
               <a:t>Hooks solve settings that only exist after deploy.</a:t>
             </a:r>
-            <a:endParaRPr lang="en-US" sz="1300" dirty="0"/>
+            <a:endParaRPr lang="en-US" sz="1500" dirty="0"/>
           </a:p>
         </p:txBody>
       </p:sp>
@@ -10474,12 +10476,12 @@
         </p:nvSpPr>
         <p:spPr>
           <a:xfrm>
-            <a:off x="4736902" y="2082701"/>
-            <a:ext cx="431750" cy="431750"/>
+            <a:off x="4762351" y="2311301"/>
+            <a:ext cx="507950" cy="507950"/>
           </a:xfrm>
           <a:prstGeom prst="roundRect">
             <a:avLst>
-              <a:gd name="adj" fmla="val 17649"/>
+              <a:gd name="adj" fmla="val 15001"/>
             </a:avLst>
           </a:prstGeom>
           <a:solidFill>
@@ -10514,8 +10516,8 @@
         </p:blipFill>
         <p:spPr>
           <a:xfrm>
-            <a:off x="4832152" y="2177951"/>
-            <a:ext cx="241250" cy="241250"/>
+            <a:off x="4876651" y="2425601"/>
+            <a:ext cx="279350" cy="279350"/>
           </a:xfrm>
           <a:prstGeom prst="rect">
             <a:avLst/>
@@ -10530,8 +10532,8 @@
         </p:nvSpPr>
         <p:spPr>
           <a:xfrm>
-            <a:off x="5321052" y="2190601"/>
-            <a:ext cx="2611192" cy="215950"/>
+            <a:off x="5435352" y="2444651"/>
+            <a:ext cx="3013475" cy="241250"/>
           </a:xfrm>
           <a:prstGeom prst="rect">
             <a:avLst/>
@@ -10545,12 +10547,12 @@
           <a:p>
             <a:pPr algn="l" indent="0" marL="0">
               <a:lnSpc>
-                <a:spcPts val="1700"/>
+                <a:spcPts val="1900"/>
               </a:lnSpc>
               <a:buNone/>
             </a:pPr>
             <a:r>
-              <a:rPr lang="en-US" sz="1300" dirty="0">
+              <a:rPr lang="en-US" sz="1500" dirty="0">
                 <a:solidFill>
                   <a:srgbClr val="1F2328"/>
                 </a:solidFill>
@@ -10560,7 +10562,7 @@
               </a:rPr>
               <a:t>Use deploy time to build in parallel.</a:t>
             </a:r>
-            <a:endParaRPr lang="en-US" sz="1300" dirty="0"/>
+            <a:endParaRPr lang="en-US" sz="1500" dirty="0"/>
           </a:p>
         </p:txBody>
       </p:sp>
@@ -10572,12 +10574,12 @@
         </p:nvSpPr>
         <p:spPr>
           <a:xfrm>
-            <a:off x="482501" y="3886200"/>
-            <a:ext cx="8178701" cy="711101"/>
+            <a:off x="482501" y="3810000"/>
+            <a:ext cx="8178701" cy="787301"/>
           </a:xfrm>
           <a:prstGeom prst="roundRect">
             <a:avLst>
-              <a:gd name="adj" fmla="val 14288"/>
+              <a:gd name="adj" fmla="val 12905"/>
             </a:avLst>
           </a:prstGeom>
           <a:solidFill>
@@ -10608,12 +10610,12 @@
         </p:nvSpPr>
         <p:spPr>
           <a:xfrm>
-            <a:off x="669727" y="4051250"/>
-            <a:ext cx="381000" cy="381000"/>
+            <a:off x="669727" y="3987701"/>
+            <a:ext cx="431750" cy="431750"/>
           </a:xfrm>
           <a:prstGeom prst="roundRect">
             <a:avLst>
-              <a:gd name="adj" fmla="val 20000"/>
+              <a:gd name="adj" fmla="val 17649"/>
             </a:avLst>
           </a:prstGeom>
           <a:solidFill>
@@ -10648,8 +10650,8 @@
         </p:blipFill>
         <p:spPr>
           <a:xfrm>
-            <a:off x="752326" y="4133850"/>
-            <a:ext cx="215801" cy="215801"/>
+            <a:off x="764977" y="4082951"/>
+            <a:ext cx="241250" cy="241250"/>
           </a:xfrm>
           <a:prstGeom prst="rect">
             <a:avLst/>
@@ -10664,8 +10666,8 @@
         </p:nvSpPr>
         <p:spPr>
           <a:xfrm>
-            <a:off x="1203127" y="4067175"/>
-            <a:ext cx="6946279" cy="133350"/>
+            <a:off x="1253877" y="4008388"/>
+            <a:ext cx="5079081" cy="142875"/>
           </a:xfrm>
           <a:prstGeom prst="rect">
             <a:avLst/>
@@ -10681,7 +10683,7 @@
               <a:buNone/>
             </a:pPr>
             <a:r>
-              <a:rPr lang="en-US" sz="900" b="1" dirty="0">
+              <a:rPr lang="en-US" sz="1000" b="1" dirty="0">
                 <a:solidFill>
                   <a:srgbClr val="0969DA"/>
                 </a:solidFill>
@@ -10691,7 +10693,7 @@
               </a:rPr>
               <a:t>NEXT JOURNEY</a:t>
             </a:r>
-            <a:endParaRPr lang="en-US" sz="900" dirty="0"/>
+            <a:endParaRPr lang="en-US" sz="1000" dirty="0"/>
           </a:p>
         </p:txBody>
       </p:sp>
@@ -10703,8 +10705,8 @@
         </p:nvSpPr>
         <p:spPr>
           <a:xfrm>
-            <a:off x="1203127" y="4225826"/>
-            <a:ext cx="6946279" cy="190500"/>
+            <a:off x="1253877" y="4189363"/>
+            <a:ext cx="5079081" cy="209550"/>
           </a:xfrm>
           <a:prstGeom prst="rect">
             <a:avLst/>
@@ -10720,7 +10722,7 @@
               <a:buNone/>
             </a:pPr>
             <a:r>
-              <a:rPr lang="en-US" sz="1250" b="1" dirty="0">
+              <a:rPr lang="en-US" sz="1400" b="1" dirty="0">
                 <a:solidFill>
                   <a:srgbClr val="1F2328"/>
                 </a:solidFill>
@@ -10734,7 +10736,7 @@
               <a:buNone/>
             </a:pPr>
             <a:r>
-              <a:rPr lang="en-US" sz="1250" dirty="0">
+              <a:rPr lang="en-US" sz="1400" dirty="0">
                 <a:solidFill>
                   <a:srgbClr val="1F2328"/>
                 </a:solidFill>
@@ -10748,7 +10750,7 @@
               <a:buNone/>
             </a:pPr>
             <a:r>
-              <a:rPr lang="en-US" sz="1250" dirty="0">
+              <a:rPr lang="en-US" sz="1400" dirty="0">
                 <a:solidFill>
                   <a:srgbClr val="59636E"/>
                 </a:solidFill>
@@ -10756,9 +10758,9 @@
                 <a:ea typeface="Arial" pitchFamily="34" charset="-122"/>
                 <a:cs typeface="Arial" pitchFamily="34" charset="-120"/>
               </a:rPr>
-              <a:t>· When an app needs Kubernetes: AKS, init containers, and a pre-deploy gate</a:t>
-            </a:r>
-            <a:endParaRPr lang="en-US" sz="1250" dirty="0"/>
+              <a:t>· AKS, init containers, and a pre-deploy gate</a:t>
+            </a:r>
+            <a:endParaRPr lang="en-US" sz="1400" dirty="0"/>
           </a:p>
         </p:txBody>
       </p:sp>
@@ -10802,12 +10804,12 @@
         </p:nvSpPr>
         <p:spPr>
           <a:xfrm>
-            <a:off x="8077200" y="152400"/>
-            <a:ext cx="482650" cy="266700"/>
+            <a:off x="8026598" y="152400"/>
+            <a:ext cx="533251" cy="279350"/>
           </a:xfrm>
           <a:prstGeom prst="roundRect">
             <a:avLst>
-              <a:gd name="adj" fmla="val 23810"/>
+              <a:gd name="adj" fmla="val 22731"/>
             </a:avLst>
           </a:prstGeom>
           <a:solidFill>
@@ -10834,8 +10836,8 @@
         </p:nvSpPr>
         <p:spPr>
           <a:xfrm>
-            <a:off x="8201863" y="219075"/>
-            <a:ext cx="233324" cy="133350"/>
+            <a:off x="8163659" y="220563"/>
+            <a:ext cx="259131" cy="142875"/>
           </a:xfrm>
           <a:prstGeom prst="rect">
             <a:avLst/>
@@ -10851,7 +10853,7 @@
               <a:buNone/>
             </a:pPr>
             <a:r>
-              <a:rPr lang="en-US" sz="900" b="1" dirty="0">
+              <a:rPr lang="en-US" sz="1000" b="1" dirty="0">
                 <a:solidFill>
                   <a:srgbClr val="FFFFFF"/>
                 </a:solidFill>
@@ -10861,7 +10863,7 @@
               </a:rPr>
               <a:t>N8N</a:t>
             </a:r>
-            <a:endParaRPr lang="en-US" sz="900" dirty="0"/>
+            <a:endParaRPr lang="en-US" sz="1000" dirty="0"/>
           </a:p>
         </p:txBody>
       </p:sp>
@@ -10898,7 +10900,7 @@
         <p:spPr>
           <a:xfrm>
             <a:off x="482501" y="330101"/>
-            <a:ext cx="7772400" cy="142875"/>
+            <a:ext cx="8342275" cy="152400"/>
           </a:xfrm>
           <a:prstGeom prst="rect">
             <a:avLst/>
@@ -10914,7 +10916,7 @@
               <a:buNone/>
             </a:pPr>
             <a:r>
-              <a:rPr lang="en-US" sz="1000" b="1" dirty="0">
+              <a:rPr lang="en-US" sz="1100" b="1" dirty="0">
                 <a:solidFill>
                   <a:srgbClr val="59636E"/>
                 </a:solidFill>
@@ -10924,7 +10926,7 @@
               </a:rPr>
               <a:t>WHERE WE ARE HEADED</a:t>
             </a:r>
-            <a:endParaRPr lang="en-US" sz="1000" dirty="0"/>
+            <a:endParaRPr lang="en-US" sz="1100" dirty="0"/>
           </a:p>
         </p:txBody>
       </p:sp>
@@ -10936,8 +10938,8 @@
         </p:nvSpPr>
         <p:spPr>
           <a:xfrm>
-            <a:off x="482501" y="523726"/>
-            <a:ext cx="7772400" cy="393650"/>
+            <a:off x="482501" y="533251"/>
+            <a:ext cx="8342275" cy="419100"/>
           </a:xfrm>
           <a:prstGeom prst="rect">
             <a:avLst/>
@@ -10951,7 +10953,7 @@
           <a:p>
             <a:pPr algn="l" indent="0" marL="0">
               <a:lnSpc>
-                <a:spcPts val="3100"/>
+                <a:spcPts val="3300"/>
               </a:lnSpc>
               <a:spcBef>
                 <a:spcPts val="400"/>
@@ -10959,7 +10961,7 @@
               <a:buNone/>
             </a:pPr>
             <a:r>
-              <a:rPr lang="en-US" sz="2600" b="1" dirty="0">
+              <a:rPr lang="en-US" sz="2800" b="1" dirty="0">
                 <a:solidFill>
                   <a:srgbClr val="1F2328"/>
                 </a:solidFill>
@@ -10969,7 +10971,7 @@
               </a:rPr>
               <a:t>Workflow automation, running on Azure</a:t>
             </a:r>
-            <a:endParaRPr lang="en-US" sz="2600" dirty="0"/>
+            <a:endParaRPr lang="en-US" sz="2800" dirty="0"/>
           </a:p>
         </p:txBody>
       </p:sp>
@@ -10989,7 +10991,7 @@
         </p:blipFill>
         <p:spPr>
           <a:xfrm>
-            <a:off x="699641" y="1422202"/>
+            <a:off x="699641" y="1447800"/>
             <a:ext cx="7744420" cy="3174950"/>
           </a:xfrm>
           <a:prstGeom prst="rect">
@@ -11037,12 +11039,12 @@
         </p:nvSpPr>
         <p:spPr>
           <a:xfrm>
-            <a:off x="8077200" y="152400"/>
-            <a:ext cx="482650" cy="266700"/>
+            <a:off x="8026598" y="152400"/>
+            <a:ext cx="533251" cy="279350"/>
           </a:xfrm>
           <a:prstGeom prst="roundRect">
             <a:avLst>
-              <a:gd name="adj" fmla="val 23810"/>
+              <a:gd name="adj" fmla="val 22731"/>
             </a:avLst>
           </a:prstGeom>
           <a:solidFill>
@@ -11069,8 +11071,8 @@
         </p:nvSpPr>
         <p:spPr>
           <a:xfrm>
-            <a:off x="8201863" y="219075"/>
-            <a:ext cx="233324" cy="133350"/>
+            <a:off x="8163659" y="220563"/>
+            <a:ext cx="259131" cy="142875"/>
           </a:xfrm>
           <a:prstGeom prst="rect">
             <a:avLst/>
@@ -11086,7 +11088,7 @@
               <a:buNone/>
             </a:pPr>
             <a:r>
-              <a:rPr lang="en-US" sz="900" b="1" dirty="0">
+              <a:rPr lang="en-US" sz="1000" b="1" dirty="0">
                 <a:solidFill>
                   <a:srgbClr val="FFFFFF"/>
                 </a:solidFill>
@@ -11096,7 +11098,7 @@
               </a:rPr>
               <a:t>N8N</a:t>
             </a:r>
-            <a:endParaRPr lang="en-US" sz="900" dirty="0"/>
+            <a:endParaRPr lang="en-US" sz="1000" dirty="0"/>
           </a:p>
         </p:txBody>
       </p:sp>
@@ -11133,7 +11135,7 @@
         <p:spPr>
           <a:xfrm>
             <a:off x="482501" y="330101"/>
-            <a:ext cx="7772400" cy="142875"/>
+            <a:ext cx="8342275" cy="152400"/>
           </a:xfrm>
           <a:prstGeom prst="rect">
             <a:avLst/>
@@ -11149,7 +11151,7 @@
               <a:buNone/>
             </a:pPr>
             <a:r>
-              <a:rPr lang="en-US" sz="1000" b="1" dirty="0">
+              <a:rPr lang="en-US" sz="1100" b="1" dirty="0">
                 <a:solidFill>
                   <a:srgbClr val="59636E"/>
                 </a:solidFill>
@@ -11159,7 +11161,7 @@
               </a:rPr>
               <a:t>HOW IT WORKS</a:t>
             </a:r>
-            <a:endParaRPr lang="en-US" sz="1000" dirty="0"/>
+            <a:endParaRPr lang="en-US" sz="1100" dirty="0"/>
           </a:p>
         </p:txBody>
       </p:sp>
@@ -11171,8 +11173,8 @@
         </p:nvSpPr>
         <p:spPr>
           <a:xfrm>
-            <a:off x="482501" y="523726"/>
-            <a:ext cx="7772400" cy="393650"/>
+            <a:off x="482501" y="533251"/>
+            <a:ext cx="8342275" cy="419100"/>
           </a:xfrm>
           <a:prstGeom prst="rect">
             <a:avLst/>
@@ -11186,7 +11188,7 @@
           <a:p>
             <a:pPr algn="l" indent="0" marL="0">
               <a:lnSpc>
-                <a:spcPts val="3100"/>
+                <a:spcPts val="3300"/>
               </a:lnSpc>
               <a:spcBef>
                 <a:spcPts val="400"/>
@@ -11194,7 +11196,7 @@
               <a:buNone/>
             </a:pPr>
             <a:r>
-              <a:rPr lang="en-US" sz="2600" b="1" dirty="0">
+              <a:rPr lang="en-US" sz="2800" b="1" dirty="0">
                 <a:solidFill>
                   <a:srgbClr val="1F2328"/>
                 </a:solidFill>
@@ -11204,7 +11206,7 @@
               </a:rPr>
               <a:t>Your prompt, the agent, and the skills</a:t>
             </a:r>
-            <a:endParaRPr lang="en-US" sz="2600" dirty="0"/>
+            <a:endParaRPr lang="en-US" sz="2800" dirty="0"/>
           </a:p>
         </p:txBody>
       </p:sp>
@@ -11224,7 +11226,7 @@
         </p:blipFill>
         <p:spPr>
           <a:xfrm>
-            <a:off x="690711" y="1282601"/>
+            <a:off x="690711" y="1308050"/>
             <a:ext cx="7762131" cy="3454301"/>
           </a:xfrm>
           <a:prstGeom prst="rect">
@@ -11272,12 +11274,12 @@
         </p:nvSpPr>
         <p:spPr>
           <a:xfrm>
-            <a:off x="8077200" y="152400"/>
-            <a:ext cx="482650" cy="266700"/>
+            <a:off x="8026598" y="152400"/>
+            <a:ext cx="533251" cy="279350"/>
           </a:xfrm>
           <a:prstGeom prst="roundRect">
             <a:avLst>
-              <a:gd name="adj" fmla="val 23810"/>
+              <a:gd name="adj" fmla="val 22731"/>
             </a:avLst>
           </a:prstGeom>
           <a:solidFill>
@@ -11304,8 +11306,8 @@
         </p:nvSpPr>
         <p:spPr>
           <a:xfrm>
-            <a:off x="8201863" y="219075"/>
-            <a:ext cx="233324" cy="133350"/>
+            <a:off x="8163659" y="220563"/>
+            <a:ext cx="259131" cy="142875"/>
           </a:xfrm>
           <a:prstGeom prst="rect">
             <a:avLst/>
@@ -11321,7 +11323,7 @@
               <a:buNone/>
             </a:pPr>
             <a:r>
-              <a:rPr lang="en-US" sz="900" b="1" dirty="0">
+              <a:rPr lang="en-US" sz="1000" b="1" dirty="0">
                 <a:solidFill>
                   <a:srgbClr val="FFFFFF"/>
                 </a:solidFill>
@@ -11331,7 +11333,7 @@
               </a:rPr>
               <a:t>N8N</a:t>
             </a:r>
-            <a:endParaRPr lang="en-US" sz="900" dirty="0"/>
+            <a:endParaRPr lang="en-US" sz="1000" dirty="0"/>
           </a:p>
         </p:txBody>
       </p:sp>
@@ -11368,7 +11370,7 @@
         <p:spPr>
           <a:xfrm>
             <a:off x="482501" y="330101"/>
-            <a:ext cx="7772400" cy="142875"/>
+            <a:ext cx="8342275" cy="152400"/>
           </a:xfrm>
           <a:prstGeom prst="rect">
             <a:avLst/>
@@ -11384,7 +11386,7 @@
               <a:buNone/>
             </a:pPr>
             <a:r>
-              <a:rPr lang="en-US" sz="1000" b="1" dirty="0">
+              <a:rPr lang="en-US" sz="1100" b="1" dirty="0">
                 <a:solidFill>
                   <a:srgbClr val="59636E"/>
                 </a:solidFill>
@@ -11394,7 +11396,7 @@
               </a:rPr>
               <a:t>ARCHITECTURE</a:t>
             </a:r>
-            <a:endParaRPr lang="en-US" sz="1000" dirty="0"/>
+            <a:endParaRPr lang="en-US" sz="1100" dirty="0"/>
           </a:p>
         </p:txBody>
       </p:sp>
@@ -11406,8 +11408,8 @@
         </p:nvSpPr>
         <p:spPr>
           <a:xfrm>
-            <a:off x="482501" y="523726"/>
-            <a:ext cx="7772400" cy="393650"/>
+            <a:off x="482501" y="533251"/>
+            <a:ext cx="8342275" cy="419100"/>
           </a:xfrm>
           <a:prstGeom prst="rect">
             <a:avLst/>
@@ -11421,7 +11423,7 @@
           <a:p>
             <a:pPr algn="l" indent="0" marL="0">
               <a:lnSpc>
-                <a:spcPts val="3100"/>
+                <a:spcPts val="3300"/>
               </a:lnSpc>
               <a:spcBef>
                 <a:spcPts val="400"/>
@@ -11429,7 +11431,7 @@
               <a:buNone/>
             </a:pPr>
             <a:r>
-              <a:rPr lang="en-US" sz="2600" b="1" dirty="0">
+              <a:rPr lang="en-US" sz="2800" b="1" dirty="0">
                 <a:solidFill>
                   <a:srgbClr val="1F2328"/>
                 </a:solidFill>
@@ -11439,7 +11441,7 @@
               </a:rPr>
               <a:t>An app, a database, and a hook</a:t>
             </a:r>
-            <a:endParaRPr lang="en-US" sz="2600" dirty="0"/>
+            <a:endParaRPr lang="en-US" sz="2800" dirty="0"/>
           </a:p>
         </p:txBody>
       </p:sp>
@@ -11451,12 +11453,12 @@
         </p:nvSpPr>
         <p:spPr>
           <a:xfrm>
-            <a:off x="1387525" y="2174825"/>
-            <a:ext cx="1269950" cy="1060252"/>
+            <a:off x="942975" y="2060525"/>
+            <a:ext cx="1524000" cy="1288852"/>
           </a:xfrm>
           <a:prstGeom prst="roundRect">
             <a:avLst>
-              <a:gd name="adj" fmla="val 9583"/>
+              <a:gd name="adj" fmla="val 7883"/>
             </a:avLst>
           </a:prstGeom>
           <a:solidFill>
@@ -11487,12 +11489,12 @@
         </p:nvSpPr>
         <p:spPr>
           <a:xfrm>
-            <a:off x="1831925" y="2298650"/>
-            <a:ext cx="381000" cy="381000"/>
+            <a:off x="1476375" y="2209651"/>
+            <a:ext cx="457200" cy="457200"/>
           </a:xfrm>
           <a:prstGeom prst="roundRect">
             <a:avLst>
-              <a:gd name="adj" fmla="val 20000"/>
+              <a:gd name="adj" fmla="val 16667"/>
             </a:avLst>
           </a:prstGeom>
           <a:solidFill>
@@ -11527,8 +11529,8 @@
         </p:blipFill>
         <p:spPr>
           <a:xfrm>
-            <a:off x="1914525" y="2381250"/>
-            <a:ext cx="215801" cy="215801"/>
+            <a:off x="1578025" y="2311301"/>
+            <a:ext cx="253901" cy="253901"/>
           </a:xfrm>
           <a:prstGeom prst="rect">
             <a:avLst/>
@@ -11543,8 +11545,8 @@
         </p:nvSpPr>
         <p:spPr>
           <a:xfrm>
-            <a:off x="1899008" y="2743051"/>
-            <a:ext cx="246834" cy="165050"/>
+            <a:off x="1552109" y="2743051"/>
+            <a:ext cx="305583" cy="203150"/>
           </a:xfrm>
           <a:prstGeom prst="rect">
             <a:avLst/>
@@ -11558,12 +11560,12 @@
           <a:p>
             <a:pPr algn="ctr" indent="0" marL="0">
               <a:lnSpc>
-                <a:spcPts val="1300"/>
+                <a:spcPts val="1600"/>
               </a:lnSpc>
               <a:buNone/>
             </a:pPr>
             <a:r>
-              <a:rPr lang="en-US" sz="1050" b="1" dirty="0">
+              <a:rPr lang="en-US" sz="1300" b="1" dirty="0">
                 <a:solidFill>
                   <a:srgbClr val="1F2328"/>
                 </a:solidFill>
@@ -11573,7 +11575,7 @@
               </a:rPr>
               <a:t>You</a:t>
             </a:r>
-            <a:endParaRPr lang="en-US" sz="1050" dirty="0"/>
+            <a:endParaRPr lang="en-US" sz="1300" dirty="0"/>
           </a:p>
         </p:txBody>
       </p:sp>
@@ -11585,8 +11587,8 @@
         </p:nvSpPr>
         <p:spPr>
           <a:xfrm>
-            <a:off x="1655362" y="2971502"/>
-            <a:ext cx="734127" cy="139750"/>
+            <a:off x="1229978" y="3022402"/>
+            <a:ext cx="949994" cy="177850"/>
           </a:xfrm>
           <a:prstGeom prst="rect">
             <a:avLst/>
@@ -11600,12 +11602,12 @@
           <a:p>
             <a:pPr algn="ctr" indent="0" marL="0">
               <a:lnSpc>
-                <a:spcPts val="1100"/>
+                <a:spcPts val="1400"/>
               </a:lnSpc>
               <a:buNone/>
             </a:pPr>
             <a:r>
-              <a:rPr lang="en-US" sz="850" dirty="0">
+              <a:rPr lang="en-US" sz="1100" dirty="0">
                 <a:solidFill>
                   <a:srgbClr val="59636E"/>
                 </a:solidFill>
@@ -11615,7 +11617,7 @@
               </a:rPr>
               <a:t>Browser or API</a:t>
             </a:r>
-            <a:endParaRPr lang="en-US" sz="850" dirty="0"/>
+            <a:endParaRPr lang="en-US" sz="1100" dirty="0"/>
           </a:p>
         </p:txBody>
       </p:sp>
@@ -11627,8 +11629,8 @@
         </p:nvSpPr>
         <p:spPr>
           <a:xfrm>
-            <a:off x="2866433" y="2538264"/>
-            <a:ext cx="318486" cy="104775"/>
+            <a:off x="2622951" y="2506563"/>
+            <a:ext cx="424598" cy="142875"/>
           </a:xfrm>
           <a:prstGeom prst="rect">
             <a:avLst/>
@@ -11644,7 +11646,7 @@
               <a:buNone/>
             </a:pPr>
             <a:r>
-              <a:rPr lang="en-US" sz="750" dirty="0">
+              <a:rPr lang="en-US" sz="1000" dirty="0">
                 <a:solidFill>
                   <a:srgbClr val="59636E"/>
                 </a:solidFill>
@@ -11654,7 +11656,7 @@
               </a:rPr>
               <a:t>HTTPS</a:t>
             </a:r>
-            <a:endParaRPr lang="en-US" sz="750" dirty="0"/>
+            <a:endParaRPr lang="en-US" sz="1000" dirty="0"/>
           </a:p>
         </p:txBody>
       </p:sp>
@@ -11666,8 +11668,8 @@
         </p:nvSpPr>
         <p:spPr>
           <a:xfrm>
-            <a:off x="2921993" y="2643039"/>
-            <a:ext cx="207365" cy="228600"/>
+            <a:off x="2718590" y="2649438"/>
+            <a:ext cx="233172" cy="254050"/>
           </a:xfrm>
           <a:prstGeom prst="rect">
             <a:avLst/>
@@ -11681,12 +11683,12 @@
           <a:p>
             <a:pPr algn="ctr" indent="0" marL="0">
               <a:lnSpc>
-                <a:spcPts val="1800"/>
+                <a:spcPts val="2000"/>
               </a:lnSpc>
               <a:buNone/>
             </a:pPr>
             <a:r>
-              <a:rPr lang="en-US" sz="1600" dirty="0">
+              <a:rPr lang="en-US" sz="1800" dirty="0">
                 <a:solidFill>
                   <a:srgbClr val="818B98"/>
                 </a:solidFill>
@@ -11696,7 +11698,7 @@
               </a:rPr>
               <a:t>→</a:t>
             </a:r>
-            <a:endParaRPr lang="en-US" sz="1600" dirty="0"/>
+            <a:endParaRPr lang="en-US" sz="1800" dirty="0"/>
           </a:p>
         </p:txBody>
       </p:sp>
@@ -11708,12 +11710,12 @@
         </p:nvSpPr>
         <p:spPr>
           <a:xfrm>
-            <a:off x="3394025" y="1905000"/>
-            <a:ext cx="4362152" cy="1599902"/>
+            <a:off x="3203525" y="1778050"/>
+            <a:ext cx="4997202" cy="1853952"/>
           </a:xfrm>
           <a:prstGeom prst="roundRect">
             <a:avLst>
-              <a:gd name="adj" fmla="val 7938"/>
+              <a:gd name="adj" fmla="val 6850"/>
             </a:avLst>
           </a:prstGeom>
           <a:solidFill>
@@ -11752,8 +11754,8 @@
         </p:blipFill>
         <p:spPr>
           <a:xfrm>
-            <a:off x="3555950" y="2066925"/>
-            <a:ext cx="139601" cy="139601"/>
+            <a:off x="3365450" y="1939975"/>
+            <a:ext cx="165050" cy="165050"/>
           </a:xfrm>
           <a:prstGeom prst="rect">
             <a:avLst/>
@@ -11768,8 +11770,8 @@
         </p:nvSpPr>
         <p:spPr>
           <a:xfrm>
-            <a:off x="3758952" y="2079575"/>
-            <a:ext cx="1467951" cy="114300"/>
+            <a:off x="3593902" y="1950988"/>
+            <a:ext cx="1726930" cy="142875"/>
           </a:xfrm>
           <a:prstGeom prst="rect">
             <a:avLst/>
@@ -11785,7 +11787,7 @@
               <a:buNone/>
             </a:pPr>
             <a:r>
-              <a:rPr lang="en-US" sz="850" b="1" dirty="0">
+              <a:rPr lang="en-US" sz="1000" b="1" dirty="0">
                 <a:solidFill>
                   <a:srgbClr val="0969DA"/>
                 </a:solidFill>
@@ -11795,7 +11797,7 @@
               </a:rPr>
               <a:t>AZURE RESOURCE GROUP</a:t>
             </a:r>
-            <a:endParaRPr lang="en-US" sz="850" dirty="0"/>
+            <a:endParaRPr lang="en-US" sz="1000" dirty="0"/>
           </a:p>
         </p:txBody>
       </p:sp>
@@ -11807,12 +11809,12 @@
         </p:nvSpPr>
         <p:spPr>
           <a:xfrm>
-            <a:off x="3555950" y="2282726"/>
-            <a:ext cx="1777901" cy="1060252"/>
+            <a:off x="3365450" y="2181225"/>
+            <a:ext cx="2158901" cy="1288852"/>
           </a:xfrm>
           <a:prstGeom prst="roundRect">
             <a:avLst>
-              <a:gd name="adj" fmla="val 9583"/>
+              <a:gd name="adj" fmla="val 7883"/>
             </a:avLst>
           </a:prstGeom>
           <a:solidFill>
@@ -11843,12 +11845,12 @@
         </p:nvSpPr>
         <p:spPr>
           <a:xfrm>
-            <a:off x="4254401" y="2406551"/>
-            <a:ext cx="381000" cy="381000"/>
+            <a:off x="4216301" y="2330351"/>
+            <a:ext cx="457200" cy="457200"/>
           </a:xfrm>
           <a:prstGeom prst="roundRect">
             <a:avLst>
-              <a:gd name="adj" fmla="val 20000"/>
+              <a:gd name="adj" fmla="val 16667"/>
             </a:avLst>
           </a:prstGeom>
           <a:solidFill>
@@ -11883,8 +11885,8 @@
         </p:blipFill>
         <p:spPr>
           <a:xfrm>
-            <a:off x="4337000" y="2489150"/>
-            <a:ext cx="215801" cy="215801"/>
+            <a:off x="4317950" y="2432000"/>
+            <a:ext cx="253901" cy="253901"/>
           </a:xfrm>
           <a:prstGeom prst="rect">
             <a:avLst/>
@@ -11899,8 +11901,8 @@
         </p:nvSpPr>
         <p:spPr>
           <a:xfrm>
-            <a:off x="4323914" y="2850952"/>
-            <a:ext cx="241825" cy="165050"/>
+            <a:off x="4295221" y="2863751"/>
+            <a:ext cx="299359" cy="203150"/>
           </a:xfrm>
           <a:prstGeom prst="rect">
             <a:avLst/>
@@ -11914,12 +11916,12 @@
           <a:p>
             <a:pPr algn="ctr" indent="0" marL="0">
               <a:lnSpc>
-                <a:spcPts val="1300"/>
+                <a:spcPts val="1600"/>
               </a:lnSpc>
               <a:buNone/>
             </a:pPr>
             <a:r>
-              <a:rPr lang="en-US" sz="1050" b="1" dirty="0">
+              <a:rPr lang="en-US" sz="1300" b="1" dirty="0">
                 <a:solidFill>
                   <a:srgbClr val="1F2328"/>
                 </a:solidFill>
@@ -11929,7 +11931,7 @@
               </a:rPr>
               <a:t>n8n</a:t>
             </a:r>
-            <a:endParaRPr lang="en-US" sz="1050" dirty="0"/>
+            <a:endParaRPr lang="en-US" sz="1300" dirty="0"/>
           </a:p>
         </p:txBody>
       </p:sp>
@@ -11941,8 +11943,8 @@
         </p:nvSpPr>
         <p:spPr>
           <a:xfrm>
-            <a:off x="3854381" y="3079403"/>
-            <a:ext cx="1181040" cy="139750"/>
+            <a:off x="3680717" y="3143101"/>
+            <a:ext cx="1528218" cy="177850"/>
           </a:xfrm>
           <a:prstGeom prst="rect">
             <a:avLst/>
@@ -11956,12 +11958,12 @@
           <a:p>
             <a:pPr algn="ctr" indent="0" marL="0">
               <a:lnSpc>
-                <a:spcPts val="1100"/>
+                <a:spcPts val="1400"/>
               </a:lnSpc>
               <a:buNone/>
             </a:pPr>
             <a:r>
-              <a:rPr lang="en-US" sz="850" dirty="0">
+              <a:rPr lang="en-US" sz="1100" dirty="0">
                 <a:solidFill>
                   <a:srgbClr val="59636E"/>
                 </a:solidFill>
@@ -11971,7 +11973,7 @@
               </a:rPr>
               <a:t>Container App · /healthz</a:t>
             </a:r>
-            <a:endParaRPr lang="en-US" sz="850" dirty="0"/>
+            <a:endParaRPr lang="en-US" sz="1100" dirty="0"/>
           </a:p>
         </p:txBody>
       </p:sp>
@@ -11983,8 +11985,8 @@
         </p:nvSpPr>
         <p:spPr>
           <a:xfrm>
-            <a:off x="5546661" y="2646164"/>
-            <a:ext cx="183684" cy="104775"/>
+            <a:off x="5706646" y="2627114"/>
+            <a:ext cx="244861" cy="142875"/>
           </a:xfrm>
           <a:prstGeom prst="rect">
             <a:avLst/>
@@ -12000,7 +12002,7 @@
               <a:buNone/>
             </a:pPr>
             <a:r>
-              <a:rPr lang="en-US" sz="750" dirty="0">
+              <a:rPr lang="en-US" sz="1000" dirty="0">
                 <a:solidFill>
                   <a:srgbClr val="59636E"/>
                 </a:solidFill>
@@ -12010,7 +12012,7 @@
               </a:rPr>
               <a:t>SSL</a:t>
             </a:r>
-            <a:endParaRPr lang="en-US" sz="750" dirty="0"/>
+            <a:endParaRPr lang="en-US" sz="1000" dirty="0"/>
           </a:p>
         </p:txBody>
       </p:sp>
@@ -12022,8 +12024,8 @@
         </p:nvSpPr>
         <p:spPr>
           <a:xfrm>
-            <a:off x="5534820" y="2750939"/>
-            <a:ext cx="207365" cy="228600"/>
+            <a:off x="5712416" y="2769989"/>
+            <a:ext cx="233172" cy="254050"/>
           </a:xfrm>
           <a:prstGeom prst="rect">
             <a:avLst/>
@@ -12037,12 +12039,12 @@
           <a:p>
             <a:pPr algn="ctr" indent="0" marL="0">
               <a:lnSpc>
-                <a:spcPts val="1800"/>
+                <a:spcPts val="2000"/>
               </a:lnSpc>
               <a:buNone/>
             </a:pPr>
             <a:r>
-              <a:rPr lang="en-US" sz="1600" dirty="0">
+              <a:rPr lang="en-US" sz="1800" dirty="0">
                 <a:solidFill>
                   <a:srgbClr val="818B98"/>
                 </a:solidFill>
@@ -12052,7 +12054,7 @@
               </a:rPr>
               <a:t>→</a:t>
             </a:r>
-            <a:endParaRPr lang="en-US" sz="1600" dirty="0"/>
+            <a:endParaRPr lang="en-US" sz="1800" dirty="0"/>
           </a:p>
         </p:txBody>
       </p:sp>
@@ -12064,12 +12066,12 @@
         </p:nvSpPr>
         <p:spPr>
           <a:xfrm>
-            <a:off x="5943302" y="2282726"/>
-            <a:ext cx="1650950" cy="1060252"/>
+            <a:off x="6133802" y="2181225"/>
+            <a:ext cx="1905000" cy="1288852"/>
           </a:xfrm>
           <a:prstGeom prst="roundRect">
             <a:avLst>
-              <a:gd name="adj" fmla="val 9583"/>
+              <a:gd name="adj" fmla="val 7883"/>
             </a:avLst>
           </a:prstGeom>
           <a:solidFill>
@@ -12100,12 +12102,12 @@
         </p:nvSpPr>
         <p:spPr>
           <a:xfrm>
-            <a:off x="6578203" y="2406551"/>
-            <a:ext cx="381000" cy="381000"/>
+            <a:off x="6857702" y="2330351"/>
+            <a:ext cx="457200" cy="457200"/>
           </a:xfrm>
           <a:prstGeom prst="roundRect">
             <a:avLst>
-              <a:gd name="adj" fmla="val 20000"/>
+              <a:gd name="adj" fmla="val 16667"/>
             </a:avLst>
           </a:prstGeom>
           <a:solidFill>
@@ -12140,8 +12142,8 @@
         </p:blipFill>
         <p:spPr>
           <a:xfrm>
-            <a:off x="6660803" y="2489150"/>
-            <a:ext cx="215801" cy="215801"/>
+            <a:off x="6959352" y="2432000"/>
+            <a:ext cx="253901" cy="253901"/>
           </a:xfrm>
           <a:prstGeom prst="rect">
             <a:avLst/>
@@ -12156,8 +12158,8 @@
         </p:nvSpPr>
         <p:spPr>
           <a:xfrm>
-            <a:off x="6375681" y="2850952"/>
-            <a:ext cx="786045" cy="165050"/>
+            <a:off x="6599768" y="2863751"/>
+            <a:ext cx="973068" cy="203150"/>
           </a:xfrm>
           <a:prstGeom prst="rect">
             <a:avLst/>
@@ -12171,12 +12173,12 @@
           <a:p>
             <a:pPr algn="ctr" indent="0" marL="0">
               <a:lnSpc>
-                <a:spcPts val="1300"/>
+                <a:spcPts val="1600"/>
               </a:lnSpc>
               <a:buNone/>
             </a:pPr>
             <a:r>
-              <a:rPr lang="en-US" sz="1050" b="1" dirty="0">
+              <a:rPr lang="en-US" sz="1300" b="1" dirty="0">
                 <a:solidFill>
                   <a:srgbClr val="1F2328"/>
                 </a:solidFill>
@@ -12186,7 +12188,7 @@
               </a:rPr>
               <a:t>PostgreSQL</a:t>
             </a:r>
-            <a:endParaRPr lang="en-US" sz="1050" dirty="0"/>
+            <a:endParaRPr lang="en-US" sz="1300" dirty="0"/>
           </a:p>
         </p:txBody>
       </p:sp>
@@ -12198,8 +12200,8 @@
         </p:nvSpPr>
         <p:spPr>
           <a:xfrm>
-            <a:off x="6401639" y="3079403"/>
-            <a:ext cx="734127" cy="139750"/>
+            <a:off x="6611305" y="3143101"/>
+            <a:ext cx="949994" cy="177850"/>
           </a:xfrm>
           <a:prstGeom prst="rect">
             <a:avLst/>
@@ -12213,12 +12215,12 @@
           <a:p>
             <a:pPr algn="ctr" indent="0" marL="0">
               <a:lnSpc>
-                <a:spcPts val="1100"/>
+                <a:spcPts val="1400"/>
               </a:lnSpc>
               <a:buNone/>
             </a:pPr>
             <a:r>
-              <a:rPr lang="en-US" sz="850" dirty="0">
+              <a:rPr lang="en-US" sz="1100" dirty="0">
                 <a:solidFill>
                   <a:srgbClr val="59636E"/>
                 </a:solidFill>
@@ -12228,7 +12230,7 @@
               </a:rPr>
               <a:t>Flexible Server</a:t>
             </a:r>
-            <a:endParaRPr lang="en-US" sz="850" dirty="0"/>
+            <a:endParaRPr lang="en-US" sz="1100" dirty="0"/>
           </a:p>
         </p:txBody>
       </p:sp>
@@ -12240,12 +12242,12 @@
         </p:nvSpPr>
         <p:spPr>
           <a:xfrm>
-            <a:off x="2292400" y="3784253"/>
-            <a:ext cx="330101" cy="330101"/>
+            <a:off x="1910804" y="3911352"/>
+            <a:ext cx="381000" cy="381000"/>
           </a:xfrm>
           <a:prstGeom prst="roundRect">
             <a:avLst>
-              <a:gd name="adj" fmla="val 23084"/>
+              <a:gd name="adj" fmla="val 20000"/>
             </a:avLst>
           </a:prstGeom>
           <a:solidFill>
@@ -12280,8 +12282,8 @@
         </p:blipFill>
         <p:spPr>
           <a:xfrm>
-            <a:off x="2362200" y="3854053"/>
-            <a:ext cx="190500" cy="190500"/>
+            <a:off x="1993404" y="3993952"/>
+            <a:ext cx="215801" cy="215801"/>
           </a:xfrm>
           <a:prstGeom prst="rect">
             <a:avLst/>
@@ -12296,8 +12298,8 @@
         </p:nvSpPr>
         <p:spPr>
           <a:xfrm>
-            <a:off x="2711351" y="3873103"/>
-            <a:ext cx="839328" cy="152400"/>
+            <a:off x="2393305" y="4001839"/>
+            <a:ext cx="992195" cy="200025"/>
           </a:xfrm>
           <a:prstGeom prst="rect">
             <a:avLst/>
@@ -12313,7 +12315,7 @@
               <a:buNone/>
             </a:pPr>
             <a:r>
-              <a:rPr lang="en-US" sz="1100" dirty="0">
+              <a:rPr lang="en-US" sz="1300" dirty="0">
                 <a:solidFill>
                   <a:srgbClr val="59636E"/>
                 </a:solidFill>
@@ -12323,7 +12325,7 @@
               </a:rPr>
               <a:t>Log Analytics</a:t>
             </a:r>
-            <a:endParaRPr lang="en-US" sz="1100" dirty="0"/>
+            <a:endParaRPr lang="en-US" sz="1300" dirty="0"/>
           </a:p>
         </p:txBody>
       </p:sp>
@@ -12335,12 +12337,12 @@
         </p:nvSpPr>
         <p:spPr>
           <a:xfrm>
-            <a:off x="3762821" y="3784253"/>
-            <a:ext cx="330101" cy="330101"/>
+            <a:off x="3594646" y="3911352"/>
+            <a:ext cx="381000" cy="381000"/>
           </a:xfrm>
           <a:prstGeom prst="roundRect">
             <a:avLst>
-              <a:gd name="adj" fmla="val 23084"/>
+              <a:gd name="adj" fmla="val 20000"/>
             </a:avLst>
           </a:prstGeom>
           <a:solidFill>
@@ -12375,8 +12377,8 @@
         </p:blipFill>
         <p:spPr>
           <a:xfrm>
-            <a:off x="3832622" y="3854053"/>
-            <a:ext cx="190500" cy="190500"/>
+            <a:off x="3677245" y="3993952"/>
+            <a:ext cx="215801" cy="215801"/>
           </a:xfrm>
           <a:prstGeom prst="rect">
             <a:avLst/>
@@ -12391,8 +12393,8 @@
         </p:nvSpPr>
         <p:spPr>
           <a:xfrm>
-            <a:off x="4181773" y="3873103"/>
-            <a:ext cx="2722769" cy="152400"/>
+            <a:off x="4077146" y="4001839"/>
+            <a:ext cx="3218715" cy="200025"/>
           </a:xfrm>
           <a:prstGeom prst="rect">
             <a:avLst/>
@@ -12408,7 +12410,7 @@
               <a:buNone/>
             </a:pPr>
             <a:r>
-              <a:rPr lang="en-US" sz="1100" dirty="0">
+              <a:rPr lang="en-US" sz="1300" dirty="0">
                 <a:solidFill>
                   <a:srgbClr val="59636E"/>
                 </a:solidFill>
@@ -12422,7 +12424,7 @@
               <a:buNone/>
             </a:pPr>
             <a:r>
-              <a:rPr lang="en-US" sz="1100" b="1" dirty="0">
+              <a:rPr lang="en-US" sz="1300" b="1" dirty="0">
                 <a:solidFill>
                   <a:srgbClr val="59636E"/>
                 </a:solidFill>
@@ -12432,7 +12434,7 @@
               </a:rPr>
               <a:t>WEBHOOK_URL</a:t>
             </a:r>
-            <a:endParaRPr lang="en-US" sz="1100" dirty="0"/>
+            <a:endParaRPr lang="en-US" sz="1300" dirty="0"/>
           </a:p>
         </p:txBody>
       </p:sp>
@@ -12476,12 +12478,12 @@
         </p:nvSpPr>
         <p:spPr>
           <a:xfrm>
-            <a:off x="8077200" y="152400"/>
-            <a:ext cx="482650" cy="266700"/>
+            <a:off x="8026598" y="152400"/>
+            <a:ext cx="533251" cy="279350"/>
           </a:xfrm>
           <a:prstGeom prst="roundRect">
             <a:avLst>
-              <a:gd name="adj" fmla="val 23810"/>
+              <a:gd name="adj" fmla="val 22731"/>
             </a:avLst>
           </a:prstGeom>
           <a:solidFill>
@@ -12508,8 +12510,8 @@
         </p:nvSpPr>
         <p:spPr>
           <a:xfrm>
-            <a:off x="8201863" y="219075"/>
-            <a:ext cx="233324" cy="133350"/>
+            <a:off x="8163659" y="220563"/>
+            <a:ext cx="259131" cy="142875"/>
           </a:xfrm>
           <a:prstGeom prst="rect">
             <a:avLst/>
@@ -12525,7 +12527,7 @@
               <a:buNone/>
             </a:pPr>
             <a:r>
-              <a:rPr lang="en-US" sz="900" b="1" dirty="0">
+              <a:rPr lang="en-US" sz="1000" b="1" dirty="0">
                 <a:solidFill>
                   <a:srgbClr val="FFFFFF"/>
                 </a:solidFill>
@@ -12535,7 +12537,7 @@
               </a:rPr>
               <a:t>N8N</a:t>
             </a:r>
-            <a:endParaRPr lang="en-US" sz="900" dirty="0"/>
+            <a:endParaRPr lang="en-US" sz="1000" dirty="0"/>
           </a:p>
         </p:txBody>
       </p:sp>
@@ -12644,7 +12646,7 @@
         <p:spPr>
           <a:xfrm>
             <a:off x="558701" y="1828651"/>
-            <a:ext cx="3886200" cy="142875"/>
+            <a:ext cx="3886200" cy="152400"/>
           </a:xfrm>
           <a:prstGeom prst="rect">
             <a:avLst/>
@@ -12663,7 +12665,7 @@
               <a:buNone/>
             </a:pPr>
             <a:r>
-              <a:rPr lang="en-US" sz="1000" b="1" dirty="0">
+              <a:rPr lang="en-US" sz="1100" b="1" dirty="0">
                 <a:solidFill>
                   <a:srgbClr val="59636E"/>
                 </a:solidFill>
@@ -12673,7 +12675,7 @@
               </a:rPr>
               <a:t>SECTION 1 OF 3</a:t>
             </a:r>
-            <a:endParaRPr lang="en-US" sz="1000" dirty="0"/>
+            <a:endParaRPr lang="en-US" sz="1100" dirty="0"/>
           </a:p>
         </p:txBody>
       </p:sp>
@@ -12685,8 +12687,8 @@
         </p:nvSpPr>
         <p:spPr>
           <a:xfrm>
-            <a:off x="558701" y="2034927"/>
-            <a:ext cx="3886200" cy="444550"/>
+            <a:off x="558701" y="2044452"/>
+            <a:ext cx="3886200" cy="469850"/>
           </a:xfrm>
           <a:prstGeom prst="rect">
             <a:avLst/>
@@ -12700,7 +12702,7 @@
           <a:p>
             <a:pPr algn="l" indent="0" marL="0">
               <a:lnSpc>
-                <a:spcPts val="3500"/>
+                <a:spcPts val="3700"/>
               </a:lnSpc>
               <a:spcBef>
                 <a:spcPts val="500"/>
@@ -12708,7 +12710,7 @@
               <a:buNone/>
             </a:pPr>
             <a:r>
-              <a:rPr lang="en-US" sz="3000" b="1" dirty="0">
+              <a:rPr lang="en-US" sz="3200" b="1" dirty="0">
                 <a:solidFill>
                   <a:srgbClr val="1F2328"/>
                 </a:solidFill>
@@ -12718,7 +12720,7 @@
               </a:rPr>
               <a:t>Plan and generate</a:t>
             </a:r>
-            <a:endParaRPr lang="en-US" sz="3000" dirty="0"/>
+            <a:endParaRPr lang="en-US" sz="3200" dirty="0"/>
           </a:p>
         </p:txBody>
       </p:sp>
@@ -12730,8 +12732,8 @@
         </p:nvSpPr>
         <p:spPr>
           <a:xfrm>
-            <a:off x="558701" y="2606427"/>
-            <a:ext cx="3886200" cy="482501"/>
+            <a:off x="558701" y="2666702"/>
+            <a:ext cx="3886200" cy="800100"/>
           </a:xfrm>
           <a:prstGeom prst="rect">
             <a:avLst/>
@@ -12745,15 +12747,15 @@
           <a:p>
             <a:pPr algn="l" indent="0" marL="0">
               <a:lnSpc>
-                <a:spcPts val="1900"/>
+                <a:spcPts val="2100"/>
               </a:lnSpc>
               <a:spcBef>
-                <a:spcPts val="1000"/>
+                <a:spcPts val="1200"/>
               </a:spcBef>
               <a:buNone/>
             </a:pPr>
             <a:r>
-              <a:rPr lang="en-US" sz="1400" dirty="0">
+              <a:rPr lang="en-US" sz="1600" dirty="0">
                 <a:solidFill>
                   <a:srgbClr val="59636E"/>
                 </a:solidFill>
@@ -12763,7 +12765,7 @@
               </a:rPr>
               <a:t>Plan with a cost estimate, then generate and preview the infrastructure without deploying.</a:t>
             </a:r>
-            <a:endParaRPr lang="en-US" sz="1400" dirty="0"/>
+            <a:endParaRPr lang="en-US" sz="1600" dirty="0"/>
           </a:p>
         </p:txBody>
       </p:sp>
@@ -12832,11 +12834,11 @@
         <p:spPr>
           <a:xfrm>
             <a:off x="558701" y="4368701"/>
-            <a:ext cx="1473547" cy="336352"/>
+            <a:ext cx="1620589" cy="361652"/>
           </a:xfrm>
           <a:prstGeom prst="roundRect">
             <a:avLst>
-              <a:gd name="adj" fmla="val 52861"/>
+              <a:gd name="adj" fmla="val 52675"/>
             </a:avLst>
           </a:prstGeom>
           <a:solidFill>
@@ -12868,11 +12870,11 @@
         <p:spPr>
           <a:xfrm>
             <a:off x="644426" y="4441627"/>
-            <a:ext cx="190500" cy="190500"/>
+            <a:ext cx="215801" cy="215801"/>
           </a:xfrm>
           <a:prstGeom prst="roundRect">
             <a:avLst>
-              <a:gd name="adj" fmla="val 480000"/>
+              <a:gd name="adj" fmla="val 423724"/>
             </a:avLst>
           </a:prstGeom>
           <a:solidFill>
@@ -12899,8 +12901,8 @@
         </p:nvSpPr>
         <p:spPr>
           <a:xfrm>
-            <a:off x="710833" y="4479727"/>
-            <a:ext cx="57686" cy="114300"/>
+            <a:off x="719840" y="4482852"/>
+            <a:ext cx="64972" cy="133350"/>
           </a:xfrm>
           <a:prstGeom prst="rect">
             <a:avLst/>
@@ -12916,7 +12918,7 @@
               <a:buNone/>
             </a:pPr>
             <a:r>
-              <a:rPr lang="en-US" sz="800" b="1" dirty="0">
+              <a:rPr lang="en-US" sz="900" b="1" dirty="0">
                 <a:solidFill>
                   <a:srgbClr val="0969DA"/>
                 </a:solidFill>
@@ -12926,7 +12928,7 @@
               </a:rPr>
               <a:t>1</a:t>
             </a:r>
-            <a:endParaRPr lang="en-US" sz="800" dirty="0"/>
+            <a:endParaRPr lang="en-US" sz="900" dirty="0"/>
           </a:p>
         </p:txBody>
       </p:sp>
@@ -12938,8 +12940,8 @@
         </p:nvSpPr>
         <p:spPr>
           <a:xfrm>
-            <a:off x="911126" y="4470202"/>
-            <a:ext cx="1004340" cy="133350"/>
+            <a:off x="936427" y="4478089"/>
+            <a:ext cx="1115613" cy="142875"/>
           </a:xfrm>
           <a:prstGeom prst="rect">
             <a:avLst/>
@@ -12955,7 +12957,7 @@
               <a:buNone/>
             </a:pPr>
             <a:r>
-              <a:rPr lang="en-US" sz="900" b="1" dirty="0">
+              <a:rPr lang="en-US" sz="1000" b="1" dirty="0">
                 <a:solidFill>
                   <a:srgbClr val="FFFFFF"/>
                 </a:solidFill>
@@ -12965,7 +12967,7 @@
               </a:rPr>
               <a:t>Plan and generate</a:t>
             </a:r>
-            <a:endParaRPr lang="en-US" sz="900" dirty="0"/>
+            <a:endParaRPr lang="en-US" sz="1000" dirty="0"/>
           </a:p>
         </p:txBody>
       </p:sp>
@@ -12977,12 +12979,12 @@
         </p:nvSpPr>
         <p:spPr>
           <a:xfrm>
-            <a:off x="2133749" y="4368701"/>
-            <a:ext cx="1435447" cy="336352"/>
+            <a:off x="2280791" y="4368701"/>
+            <a:ext cx="1578322" cy="361652"/>
           </a:xfrm>
           <a:prstGeom prst="roundRect">
             <a:avLst>
-              <a:gd name="adj" fmla="val 52861"/>
+              <a:gd name="adj" fmla="val 52675"/>
             </a:avLst>
           </a:prstGeom>
           <a:solidFill>
@@ -13013,12 +13015,12 @@
         </p:nvSpPr>
         <p:spPr>
           <a:xfrm>
-            <a:off x="2219474" y="4441627"/>
-            <a:ext cx="190500" cy="190500"/>
+            <a:off x="2366516" y="4441627"/>
+            <a:ext cx="215801" cy="215801"/>
           </a:xfrm>
           <a:prstGeom prst="roundRect">
             <a:avLst>
-              <a:gd name="adj" fmla="val 480000"/>
+              <a:gd name="adj" fmla="val 423724"/>
             </a:avLst>
           </a:prstGeom>
           <a:solidFill>
@@ -13045,8 +13047,8 @@
         </p:nvSpPr>
         <p:spPr>
           <a:xfrm>
-            <a:off x="2285881" y="4479727"/>
-            <a:ext cx="57686" cy="114300"/>
+            <a:off x="2441930" y="4482852"/>
+            <a:ext cx="64972" cy="133350"/>
           </a:xfrm>
           <a:prstGeom prst="rect">
             <a:avLst/>
@@ -13062,7 +13064,7 @@
               <a:buNone/>
             </a:pPr>
             <a:r>
-              <a:rPr lang="en-US" sz="800" b="1" dirty="0">
+              <a:rPr lang="en-US" sz="900" b="1" dirty="0">
                 <a:solidFill>
                   <a:srgbClr val="818B98"/>
                 </a:solidFill>
@@ -13072,7 +13074,7 @@
               </a:rPr>
               <a:t>2</a:t>
             </a:r>
-            <a:endParaRPr lang="en-US" sz="800" dirty="0"/>
+            <a:endParaRPr lang="en-US" sz="900" dirty="0"/>
           </a:p>
         </p:txBody>
       </p:sp>
@@ -13084,8 +13086,8 @@
         </p:nvSpPr>
         <p:spPr>
           <a:xfrm>
-            <a:off x="2486174" y="4470202"/>
-            <a:ext cx="965478" cy="133350"/>
+            <a:off x="2658517" y="4478089"/>
+            <a:ext cx="1072500" cy="142875"/>
           </a:xfrm>
           <a:prstGeom prst="rect">
             <a:avLst/>
@@ -13101,7 +13103,7 @@
               <a:buNone/>
             </a:pPr>
             <a:r>
-              <a:rPr lang="en-US" sz="900" b="1" dirty="0">
+              <a:rPr lang="en-US" sz="1000" b="1" dirty="0">
                 <a:solidFill>
                   <a:srgbClr val="818B98"/>
                 </a:solidFill>
@@ -13111,7 +13113,7 @@
               </a:rPr>
               <a:t>Deploy in parallel</a:t>
             </a:r>
-            <a:endParaRPr lang="en-US" sz="900" dirty="0"/>
+            <a:endParaRPr lang="en-US" sz="1000" dirty="0"/>
           </a:p>
         </p:txBody>
       </p:sp>
@@ -13123,12 +13125,12 @@
         </p:nvSpPr>
         <p:spPr>
           <a:xfrm>
-            <a:off x="3670697" y="4368701"/>
-            <a:ext cx="1359098" cy="336352"/>
+            <a:off x="3960614" y="4368701"/>
+            <a:ext cx="1493490" cy="361652"/>
           </a:xfrm>
           <a:prstGeom prst="roundRect">
             <a:avLst>
-              <a:gd name="adj" fmla="val 52861"/>
+              <a:gd name="adj" fmla="val 52675"/>
             </a:avLst>
           </a:prstGeom>
           <a:solidFill>
@@ -13159,12 +13161,12 @@
         </p:nvSpPr>
         <p:spPr>
           <a:xfrm>
-            <a:off x="3756422" y="4441627"/>
-            <a:ext cx="190500" cy="190500"/>
+            <a:off x="4046339" y="4441627"/>
+            <a:ext cx="215801" cy="215801"/>
           </a:xfrm>
           <a:prstGeom prst="roundRect">
             <a:avLst>
-              <a:gd name="adj" fmla="val 480000"/>
+              <a:gd name="adj" fmla="val 423724"/>
             </a:avLst>
           </a:prstGeom>
           <a:solidFill>
@@ -13191,8 +13193,8 @@
         </p:nvSpPr>
         <p:spPr>
           <a:xfrm>
-            <a:off x="3822829" y="4479727"/>
-            <a:ext cx="57686" cy="114300"/>
+            <a:off x="4121753" y="4482852"/>
+            <a:ext cx="64972" cy="133350"/>
           </a:xfrm>
           <a:prstGeom prst="rect">
             <a:avLst/>
@@ -13208,7 +13210,7 @@
               <a:buNone/>
             </a:pPr>
             <a:r>
-              <a:rPr lang="en-US" sz="800" b="1" dirty="0">
+              <a:rPr lang="en-US" sz="900" b="1" dirty="0">
                 <a:solidFill>
                   <a:srgbClr val="818B98"/>
                 </a:solidFill>
@@ -13218,7 +13220,7 @@
               </a:rPr>
               <a:t>3</a:t>
             </a:r>
-            <a:endParaRPr lang="en-US" sz="800" dirty="0"/>
+            <a:endParaRPr lang="en-US" sz="900" dirty="0"/>
           </a:p>
         </p:txBody>
       </p:sp>
@@ -13230,8 +13232,8 @@
         </p:nvSpPr>
         <p:spPr>
           <a:xfrm>
-            <a:off x="4023122" y="4470202"/>
-            <a:ext cx="887602" cy="133350"/>
+            <a:off x="4338340" y="4478089"/>
+            <a:ext cx="985971" cy="142875"/>
           </a:xfrm>
           <a:prstGeom prst="rect">
             <a:avLst/>
@@ -13247,7 +13249,7 @@
               <a:buNone/>
             </a:pPr>
             <a:r>
-              <a:rPr lang="en-US" sz="900" b="1" dirty="0">
+              <a:rPr lang="en-US" sz="1000" b="1" dirty="0">
                 <a:solidFill>
                   <a:srgbClr val="818B98"/>
                 </a:solidFill>
@@ -13257,7 +13259,7 @@
               </a:rPr>
               <a:t>Operate the app</a:t>
             </a:r>
-            <a:endParaRPr lang="en-US" sz="900" dirty="0"/>
+            <a:endParaRPr lang="en-US" sz="1000" dirty="0"/>
           </a:p>
         </p:txBody>
       </p:sp>
@@ -13301,12 +13303,12 @@
         </p:nvSpPr>
         <p:spPr>
           <a:xfrm>
-            <a:off x="8077200" y="152400"/>
-            <a:ext cx="482650" cy="266700"/>
+            <a:off x="8026598" y="152400"/>
+            <a:ext cx="533251" cy="279350"/>
           </a:xfrm>
           <a:prstGeom prst="roundRect">
             <a:avLst>
-              <a:gd name="adj" fmla="val 23810"/>
+              <a:gd name="adj" fmla="val 22731"/>
             </a:avLst>
           </a:prstGeom>
           <a:solidFill>
@@ -13333,8 +13335,8 @@
         </p:nvSpPr>
         <p:spPr>
           <a:xfrm>
-            <a:off x="8201863" y="219075"/>
-            <a:ext cx="233324" cy="133350"/>
+            <a:off x="8163659" y="220563"/>
+            <a:ext cx="259131" cy="142875"/>
           </a:xfrm>
           <a:prstGeom prst="rect">
             <a:avLst/>
@@ -13350,7 +13352,7 @@
               <a:buNone/>
             </a:pPr>
             <a:r>
-              <a:rPr lang="en-US" sz="900" b="1" dirty="0">
+              <a:rPr lang="en-US" sz="1000" b="1" dirty="0">
                 <a:solidFill>
                   <a:srgbClr val="FFFFFF"/>
                 </a:solidFill>
@@ -13360,7 +13362,7 @@
               </a:rPr>
               <a:t>N8N</a:t>
             </a:r>
-            <a:endParaRPr lang="en-US" sz="900" dirty="0"/>
+            <a:endParaRPr lang="en-US" sz="1000" dirty="0"/>
           </a:p>
         </p:txBody>
       </p:sp>
@@ -13397,7 +13399,7 @@
         <p:spPr>
           <a:xfrm>
             <a:off x="482501" y="330101"/>
-            <a:ext cx="7772400" cy="142875"/>
+            <a:ext cx="8342275" cy="152400"/>
           </a:xfrm>
           <a:prstGeom prst="rect">
             <a:avLst/>
@@ -13413,7 +13415,7 @@
               <a:buNone/>
             </a:pPr>
             <a:r>
-              <a:rPr lang="en-US" sz="1000" b="1" dirty="0">
+              <a:rPr lang="en-US" sz="1100" b="1" dirty="0">
                 <a:solidFill>
                   <a:srgbClr val="0969DA"/>
                 </a:solidFill>
@@ -13423,7 +13425,7 @@
               </a:rPr>
               <a:t>GET STARTED</a:t>
             </a:r>
-            <a:endParaRPr lang="en-US" sz="1000" dirty="0"/>
+            <a:endParaRPr lang="en-US" sz="1100" dirty="0"/>
           </a:p>
         </p:txBody>
       </p:sp>
@@ -13435,8 +13437,8 @@
         </p:nvSpPr>
         <p:spPr>
           <a:xfrm>
-            <a:off x="482501" y="523726"/>
-            <a:ext cx="7772400" cy="393650"/>
+            <a:off x="482501" y="533251"/>
+            <a:ext cx="8342275" cy="419100"/>
           </a:xfrm>
           <a:prstGeom prst="rect">
             <a:avLst/>
@@ -13450,7 +13452,7 @@
           <a:p>
             <a:pPr algn="l" indent="0" marL="0">
               <a:lnSpc>
-                <a:spcPts val="3100"/>
+                <a:spcPts val="3300"/>
               </a:lnSpc>
               <a:spcBef>
                 <a:spcPts val="400"/>
@@ -13458,7 +13460,7 @@
               <a:buNone/>
             </a:pPr>
             <a:r>
-              <a:rPr lang="en-US" sz="2600" b="1" dirty="0">
+              <a:rPr lang="en-US" sz="2800" b="1" dirty="0">
                 <a:solidFill>
                   <a:srgbClr val="1F2328"/>
                 </a:solidFill>
@@ -13468,7 +13470,7 @@
               </a:rPr>
               <a:t>Load the Azure skills and the deploy agent</a:t>
             </a:r>
-            <a:endParaRPr lang="en-US" sz="2600" dirty="0"/>
+            <a:endParaRPr lang="en-US" sz="2800" dirty="0"/>
           </a:p>
         </p:txBody>
       </p:sp>
@@ -13480,7 +13482,7 @@
         </p:nvSpPr>
         <p:spPr>
           <a:xfrm>
-            <a:off x="1269802" y="1847701"/>
+            <a:off x="1269802" y="1835200"/>
             <a:ext cx="6603950" cy="1879402"/>
           </a:xfrm>
           <a:prstGeom prst="roundRect">
@@ -13519,7 +13521,7 @@
         </p:nvSpPr>
         <p:spPr>
           <a:xfrm>
-            <a:off x="1269802" y="1847701"/>
+            <a:off x="1269802" y="1835200"/>
             <a:ext cx="6603950" cy="253901"/>
           </a:xfrm>
           <a:prstGeom prst="roundRect">
@@ -13551,7 +13553,7 @@
         </p:nvSpPr>
         <p:spPr>
           <a:xfrm>
-            <a:off x="1396752" y="1930152"/>
+            <a:off x="1396752" y="1917650"/>
             <a:ext cx="88850" cy="88850"/>
           </a:xfrm>
           <a:prstGeom prst="roundRect">
@@ -13583,7 +13585,7 @@
         </p:nvSpPr>
         <p:spPr>
           <a:xfrm>
-            <a:off x="1549003" y="1930152"/>
+            <a:off x="1549003" y="1917650"/>
             <a:ext cx="88850" cy="88850"/>
           </a:xfrm>
           <a:prstGeom prst="roundRect">
@@ -13615,7 +13617,7 @@
         </p:nvSpPr>
         <p:spPr>
           <a:xfrm>
-            <a:off x="1701254" y="1930152"/>
+            <a:off x="1701254" y="1917650"/>
             <a:ext cx="88850" cy="88850"/>
           </a:xfrm>
           <a:prstGeom prst="roundRect">
@@ -13647,8 +13649,8 @@
         </p:nvSpPr>
         <p:spPr>
           <a:xfrm>
-            <a:off x="1955006" y="1917502"/>
-            <a:ext cx="462397" cy="114300"/>
+            <a:off x="1955006" y="1890713"/>
+            <a:ext cx="544068" cy="142875"/>
           </a:xfrm>
           <a:prstGeom prst="rect">
             <a:avLst/>
@@ -13664,7 +13666,7 @@
               <a:buNone/>
             </a:pPr>
             <a:r>
-              <a:rPr lang="en-US" sz="850" dirty="0">
+              <a:rPr lang="en-US" sz="1000" dirty="0">
                 <a:solidFill>
                   <a:srgbClr val="8B949E"/>
                 </a:solidFill>
@@ -13674,7 +13676,7 @@
               </a:rPr>
               <a:t>copilot</a:t>
             </a:r>
-            <a:endParaRPr lang="en-US" sz="850" dirty="0"/>
+            <a:endParaRPr lang="en-US" sz="1000" dirty="0"/>
           </a:p>
         </p:txBody>
       </p:sp>
@@ -13686,7 +13688,7 @@
         </p:nvSpPr>
         <p:spPr>
           <a:xfrm>
-            <a:off x="1498402" y="2279303"/>
+            <a:off x="1498402" y="2266801"/>
             <a:ext cx="6269685" cy="275630"/>
           </a:xfrm>
           <a:prstGeom prst="rect">
@@ -13745,7 +13747,7 @@
         </p:nvSpPr>
         <p:spPr>
           <a:xfrm>
-            <a:off x="1498402" y="2554932"/>
+            <a:off x="1498402" y="2542431"/>
             <a:ext cx="6269685" cy="275630"/>
           </a:xfrm>
           <a:prstGeom prst="rect">
@@ -13804,7 +13806,7 @@
         </p:nvSpPr>
         <p:spPr>
           <a:xfrm>
-            <a:off x="1498402" y="2972693"/>
+            <a:off x="1498402" y="2960191"/>
             <a:ext cx="6269685" cy="275630"/>
           </a:xfrm>
           <a:prstGeom prst="rect">
@@ -13863,7 +13865,7 @@
         </p:nvSpPr>
         <p:spPr>
           <a:xfrm>
-            <a:off x="1498402" y="3248323"/>
+            <a:off x="1498402" y="3235821"/>
             <a:ext cx="6269685" cy="275630"/>
           </a:xfrm>
           <a:prstGeom prst="rect">
@@ -13913,8 +13915,8 @@
         </p:blipFill>
         <p:spPr>
           <a:xfrm>
-            <a:off x="1269802" y="3968353"/>
-            <a:ext cx="190500" cy="190500"/>
+            <a:off x="1269802" y="4006602"/>
+            <a:ext cx="215801" cy="215801"/>
           </a:xfrm>
           <a:prstGeom prst="rect">
             <a:avLst/>
@@ -13929,8 +13931,8 @@
         </p:nvSpPr>
         <p:spPr>
           <a:xfrm>
-            <a:off x="1561802" y="3955703"/>
-            <a:ext cx="5011225" cy="215950"/>
+            <a:off x="1587103" y="3993952"/>
+            <a:ext cx="5612827" cy="241250"/>
           </a:xfrm>
           <a:prstGeom prst="rect">
             <a:avLst/>
@@ -13944,12 +13946,12 @@
           <a:p>
             <a:pPr algn="l" indent="0" marL="0">
               <a:lnSpc>
-                <a:spcPts val="1700"/>
+                <a:spcPts val="1900"/>
               </a:lnSpc>
               <a:buNone/>
             </a:pPr>
             <a:r>
-              <a:rPr lang="en-US" sz="1250" dirty="0">
+              <a:rPr lang="en-US" sz="1400" dirty="0">
                 <a:solidFill>
                   <a:srgbClr val="1F2328"/>
                 </a:solidFill>
@@ -13959,7 +13961,7 @@
               </a:rPr>
               <a:t>The agent brings the workflow. Skills bring the app-specific know-how.</a:t>
             </a:r>
-            <a:endParaRPr lang="en-US" sz="1250" dirty="0"/>
+            <a:endParaRPr lang="en-US" sz="1400" dirty="0"/>
           </a:p>
         </p:txBody>
       </p:sp>
@@ -14003,12 +14005,12 @@
         </p:nvSpPr>
         <p:spPr>
           <a:xfrm>
-            <a:off x="8077200" y="152400"/>
-            <a:ext cx="482650" cy="266700"/>
+            <a:off x="8026598" y="152400"/>
+            <a:ext cx="533251" cy="279350"/>
           </a:xfrm>
           <a:prstGeom prst="roundRect">
             <a:avLst>
-              <a:gd name="adj" fmla="val 23810"/>
+              <a:gd name="adj" fmla="val 22731"/>
             </a:avLst>
           </a:prstGeom>
           <a:solidFill>
@@ -14035,8 +14037,8 @@
         </p:nvSpPr>
         <p:spPr>
           <a:xfrm>
-            <a:off x="8201863" y="219075"/>
-            <a:ext cx="233324" cy="133350"/>
+            <a:off x="8163659" y="220563"/>
+            <a:ext cx="259131" cy="142875"/>
           </a:xfrm>
           <a:prstGeom prst="rect">
             <a:avLst/>
@@ -14052,7 +14054,7 @@
               <a:buNone/>
             </a:pPr>
             <a:r>
-              <a:rPr lang="en-US" sz="900" b="1" dirty="0">
+              <a:rPr lang="en-US" sz="1000" b="1" dirty="0">
                 <a:solidFill>
                   <a:srgbClr val="FFFFFF"/>
                 </a:solidFill>
@@ -14062,7 +14064,7 @@
               </a:rPr>
               <a:t>N8N</a:t>
             </a:r>
-            <a:endParaRPr lang="en-US" sz="900" dirty="0"/>
+            <a:endParaRPr lang="en-US" sz="1000" dirty="0"/>
           </a:p>
         </p:txBody>
       </p:sp>
@@ -14099,7 +14101,7 @@
         <p:spPr>
           <a:xfrm>
             <a:off x="482501" y="330101"/>
-            <a:ext cx="7772400" cy="142875"/>
+            <a:ext cx="8342275" cy="152400"/>
           </a:xfrm>
           <a:prstGeom prst="rect">
             <a:avLst/>
@@ -14115,7 +14117,7 @@
               <a:buNone/>
             </a:pPr>
             <a:r>
-              <a:rPr lang="en-US" sz="1000" b="1" dirty="0">
+              <a:rPr lang="en-US" sz="1100" b="1" dirty="0">
                 <a:solidFill>
                   <a:srgbClr val="0969DA"/>
                 </a:solidFill>
@@ -14125,7 +14127,7 @@
               </a:rPr>
               <a:t>PLAN AND COST FIRST</a:t>
             </a:r>
-            <a:endParaRPr lang="en-US" sz="1000" dirty="0"/>
+            <a:endParaRPr lang="en-US" sz="1100" dirty="0"/>
           </a:p>
         </p:txBody>
       </p:sp>
@@ -14137,8 +14139,8 @@
         </p:nvSpPr>
         <p:spPr>
           <a:xfrm>
-            <a:off x="482501" y="523726"/>
-            <a:ext cx="7772400" cy="393650"/>
+            <a:off x="482501" y="533251"/>
+            <a:ext cx="8342275" cy="419100"/>
           </a:xfrm>
           <a:prstGeom prst="rect">
             <a:avLst/>
@@ -14152,7 +14154,7 @@
           <a:p>
             <a:pPr algn="l" indent="0" marL="0">
               <a:lnSpc>
-                <a:spcPts val="3100"/>
+                <a:spcPts val="3300"/>
               </a:lnSpc>
               <a:spcBef>
                 <a:spcPts val="400"/>
@@ -14160,7 +14162,7 @@
               <a:buNone/>
             </a:pPr>
             <a:r>
-              <a:rPr lang="en-US" sz="2600" b="1" dirty="0">
+              <a:rPr lang="en-US" sz="2800" b="1" dirty="0">
                 <a:solidFill>
                   <a:srgbClr val="1F2328"/>
                 </a:solidFill>
@@ -14170,7 +14172,7 @@
               </a:rPr>
               <a:t>Describe it. Ask what it costs.</a:t>
             </a:r>
-            <a:endParaRPr lang="en-US" sz="2600" dirty="0"/>
+            <a:endParaRPr lang="en-US" sz="2800" dirty="0"/>
           </a:p>
         </p:txBody>
       </p:sp>
@@ -14182,12 +14184,12 @@
         </p:nvSpPr>
         <p:spPr>
           <a:xfrm>
-            <a:off x="634901" y="2129135"/>
-            <a:ext cx="7873901" cy="1812280"/>
+            <a:off x="634901" y="1846064"/>
+            <a:ext cx="7873901" cy="2429173"/>
           </a:xfrm>
           <a:prstGeom prst="roundRect">
             <a:avLst>
-              <a:gd name="adj" fmla="val 5606"/>
+              <a:gd name="adj" fmla="val 4183"/>
             </a:avLst>
           </a:prstGeom>
           <a:solidFill>
@@ -14221,7 +14223,7 @@
         </p:nvSpPr>
         <p:spPr>
           <a:xfrm>
-            <a:off x="634901" y="2133898"/>
+            <a:off x="634901" y="1850827"/>
             <a:ext cx="7873901" cy="0"/>
           </a:xfrm>
           <a:prstGeom prst="line">
@@ -14244,8 +14246,8 @@
         </p:nvSpPr>
         <p:spPr>
           <a:xfrm>
-            <a:off x="8504039" y="2129135"/>
-            <a:ext cx="0" cy="1812280"/>
+            <a:off x="8504039" y="1846064"/>
+            <a:ext cx="0" cy="2429173"/>
           </a:xfrm>
           <a:prstGeom prst="line">
             <a:avLst/>
@@ -14267,7 +14269,7 @@
         </p:nvSpPr>
         <p:spPr>
           <a:xfrm>
-            <a:off x="634901" y="3936653"/>
+            <a:off x="634901" y="4270474"/>
             <a:ext cx="7873901" cy="0"/>
           </a:xfrm>
           <a:prstGeom prst="line">
@@ -14290,8 +14292,8 @@
         </p:nvSpPr>
         <p:spPr>
           <a:xfrm>
-            <a:off x="663476" y="2129135"/>
-            <a:ext cx="0" cy="1812280"/>
+            <a:off x="663476" y="1846064"/>
+            <a:ext cx="0" cy="2429173"/>
           </a:xfrm>
           <a:prstGeom prst="line">
             <a:avLst/>
@@ -14321,8 +14323,8 @@
         </p:blipFill>
         <p:spPr>
           <a:xfrm>
-            <a:off x="945952" y="2341811"/>
-            <a:ext cx="165050" cy="165050"/>
+            <a:off x="971401" y="2084189"/>
+            <a:ext cx="190500" cy="190500"/>
           </a:xfrm>
           <a:prstGeom prst="rect">
             <a:avLst/>
@@ -14337,8 +14339,8 @@
         </p:nvSpPr>
         <p:spPr>
           <a:xfrm>
-            <a:off x="1187202" y="2357586"/>
-            <a:ext cx="498830" cy="133350"/>
+            <a:off x="1238101" y="2103239"/>
+            <a:ext cx="581867" cy="152400"/>
           </a:xfrm>
           <a:prstGeom prst="rect">
             <a:avLst/>
@@ -14354,7 +14356,7 @@
               <a:buNone/>
             </a:pPr>
             <a:r>
-              <a:rPr lang="en-US" sz="900" b="1" dirty="0">
+              <a:rPr lang="en-US" sz="1050" b="1" dirty="0">
                 <a:solidFill>
                   <a:srgbClr val="8250DF"/>
                 </a:solidFill>
@@ -14364,7 +14366,7 @@
               </a:rPr>
               <a:t>PROMPT</a:t>
             </a:r>
-            <a:endParaRPr lang="en-US" sz="900" dirty="0"/>
+            <a:endParaRPr lang="en-US" sz="1050" dirty="0"/>
           </a:p>
         </p:txBody>
       </p:sp>
@@ -14376,8 +14378,8 @@
         </p:nvSpPr>
         <p:spPr>
           <a:xfrm>
-            <a:off x="945952" y="2621012"/>
-            <a:ext cx="7445413" cy="1082278"/>
+            <a:off x="971401" y="2388840"/>
+            <a:ext cx="7393496" cy="1622971"/>
           </a:xfrm>
           <a:prstGeom prst="rect">
             <a:avLst/>
@@ -14391,12 +14393,12 @@
           <a:p>
             <a:pPr algn="l" indent="0" marL="0">
               <a:lnSpc>
-                <a:spcPts val="2130"/>
+                <a:spcPts val="2556"/>
               </a:lnSpc>
               <a:buNone/>
             </a:pPr>
             <a:r>
-              <a:rPr lang="en-US" sz="1500" dirty="0">
+              <a:rPr lang="en-US" sz="1800" dirty="0">
                 <a:solidFill>
                   <a:srgbClr val="1F2328"/>
                 </a:solidFill>
@@ -14408,12 +14410,12 @@
             </a:r>
             <a:pPr algn="l" indent="0" marL="0">
               <a:lnSpc>
-                <a:spcPts val="2130"/>
+                <a:spcPts val="2556"/>
               </a:lnSpc>
               <a:buNone/>
             </a:pPr>
             <a:r>
-              <a:rPr lang="en-US" sz="1500" b="1" dirty="0">
+              <a:rPr lang="en-US" sz="1800" b="1" dirty="0">
                 <a:solidFill>
                   <a:srgbClr val="1F2328"/>
                 </a:solidFill>
@@ -14425,12 +14427,12 @@
             </a:r>
             <a:pPr algn="l" indent="0" marL="0">
               <a:lnSpc>
-                <a:spcPts val="2130"/>
+                <a:spcPts val="2556"/>
               </a:lnSpc>
               <a:buNone/>
             </a:pPr>
             <a:r>
-              <a:rPr lang="en-US" sz="1500" dirty="0">
+              <a:rPr lang="en-US" sz="1800" dirty="0">
                 <a:solidFill>
                   <a:srgbClr val="1F2328"/>
                 </a:solidFill>
@@ -14442,12 +14444,12 @@
             </a:r>
             <a:pPr algn="l" indent="0" marL="0">
               <a:lnSpc>
-                <a:spcPts val="2130"/>
+                <a:spcPts val="2556"/>
               </a:lnSpc>
               <a:buNone/>
             </a:pPr>
             <a:r>
-              <a:rPr lang="en-US" sz="1500" b="1" dirty="0">
+              <a:rPr lang="en-US" sz="1800" b="1" dirty="0">
                 <a:solidFill>
                   <a:srgbClr val="1F2328"/>
                 </a:solidFill>
@@ -14457,7 +14459,7 @@
               </a:rPr>
               <a:t>Don't create files or Azure resources yet.</a:t>
             </a:r>
-            <a:endParaRPr lang="en-US" sz="1500" dirty="0"/>
+            <a:endParaRPr lang="en-US" sz="1800" dirty="0"/>
           </a:p>
         </p:txBody>
       </p:sp>
@@ -14501,12 +14503,12 @@
         </p:nvSpPr>
         <p:spPr>
           <a:xfrm>
-            <a:off x="8077200" y="152400"/>
-            <a:ext cx="482650" cy="266700"/>
+            <a:off x="8026598" y="152400"/>
+            <a:ext cx="533251" cy="279350"/>
           </a:xfrm>
           <a:prstGeom prst="roundRect">
             <a:avLst>
-              <a:gd name="adj" fmla="val 23810"/>
+              <a:gd name="adj" fmla="val 22731"/>
             </a:avLst>
           </a:prstGeom>
           <a:solidFill>
@@ -14533,8 +14535,8 @@
         </p:nvSpPr>
         <p:spPr>
           <a:xfrm>
-            <a:off x="8201863" y="219075"/>
-            <a:ext cx="233324" cy="133350"/>
+            <a:off x="8163659" y="220563"/>
+            <a:ext cx="259131" cy="142875"/>
           </a:xfrm>
           <a:prstGeom prst="rect">
             <a:avLst/>
@@ -14550,7 +14552,7 @@
               <a:buNone/>
             </a:pPr>
             <a:r>
-              <a:rPr lang="en-US" sz="900" b="1" dirty="0">
+              <a:rPr lang="en-US" sz="1000" b="1" dirty="0">
                 <a:solidFill>
                   <a:srgbClr val="FFFFFF"/>
                 </a:solidFill>
@@ -14560,7 +14562,7 @@
               </a:rPr>
               <a:t>N8N</a:t>
             </a:r>
-            <a:endParaRPr lang="en-US" sz="900" dirty="0"/>
+            <a:endParaRPr lang="en-US" sz="1000" dirty="0"/>
           </a:p>
         </p:txBody>
       </p:sp>
@@ -14597,7 +14599,7 @@
         <p:spPr>
           <a:xfrm>
             <a:off x="482501" y="330101"/>
-            <a:ext cx="7772400" cy="142875"/>
+            <a:ext cx="8342275" cy="152400"/>
           </a:xfrm>
           <a:prstGeom prst="rect">
             <a:avLst/>
@@ -14613,7 +14615,7 @@
               <a:buNone/>
             </a:pPr>
             <a:r>
-              <a:rPr lang="en-US" sz="1000" b="1" dirty="0">
+              <a:rPr lang="en-US" sz="1100" b="1" dirty="0">
                 <a:solidFill>
                   <a:srgbClr val="0969DA"/>
                 </a:solidFill>
@@ -14623,7 +14625,7 @@
               </a:rPr>
               <a:t>GENERATE AND PREVIEW</a:t>
             </a:r>
-            <a:endParaRPr lang="en-US" sz="1000" dirty="0"/>
+            <a:endParaRPr lang="en-US" sz="1100" dirty="0"/>
           </a:p>
         </p:txBody>
       </p:sp>
@@ -14635,8 +14637,8 @@
         </p:nvSpPr>
         <p:spPr>
           <a:xfrm>
-            <a:off x="482501" y="523726"/>
-            <a:ext cx="7772400" cy="393650"/>
+            <a:off x="482501" y="533251"/>
+            <a:ext cx="8342275" cy="419100"/>
           </a:xfrm>
           <a:prstGeom prst="rect">
             <a:avLst/>
@@ -14650,7 +14652,7 @@
           <a:p>
             <a:pPr algn="l" indent="0" marL="0">
               <a:lnSpc>
-                <a:spcPts val="3100"/>
+                <a:spcPts val="3300"/>
               </a:lnSpc>
               <a:spcBef>
                 <a:spcPts val="400"/>
@@ -14658,7 +14660,7 @@
               <a:buNone/>
             </a:pPr>
             <a:r>
-              <a:rPr lang="en-US" sz="2600" b="1" dirty="0">
+              <a:rPr lang="en-US" sz="2800" b="1" dirty="0">
                 <a:solidFill>
                   <a:srgbClr val="1F2328"/>
                 </a:solidFill>
@@ -14668,7 +14670,7 @@
               </a:rPr>
               <a:t>Generate, then preview</a:t>
             </a:r>
-            <a:endParaRPr lang="en-US" sz="2600" dirty="0"/>
+            <a:endParaRPr lang="en-US" sz="2800" dirty="0"/>
           </a:p>
         </p:txBody>
       </p:sp>
@@ -14680,12 +14682,12 @@
         </p:nvSpPr>
         <p:spPr>
           <a:xfrm>
-            <a:off x="634901" y="2067818"/>
-            <a:ext cx="7873901" cy="1934766"/>
+            <a:off x="634901" y="1846064"/>
+            <a:ext cx="7873901" cy="2429173"/>
           </a:xfrm>
           <a:prstGeom prst="roundRect">
             <a:avLst>
-              <a:gd name="adj" fmla="val 5251"/>
+              <a:gd name="adj" fmla="val 4183"/>
             </a:avLst>
           </a:prstGeom>
           <a:solidFill>
@@ -14719,7 +14721,7 @@
         </p:nvSpPr>
         <p:spPr>
           <a:xfrm>
-            <a:off x="634901" y="2072580"/>
+            <a:off x="634901" y="1850827"/>
             <a:ext cx="7873901" cy="0"/>
           </a:xfrm>
           <a:prstGeom prst="line">
@@ -14742,8 +14744,8 @@
         </p:nvSpPr>
         <p:spPr>
           <a:xfrm>
-            <a:off x="8504039" y="2067818"/>
-            <a:ext cx="0" cy="1934766"/>
+            <a:off x="8504039" y="1846064"/>
+            <a:ext cx="0" cy="2429173"/>
           </a:xfrm>
           <a:prstGeom prst="line">
             <a:avLst/>
@@ -14765,7 +14767,7 @@
         </p:nvSpPr>
         <p:spPr>
           <a:xfrm>
-            <a:off x="634901" y="3997821"/>
+            <a:off x="634901" y="4270474"/>
             <a:ext cx="7873901" cy="0"/>
           </a:xfrm>
           <a:prstGeom prst="line">
@@ -14788,8 +14790,8 @@
         </p:nvSpPr>
         <p:spPr>
           <a:xfrm>
-            <a:off x="663476" y="2067818"/>
-            <a:ext cx="0" cy="1934766"/>
+            <a:off x="663476" y="1846064"/>
+            <a:ext cx="0" cy="2429173"/>
           </a:xfrm>
           <a:prstGeom prst="line">
             <a:avLst/>
@@ -14819,8 +14821,8 @@
         </p:blipFill>
         <p:spPr>
           <a:xfrm>
-            <a:off x="945952" y="2280493"/>
-            <a:ext cx="165050" cy="165050"/>
+            <a:off x="971401" y="2084189"/>
+            <a:ext cx="190500" cy="190500"/>
           </a:xfrm>
           <a:prstGeom prst="rect">
             <a:avLst/>
@@ -14835,8 +14837,8 @@
         </p:nvSpPr>
         <p:spPr>
           <a:xfrm>
-            <a:off x="1187202" y="2296269"/>
-            <a:ext cx="1220054" cy="133350"/>
+            <a:off x="1238101" y="2103239"/>
+            <a:ext cx="1423169" cy="152400"/>
           </a:xfrm>
           <a:prstGeom prst="rect">
             <a:avLst/>
@@ -14852,7 +14854,7 @@
               <a:buNone/>
             </a:pPr>
             <a:r>
-              <a:rPr lang="en-US" sz="900" dirty="0">
+              <a:rPr lang="en-US" sz="1050" dirty="0">
                 <a:solidFill>
                   <a:srgbClr val="8250DF"/>
                 </a:solidFill>
@@ -14866,7 +14868,7 @@
               <a:buNone/>
             </a:pPr>
             <a:r>
-              <a:rPr lang="en-US" sz="900" b="1" dirty="0">
+              <a:rPr lang="en-US" sz="1050" b="1" dirty="0">
                 <a:solidFill>
                   <a:srgbClr val="818B98"/>
                 </a:solidFill>
@@ -14876,7 +14878,7 @@
               </a:rPr>
               <a:t> · ABRIDGED</a:t>
             </a:r>
-            <a:endParaRPr lang="en-US" sz="900" dirty="0"/>
+            <a:endParaRPr lang="en-US" sz="1050" dirty="0"/>
           </a:p>
         </p:txBody>
       </p:sp>
@@ -14888,8 +14890,8 @@
         </p:nvSpPr>
         <p:spPr>
           <a:xfrm>
-            <a:off x="945952" y="2547045"/>
-            <a:ext cx="7445413" cy="1217414"/>
+            <a:off x="971401" y="2388840"/>
+            <a:ext cx="7393496" cy="1622971"/>
           </a:xfrm>
           <a:prstGeom prst="rect">
             <a:avLst/>
@@ -14903,12 +14905,12 @@
           <a:p>
             <a:pPr algn="l" indent="0" marL="0">
               <a:lnSpc>
-                <a:spcPts val="1917"/>
+                <a:spcPts val="2556"/>
               </a:lnSpc>
               <a:buNone/>
             </a:pPr>
             <a:r>
-              <a:rPr lang="en-US" sz="1350" dirty="0">
+              <a:rPr lang="en-US" sz="1800" dirty="0">
                 <a:solidFill>
                   <a:srgbClr val="1F2328"/>
                 </a:solidFill>
@@ -14920,12 +14922,12 @@
             </a:r>
             <a:pPr algn="l" indent="0" marL="0">
               <a:lnSpc>
-                <a:spcPts val="1917"/>
+                <a:spcPts val="2556"/>
               </a:lnSpc>
               <a:buNone/>
             </a:pPr>
             <a:r>
-              <a:rPr lang="en-US" sz="1350" b="1" dirty="0">
+              <a:rPr lang="en-US" sz="1800" b="1" dirty="0">
                 <a:solidFill>
                   <a:srgbClr val="1F2328"/>
                 </a:solidFill>
@@ -14937,12 +14939,12 @@
             </a:r>
             <a:pPr algn="l" indent="0" marL="0">
               <a:lnSpc>
-                <a:spcPts val="1917"/>
+                <a:spcPts val="2556"/>
               </a:lnSpc>
               <a:buNone/>
             </a:pPr>
             <a:r>
-              <a:rPr lang="en-US" sz="1350" dirty="0">
+              <a:rPr lang="en-US" sz="1800" dirty="0">
                 <a:solidFill>
                   <a:srgbClr val="1F2328"/>
                 </a:solidFill>
@@ -14950,16 +14952,16 @@
                 <a:ea typeface="Arial" pitchFamily="34" charset="-122"/>
                 <a:cs typeface="Arial" pitchFamily="34" charset="-120"/>
               </a:rPr>
-              <a:t>. Generate secure passwords for all credentials and store them only in the azd environment. Set the Container App minReplicas to 1 … and use n8n's </a:t>
+              <a:t>. … Use n8n's </a:t>
             </a:r>
             <a:pPr algn="l" indent="0" marL="0">
               <a:lnSpc>
-                <a:spcPts val="1917"/>
+                <a:spcPts val="2556"/>
               </a:lnSpc>
               <a:buNone/>
             </a:pPr>
             <a:r>
-              <a:rPr lang="en-US" sz="1350" b="1" dirty="0">
+              <a:rPr lang="en-US" sz="1800" b="1" dirty="0">
                 <a:solidFill>
                   <a:srgbClr val="1F2328"/>
                 </a:solidFill>
@@ -14971,12 +14973,12 @@
             </a:r>
             <a:pPr algn="l" indent="0" marL="0">
               <a:lnSpc>
-                <a:spcPts val="1917"/>
+                <a:spcPts val="2556"/>
               </a:lnSpc>
               <a:buNone/>
             </a:pPr>
             <a:r>
-              <a:rPr lang="en-US" sz="1350" dirty="0">
+              <a:rPr lang="en-US" sz="1800" dirty="0">
                 <a:solidFill>
                   <a:srgbClr val="1F2328"/>
                 </a:solidFill>
@@ -14988,12 +14990,12 @@
             </a:r>
             <a:pPr algn="l" indent="0" marL="0">
               <a:lnSpc>
-                <a:spcPts val="1917"/>
+                <a:spcPts val="2556"/>
               </a:lnSpc>
               <a:buNone/>
             </a:pPr>
             <a:r>
-              <a:rPr lang="en-US" sz="1350" b="1" dirty="0">
+              <a:rPr lang="en-US" sz="1800" b="1" dirty="0">
                 <a:solidFill>
                   <a:srgbClr val="1F2328"/>
                 </a:solidFill>
@@ -15005,12 +15007,12 @@
             </a:r>
             <a:pPr algn="l" indent="0" marL="0">
               <a:lnSpc>
-                <a:spcPts val="1917"/>
+                <a:spcPts val="2556"/>
               </a:lnSpc>
               <a:buNone/>
             </a:pPr>
             <a:r>
-              <a:rPr lang="en-US" sz="1350" dirty="0">
+              <a:rPr lang="en-US" sz="1800" dirty="0">
                 <a:solidFill>
                   <a:srgbClr val="1F2328"/>
                 </a:solidFill>
@@ -15022,12 +15024,12 @@
             </a:r>
             <a:pPr algn="l" indent="0" marL="0">
               <a:lnSpc>
-                <a:spcPts val="1917"/>
+                <a:spcPts val="2556"/>
               </a:lnSpc>
               <a:buNone/>
             </a:pPr>
             <a:r>
-              <a:rPr lang="en-US" sz="1350" b="1" dirty="0">
+              <a:rPr lang="en-US" sz="1800" b="1" dirty="0">
                 <a:solidFill>
                   <a:srgbClr val="1F2328"/>
                 </a:solidFill>
@@ -15037,41 +15039,7 @@
               </a:rPr>
               <a:t>Don't run azd up.</a:t>
             </a:r>
-            <a:pPr algn="l" indent="0" marL="0">
-              <a:lnSpc>
-                <a:spcPts val="1917"/>
-              </a:lnSpc>
-              <a:buNone/>
-            </a:pPr>
-            <a:r>
-              <a:rPr lang="en-US" sz="1350" dirty="0">
-                <a:solidFill>
-                  <a:srgbClr val="1F2328"/>
-                </a:solidFill>
-                <a:latin typeface="Arial" pitchFamily="34" charset="0"/>
-                <a:ea typeface="Arial" pitchFamily="34" charset="-122"/>
-                <a:cs typeface="Arial" pitchFamily="34" charset="-120"/>
-              </a:rPr>
-              <a:t> … </a:t>
-            </a:r>
-            <a:pPr algn="l" indent="0" marL="0">
-              <a:lnSpc>
-                <a:spcPts val="1917"/>
-              </a:lnSpc>
-              <a:buNone/>
-            </a:pPr>
-            <a:r>
-              <a:rPr lang="en-US" sz="1350" b="1" dirty="0">
-                <a:solidFill>
-                  <a:srgbClr val="1F2328"/>
-                </a:solidFill>
-                <a:latin typeface="Arial" pitchFamily="34" charset="0"/>
-                <a:ea typeface="Arial" pitchFamily="34" charset="-122"/>
-                <a:cs typeface="Arial" pitchFamily="34" charset="-120"/>
-              </a:rPr>
-              <a:t>Do not print secrets.</a:t>
-            </a:r>
-            <a:endParaRPr lang="en-US" sz="1350" dirty="0"/>
+            <a:endParaRPr lang="en-US" sz="1800" dirty="0"/>
           </a:p>
         </p:txBody>
       </p:sp>
@@ -15115,12 +15083,12 @@
         </p:nvSpPr>
         <p:spPr>
           <a:xfrm>
-            <a:off x="8077200" y="152400"/>
-            <a:ext cx="482650" cy="266700"/>
+            <a:off x="8026598" y="152400"/>
+            <a:ext cx="533251" cy="279350"/>
           </a:xfrm>
           <a:prstGeom prst="roundRect">
             <a:avLst>
-              <a:gd name="adj" fmla="val 23810"/>
+              <a:gd name="adj" fmla="val 22731"/>
             </a:avLst>
           </a:prstGeom>
           <a:solidFill>
@@ -15147,8 +15115,8 @@
         </p:nvSpPr>
         <p:spPr>
           <a:xfrm>
-            <a:off x="8201863" y="219075"/>
-            <a:ext cx="233324" cy="133350"/>
+            <a:off x="8163659" y="220563"/>
+            <a:ext cx="259131" cy="142875"/>
           </a:xfrm>
           <a:prstGeom prst="rect">
             <a:avLst/>
@@ -15164,7 +15132,7 @@
               <a:buNone/>
             </a:pPr>
             <a:r>
-              <a:rPr lang="en-US" sz="900" b="1" dirty="0">
+              <a:rPr lang="en-US" sz="1000" b="1" dirty="0">
                 <a:solidFill>
                   <a:srgbClr val="FFFFFF"/>
                 </a:solidFill>
@@ -15174,7 +15142,7 @@
               </a:rPr>
               <a:t>N8N</a:t>
             </a:r>
-            <a:endParaRPr lang="en-US" sz="900" dirty="0"/>
+            <a:endParaRPr lang="en-US" sz="1000" dirty="0"/>
           </a:p>
         </p:txBody>
       </p:sp>
@@ -15211,7 +15179,7 @@
         <p:spPr>
           <a:xfrm>
             <a:off x="482501" y="330101"/>
-            <a:ext cx="7772400" cy="142875"/>
+            <a:ext cx="8342275" cy="152400"/>
           </a:xfrm>
           <a:prstGeom prst="rect">
             <a:avLst/>
@@ -15227,7 +15195,7 @@
               <a:buNone/>
             </a:pPr>
             <a:r>
-              <a:rPr lang="en-US" sz="1000" b="1" dirty="0">
+              <a:rPr lang="en-US" sz="1100" b="1" dirty="0">
                 <a:solidFill>
                   <a:srgbClr val="0969DA"/>
                 </a:solidFill>
@@ -15237,7 +15205,7 @@
               </a:rPr>
               <a:t>APP QUIRK</a:t>
             </a:r>
-            <a:endParaRPr lang="en-US" sz="1000" dirty="0"/>
+            <a:endParaRPr lang="en-US" sz="1100" dirty="0"/>
           </a:p>
         </p:txBody>
       </p:sp>
@@ -15249,8 +15217,8 @@
         </p:nvSpPr>
         <p:spPr>
           <a:xfrm>
-            <a:off x="482501" y="523726"/>
-            <a:ext cx="7772400" cy="393650"/>
+            <a:off x="482501" y="533251"/>
+            <a:ext cx="8342275" cy="419100"/>
           </a:xfrm>
           <a:prstGeom prst="rect">
             <a:avLst/>
@@ -15264,7 +15232,7 @@
           <a:p>
             <a:pPr algn="l" indent="0" marL="0">
               <a:lnSpc>
-                <a:spcPts val="3100"/>
+                <a:spcPts val="3300"/>
               </a:lnSpc>
               <a:spcBef>
                 <a:spcPts val="400"/>
@@ -15272,7 +15240,7 @@
               <a:buNone/>
             </a:pPr>
             <a:r>
-              <a:rPr lang="en-US" sz="2600" b="1" dirty="0">
+              <a:rPr lang="en-US" sz="2800" b="1" dirty="0">
                 <a:solidFill>
                   <a:srgbClr val="1F2328"/>
                 </a:solidFill>
@@ -15282,7 +15250,7 @@
               </a:rPr>
               <a:t>n8n needs time to start</a:t>
             </a:r>
-            <a:endParaRPr lang="en-US" sz="2600" dirty="0"/>
+            <a:endParaRPr lang="en-US" sz="2800" dirty="0"/>
           </a:p>
         </p:txBody>
       </p:sp>
@@ -15302,7 +15270,7 @@
         </p:blipFill>
         <p:spPr>
           <a:xfrm>
-            <a:off x="1473696" y="1282601"/>
+            <a:off x="1473696" y="1308050"/>
             <a:ext cx="6196310" cy="3454301"/>
           </a:xfrm>
           <a:prstGeom prst="rect">
